--- a/Bus Booking Analytics System (PowerBI)/documents/Bus_Booking_Analytics_PowerBI_light.pptx
+++ b/Bus Booking Analytics System (PowerBI)/documents/Bus_Booking_Analytics_PowerBI_light.pptx
@@ -18,6 +18,8 @@
     <p:sldId id="266" r:id="rId17"/>
     <p:sldId id="267" r:id="rId18"/>
     <p:sldId id="268" r:id="rId19"/>
+    <p:sldId id="269" r:id="rId20"/>
+    <p:sldId id="270" r:id="rId21"/>
   </p:sldIdLst>
   <p:sldSz cx="12188952" cy="6858000" type="screen4x3"/>
   <p:notesSz cx="6858000" cy="9144000"/>
@@ -3133,7 +3135,7 @@
             <a:pPr>
               <a:defRPr sz="1400" b="1">
                 <a:solidFill>
-                  <a:srgbClr val="4F46E5"/>
+                  <a:srgbClr val="2563EB"/>
                 </a:solidFill>
                 <a:latin typeface="Segoe UI"/>
               </a:defRPr>
@@ -3302,8 +3304,8 @@
         </p:nvSpPr>
         <p:spPr>
           <a:xfrm>
-            <a:off x="548640" y="457200"/>
-            <a:ext cx="1371600" cy="1097280"/>
+            <a:off x="548640" y="365760"/>
+            <a:ext cx="1371600" cy="822960"/>
           </a:xfrm>
           <a:prstGeom prst="rect">
             <a:avLst/>
@@ -3317,9 +3319,9 @@
           <a:lstStyle/>
           <a:p>
             <a:pPr>
-              <a:defRPr sz="3600" b="1">
-                <a:solidFill>
-                  <a:srgbClr val="4F46E5"/>
+              <a:defRPr sz="3800" b="1">
+                <a:solidFill>
+                  <a:srgbClr val="2563EB"/>
                 </a:solidFill>
                 <a:latin typeface="Segoe UI"/>
               </a:defRPr>
@@ -3338,7 +3340,7 @@
         </p:nvSpPr>
         <p:spPr>
           <a:xfrm>
-            <a:off x="548640" y="1417320"/>
+            <a:off x="548640" y="1280160"/>
             <a:ext cx="3657600" cy="36576"/>
           </a:xfrm>
           <a:prstGeom prst="rect">
@@ -3362,8 +3364,8 @@
         </p:nvSpPr>
         <p:spPr>
           <a:xfrm>
-            <a:off x="548640" y="1554480"/>
-            <a:ext cx="7315200" cy="640080"/>
+            <a:off x="548640" y="1417320"/>
+            <a:ext cx="8229600" cy="640080"/>
           </a:xfrm>
           <a:prstGeom prst="rect">
             <a:avLst/>
@@ -3385,7 +3387,7 @@
               </a:defRPr>
             </a:pPr>
             <a:r>
-              <a:t>Customer Profiles &amp; Cohort Retention</a:t>
+              <a:t>Customer Profiles &amp; Cohort Retention (Page 4)</a:t>
             </a:r>
           </a:p>
         </p:txBody>
@@ -3421,7 +3423,7 @@
               </a:defRPr>
             </a:pPr>
             <a:r>
-              <a:t>10 / 10</a:t>
+              <a:t>10 / 14</a:t>
             </a:r>
           </a:p>
         </p:txBody>
@@ -3454,13 +3456,13 @@
               </a:spcAft>
               <a:defRPr sz="1500" b="1">
                 <a:solidFill>
-                  <a:srgbClr val="4F46E5"/>
-                </a:solidFill>
-                <a:latin typeface="Segoe UI"/>
-              </a:defRPr>
-            </a:pPr>
-            <a:r>
-              <a:t>PAGE 4: COHORT LOYALTY &amp; BRACKETS</a:t>
+                  <a:srgbClr val="2563EB"/>
+                </a:solidFill>
+                <a:latin typeface="Segoe UI"/>
+              </a:defRPr>
+            </a:pPr>
+            <a:r>
+              <a:t>COHORT LOYALTY &amp; BRACKETS</a:t>
             </a:r>
           </a:p>
           <a:p>
@@ -3531,7 +3533,7 @@
       </p:sp>
       <p:pic>
         <p:nvPicPr>
-          <p:cNvPr id="7" name="Picture 6" descr="media__1784141762506.png"/>
+          <p:cNvPr id="7" name="Picture 6" descr="Screenshot 2026-07-16 005322.png"/>
           <p:cNvPicPr>
             <a:picLocks noChangeAspect="1"/>
           </p:cNvPicPr>
@@ -3599,8 +3601,8 @@
         </p:nvSpPr>
         <p:spPr>
           <a:xfrm>
-            <a:off x="548640" y="457200"/>
-            <a:ext cx="1371600" cy="1097280"/>
+            <a:off x="548640" y="365760"/>
+            <a:ext cx="1371600" cy="822960"/>
           </a:xfrm>
           <a:prstGeom prst="rect">
             <a:avLst/>
@@ -3614,9 +3616,9 @@
           <a:lstStyle/>
           <a:p>
             <a:pPr>
-              <a:defRPr sz="3600" b="1">
-                <a:solidFill>
-                  <a:srgbClr val="4F46E5"/>
+              <a:defRPr sz="3800" b="1">
+                <a:solidFill>
+                  <a:srgbClr val="2563EB"/>
                 </a:solidFill>
                 <a:latin typeface="Segoe UI"/>
               </a:defRPr>
@@ -3635,7 +3637,7 @@
         </p:nvSpPr>
         <p:spPr>
           <a:xfrm>
-            <a:off x="548640" y="1417320"/>
+            <a:off x="548640" y="1280160"/>
             <a:ext cx="3657600" cy="36576"/>
           </a:xfrm>
           <a:prstGeom prst="rect">
@@ -3659,8 +3661,8 @@
         </p:nvSpPr>
         <p:spPr>
           <a:xfrm>
-            <a:off x="548640" y="1554480"/>
-            <a:ext cx="7315200" cy="640080"/>
+            <a:off x="548640" y="1417320"/>
+            <a:ext cx="8229600" cy="640080"/>
           </a:xfrm>
           <a:prstGeom prst="rect">
             <a:avLst/>
@@ -3682,7 +3684,7 @@
               </a:defRPr>
             </a:pPr>
             <a:r>
-              <a:t>Fleet Utilization &amp; Seating Capacity</a:t>
+              <a:t>Fleet Utilization &amp; Seating Capacity (Page 5)</a:t>
             </a:r>
           </a:p>
         </p:txBody>
@@ -3718,7 +3720,7 @@
               </a:defRPr>
             </a:pPr>
             <a:r>
-              <a:t>11 / 10</a:t>
+              <a:t>11 / 14</a:t>
             </a:r>
           </a:p>
         </p:txBody>
@@ -3751,13 +3753,13 @@
               </a:spcAft>
               <a:defRPr sz="1500" b="1">
                 <a:solidFill>
-                  <a:srgbClr val="4F46E5"/>
-                </a:solidFill>
-                <a:latin typeface="Segoe UI"/>
-              </a:defRPr>
-            </a:pPr>
-            <a:r>
-              <a:t>PAGE 5: LOAD FACTORS &amp; ASSETS</a:t>
+                  <a:srgbClr val="2563EB"/>
+                </a:solidFill>
+                <a:latin typeface="Segoe UI"/>
+              </a:defRPr>
+            </a:pPr>
+            <a:r>
+              <a:t>LOAD FACTORS &amp; ASSETS</a:t>
             </a:r>
           </a:p>
           <a:p>
@@ -3828,7 +3830,7 @@
       </p:sp>
       <p:pic>
         <p:nvPicPr>
-          <p:cNvPr id="7" name="Picture 6" descr="media__1784141792242.png"/>
+          <p:cNvPr id="7" name="Picture 6" descr="Screenshot 2026-07-16 005337.png"/>
           <p:cNvPicPr>
             <a:picLocks noChangeAspect="1"/>
           </p:cNvPicPr>
@@ -3896,8 +3898,8 @@
         </p:nvSpPr>
         <p:spPr>
           <a:xfrm>
-            <a:off x="548640" y="457200"/>
-            <a:ext cx="1371600" cy="1097280"/>
+            <a:off x="548640" y="365760"/>
+            <a:ext cx="1371600" cy="822960"/>
           </a:xfrm>
           <a:prstGeom prst="rect">
             <a:avLst/>
@@ -3911,9 +3913,9 @@
           <a:lstStyle/>
           <a:p>
             <a:pPr>
-              <a:defRPr sz="3600" b="1">
-                <a:solidFill>
-                  <a:srgbClr val="4F46E5"/>
+              <a:defRPr sz="3800" b="1">
+                <a:solidFill>
+                  <a:srgbClr val="2563EB"/>
                 </a:solidFill>
                 <a:latin typeface="Segoe UI"/>
               </a:defRPr>
@@ -3932,7 +3934,7 @@
         </p:nvSpPr>
         <p:spPr>
           <a:xfrm>
-            <a:off x="548640" y="1417320"/>
+            <a:off x="548640" y="1280160"/>
             <a:ext cx="3657600" cy="36576"/>
           </a:xfrm>
           <a:prstGeom prst="rect">
@@ -3956,8 +3958,8 @@
         </p:nvSpPr>
         <p:spPr>
           <a:xfrm>
-            <a:off x="548640" y="1554480"/>
-            <a:ext cx="7315200" cy="640080"/>
+            <a:off x="548640" y="1417320"/>
+            <a:ext cx="8229600" cy="640080"/>
           </a:xfrm>
           <a:prstGeom prst="rect">
             <a:avLst/>
@@ -3979,7 +3981,7 @@
               </a:defRPr>
             </a:pPr>
             <a:r>
-              <a:t>Strategic Recommendations</a:t>
+              <a:t>Route Performance &amp; Market Demands (Page 6)</a:t>
             </a:r>
           </a:p>
         </p:txBody>
@@ -4015,7 +4017,7 @@
               </a:defRPr>
             </a:pPr>
             <a:r>
-              <a:t>12 / 10</a:t>
+              <a:t>12 / 14</a:t>
             </a:r>
           </a:p>
         </p:txBody>
@@ -4028,8 +4030,8 @@
         </p:nvSpPr>
         <p:spPr>
           <a:xfrm>
-            <a:off x="457200" y="2377440"/>
-            <a:ext cx="5303520" cy="1645920"/>
+            <a:off x="548640" y="2377440"/>
+            <a:ext cx="5303520" cy="3657600"/>
           </a:xfrm>
           <a:prstGeom prst="rect">
             <a:avLst/>
@@ -4044,21 +4046,24 @@
           <a:p>
             <a:pPr>
               <a:spcAft>
-                <a:spcPts val="600"/>
-              </a:spcAft>
-              <a:defRPr sz="1400" b="1">
-                <a:solidFill>
-                  <a:srgbClr val="4F46E5"/>
-                </a:solidFill>
-                <a:latin typeface="Segoe UI"/>
-              </a:defRPr>
-            </a:pPr>
-            <a:r>
-              <a:t>▪ 🎫 Pricing Managers</a:t>
-            </a:r>
-          </a:p>
-          <a:p>
-            <a:pPr>
+                <a:spcPts val="1500"/>
+              </a:spcAft>
+              <a:defRPr sz="1500" b="1">
+                <a:solidFill>
+                  <a:srgbClr val="2563EB"/>
+                </a:solidFill>
+                <a:latin typeface="Segoe UI"/>
+              </a:defRPr>
+            </a:pPr>
+            <a:r>
+              <a:t>PASSENGER CORRIDORS &amp; VOLUMES</a:t>
+            </a:r>
+          </a:p>
+          <a:p>
+            <a:pPr>
+              <a:spcAft>
+                <a:spcPts val="1200"/>
+              </a:spcAft>
               <a:defRPr sz="1150">
                 <a:solidFill>
                   <a:srgbClr val="334155"/>
@@ -4067,167 +4072,83 @@
               </a:defRPr>
             </a:pPr>
             <a:r>
-              <a:t>Leverage dynamic pricing during May-June peaks. Elevate AC Sleeper rates by 10% on high-demand weekends to capture maximum yield.</a:t>
-            </a:r>
-          </a:p>
-        </p:txBody>
-      </p:sp>
-      <p:sp>
-        <p:nvSpPr>
-          <p:cNvPr id="7" name="TextBox 6"/>
-          <p:cNvSpPr txBox="1"/>
-          <p:nvPr/>
-        </p:nvSpPr>
-        <p:spPr>
-          <a:xfrm>
-            <a:off x="6217920" y="2377440"/>
-            <a:ext cx="5303520" cy="1645920"/>
+              <a:t>◆  Monitors city-to-city commuter traffic flows across active routes.</a:t>
+            </a:r>
+          </a:p>
+          <a:p>
+            <a:pPr>
+              <a:spcAft>
+                <a:spcPts val="1200"/>
+              </a:spcAft>
+              <a:defRPr sz="1150">
+                <a:solidFill>
+                  <a:srgbClr val="334155"/>
+                </a:solidFill>
+                <a:latin typeface="Segoe UI"/>
+              </a:defRPr>
+            </a:pPr>
+            <a:r>
+              <a:t>◆  High-density routes like Mumbai-Ahmedabad and Bangalore-Hyderabad represent peak revenue generators.</a:t>
+            </a:r>
+          </a:p>
+          <a:p>
+            <a:pPr>
+              <a:spcAft>
+                <a:spcPts val="1200"/>
+              </a:spcAft>
+              <a:defRPr sz="1150">
+                <a:solidFill>
+                  <a:srgbClr val="334155"/>
+                </a:solidFill>
+                <a:latin typeface="Segoe UI"/>
+              </a:defRPr>
+            </a:pPr>
+            <a:r>
+              <a:t>◆  Average distance traveled scales cleanly with revenue per seat run.</a:t>
+            </a:r>
+          </a:p>
+          <a:p>
+            <a:pPr>
+              <a:spcAft>
+                <a:spcPts val="1200"/>
+              </a:spcAft>
+              <a:defRPr sz="1150">
+                <a:solidFill>
+                  <a:srgbClr val="334155"/>
+                </a:solidFill>
+                <a:latin typeface="Segoe UI"/>
+              </a:defRPr>
+            </a:pPr>
+            <a:r>
+              <a:t>◆  Guides tactical route planning for vehicle redeployment.</a:t>
+            </a:r>
+          </a:p>
+        </p:txBody>
+      </p:sp>
+      <p:pic>
+        <p:nvPicPr>
+          <p:cNvPr id="7" name="Picture 6" descr="Screenshot 2026-07-16 005354.png"/>
+          <p:cNvPicPr>
+            <a:picLocks noChangeAspect="1"/>
+          </p:cNvPicPr>
+          <p:nvPr/>
+        </p:nvPicPr>
+        <p:blipFill>
+          <a:blip r:embed="rId2"/>
+          <a:stretch>
+            <a:fillRect/>
+          </a:stretch>
+        </p:blipFill>
+        <p:spPr>
+          <a:xfrm>
+            <a:off x="6217920" y="2286000"/>
+            <a:ext cx="5394960" cy="3035808"/>
           </a:xfrm>
           <a:prstGeom prst="rect">
             <a:avLst/>
           </a:prstGeom>
-          <a:noFill/>
-        </p:spPr>
-        <p:txBody>
-          <a:bodyPr wrap="square">
-            <a:spAutoFit/>
-          </a:bodyPr>
-          <a:lstStyle/>
-          <a:p>
-            <a:pPr>
-              <a:spcAft>
-                <a:spcPts val="600"/>
-              </a:spcAft>
-              <a:defRPr sz="1400" b="1">
-                <a:solidFill>
-                  <a:srgbClr val="4F46E5"/>
-                </a:solidFill>
-                <a:latin typeface="Segoe UI"/>
-              </a:defRPr>
-            </a:pPr>
-            <a:r>
-              <a:t>▪ 🚌 Dispatch Coordinators</a:t>
-            </a:r>
-          </a:p>
-          <a:p>
-            <a:pPr>
-              <a:defRPr sz="1150">
-                <a:solidFill>
-                  <a:srgbClr val="334155"/>
-                </a:solidFill>
-                <a:latin typeface="Segoe UI"/>
-              </a:defRPr>
-            </a:pPr>
-            <a:r>
-              <a:t>Improve the 51% fleet load factor. Consolidate low-occupancy weekday runs and reassign AC Seater buses to peak Bangalore/Delhi schedules.</a:t>
-            </a:r>
-          </a:p>
-        </p:txBody>
-      </p:sp>
-      <p:sp>
-        <p:nvSpPr>
-          <p:cNvPr id="8" name="TextBox 7"/>
-          <p:cNvSpPr txBox="1"/>
-          <p:nvPr/>
-        </p:nvSpPr>
-        <p:spPr>
-          <a:xfrm>
-            <a:off x="457200" y="4297680"/>
-            <a:ext cx="5303520" cy="1645920"/>
-          </a:xfrm>
-          <a:prstGeom prst="rect">
-            <a:avLst/>
-          </a:prstGeom>
-          <a:noFill/>
-        </p:spPr>
-        <p:txBody>
-          <a:bodyPr wrap="square">
-            <a:spAutoFit/>
-          </a:bodyPr>
-          <a:lstStyle/>
-          <a:p>
-            <a:pPr>
-              <a:spcAft>
-                <a:spcPts val="600"/>
-              </a:spcAft>
-              <a:defRPr sz="1400" b="1">
-                <a:solidFill>
-                  <a:srgbClr val="4F46E5"/>
-                </a:solidFill>
-                <a:latin typeface="Segoe UI"/>
-              </a:defRPr>
-            </a:pPr>
-            <a:r>
-              <a:t>▪ 📢 Marketing Specialists</a:t>
-            </a:r>
-          </a:p>
-          <a:p>
-            <a:pPr>
-              <a:defRPr sz="1150">
-                <a:solidFill>
-                  <a:srgbClr val="334155"/>
-                </a:solidFill>
-                <a:latin typeface="Segoe UI"/>
-              </a:defRPr>
-            </a:pPr>
-            <a:r>
-              <a:t>Launch targeted loyalty campaigns to boost retention past the 80% mark, focusing on the highly-profitable 25-45 age group bracket.</a:t>
-            </a:r>
-          </a:p>
-        </p:txBody>
-      </p:sp>
-      <p:sp>
-        <p:nvSpPr>
-          <p:cNvPr id="9" name="TextBox 8"/>
-          <p:cNvSpPr txBox="1"/>
-          <p:nvPr/>
-        </p:nvSpPr>
-        <p:spPr>
-          <a:xfrm>
-            <a:off x="6217920" y="4297680"/>
-            <a:ext cx="5303520" cy="1645920"/>
-          </a:xfrm>
-          <a:prstGeom prst="rect">
-            <a:avLst/>
-          </a:prstGeom>
-          <a:noFill/>
-        </p:spPr>
-        <p:txBody>
-          <a:bodyPr wrap="square">
-            <a:spAutoFit/>
-          </a:bodyPr>
-          <a:lstStyle/>
-          <a:p>
-            <a:pPr>
-              <a:spcAft>
-                <a:spcPts val="600"/>
-              </a:spcAft>
-              <a:defRPr sz="1400" b="1">
-                <a:solidFill>
-                  <a:srgbClr val="4F46E5"/>
-                </a:solidFill>
-                <a:latin typeface="Segoe UI"/>
-              </a:defRPr>
-            </a:pPr>
-            <a:r>
-              <a:t>▪ ⚙️ System Architects</a:t>
-            </a:r>
-          </a:p>
-          <a:p>
-            <a:pPr>
-              <a:defRPr sz="1150">
-                <a:solidFill>
-                  <a:srgbClr val="334155"/>
-                </a:solidFill>
-                <a:latin typeface="Segoe UI"/>
-              </a:defRPr>
-            </a:pPr>
-            <a:r>
-              <a:t>Preserve the MySQL relational schema for secure append runs. Protect local server config details inside separated configuration keys.</a:t>
-            </a:r>
-          </a:p>
-        </p:txBody>
-      </p:sp>
+        </p:spPr>
+      </p:pic>
     </p:spTree>
   </p:cSld>
   <mc:AlternateContent xmlns:mc="http://schemas.openxmlformats.org/markup-compatibility/2006">
@@ -4274,8 +4195,68 @@
         </p:nvSpPr>
         <p:spPr>
           <a:xfrm>
-            <a:off x="1828800" y="2468880"/>
-            <a:ext cx="8503920" cy="1371600"/>
+            <a:off x="548640" y="365760"/>
+            <a:ext cx="1371600" cy="822960"/>
+          </a:xfrm>
+          <a:prstGeom prst="rect">
+            <a:avLst/>
+          </a:prstGeom>
+          <a:noFill/>
+        </p:spPr>
+        <p:txBody>
+          <a:bodyPr wrap="none">
+            <a:spAutoFit/>
+          </a:bodyPr>
+          <a:lstStyle/>
+          <a:p>
+            <a:pPr>
+              <a:defRPr sz="3800" b="1">
+                <a:solidFill>
+                  <a:srgbClr val="2563EB"/>
+                </a:solidFill>
+                <a:latin typeface="Segoe UI"/>
+              </a:defRPr>
+            </a:pPr>
+            <a:r>
+              <a:t>12</a:t>
+            </a:r>
+          </a:p>
+        </p:txBody>
+      </p:sp>
+      <p:sp>
+        <p:nvSpPr>
+          <p:cNvPr id="3" name="TextBox 2"/>
+          <p:cNvSpPr txBox="1"/>
+          <p:nvPr/>
+        </p:nvSpPr>
+        <p:spPr>
+          <a:xfrm>
+            <a:off x="548640" y="1280160"/>
+            <a:ext cx="3657600" cy="36576"/>
+          </a:xfrm>
+          <a:prstGeom prst="rect">
+            <a:avLst/>
+          </a:prstGeom>
+          <a:noFill/>
+        </p:spPr>
+        <p:txBody>
+          <a:bodyPr wrap="none">
+            <a:spAutoFit/>
+          </a:bodyPr>
+          <a:lstStyle/>
+          <a:p/>
+        </p:txBody>
+      </p:sp>
+      <p:sp>
+        <p:nvSpPr>
+          <p:cNvPr id="4" name="TextBox 3"/>
+          <p:cNvSpPr txBox="1"/>
+          <p:nvPr/>
+        </p:nvSpPr>
+        <p:spPr>
+          <a:xfrm>
+            <a:off x="548640" y="1417320"/>
+            <a:ext cx="8229600" cy="640080"/>
           </a:xfrm>
           <a:prstGeom prst="rect">
             <a:avLst/>
@@ -4288,30 +4269,30 @@
           </a:bodyPr>
           <a:lstStyle/>
           <a:p>
-            <a:pPr algn="ctr">
-              <a:defRPr sz="4800" b="1">
-                <a:solidFill>
-                  <a:srgbClr val="4F46E5"/>
-                </a:solidFill>
-                <a:latin typeface="Segoe UI"/>
-              </a:defRPr>
-            </a:pPr>
-            <a:r>
-              <a:t>Thank You</a:t>
-            </a:r>
-          </a:p>
-        </p:txBody>
-      </p:sp>
-      <p:sp>
-        <p:nvSpPr>
-          <p:cNvPr id="3" name="TextBox 2"/>
+            <a:pPr>
+              <a:defRPr sz="2400" b="1">
+                <a:solidFill>
+                  <a:srgbClr val="0F172A"/>
+                </a:solidFill>
+                <a:latin typeface="Segoe UI"/>
+              </a:defRPr>
+            </a:pPr>
+            <a:r>
+              <a:t>Operational Reports &amp; Auditing (Page 7)</a:t>
+            </a:r>
+          </a:p>
+        </p:txBody>
+      </p:sp>
+      <p:sp>
+        <p:nvSpPr>
+          <p:cNvPr id="5" name="TextBox 4"/>
           <p:cNvSpPr txBox="1"/>
           <p:nvPr/>
         </p:nvSpPr>
         <p:spPr>
           <a:xfrm>
-            <a:off x="1828800" y="3840480"/>
-            <a:ext cx="8503920" cy="548640"/>
+            <a:off x="365760" y="6309360"/>
+            <a:ext cx="1371600" cy="365760"/>
           </a:xfrm>
           <a:prstGeom prst="rect">
             <a:avLst/>
@@ -4324,30 +4305,195 @@
           </a:bodyPr>
           <a:lstStyle/>
           <a:p>
-            <a:pPr algn="ctr">
-              <a:defRPr sz="1600" b="1">
-                <a:solidFill>
-                  <a:srgbClr val="0F172A"/>
-                </a:solidFill>
-                <a:latin typeface="Segoe UI"/>
-              </a:defRPr>
-            </a:pPr>
-            <a:r>
-              <a:t>Bus Booking Analytics System  |  Phase 2 Final Project</a:t>
-            </a:r>
-          </a:p>
-        </p:txBody>
-      </p:sp>
-      <p:sp>
-        <p:nvSpPr>
-          <p:cNvPr id="4" name="TextBox 3"/>
+            <a:pPr>
+              <a:defRPr sz="1100">
+                <a:solidFill>
+                  <a:srgbClr val="64748B"/>
+                </a:solidFill>
+                <a:latin typeface="Segoe UI"/>
+              </a:defRPr>
+            </a:pPr>
+            <a:r>
+              <a:t>13 / 14</a:t>
+            </a:r>
+          </a:p>
+        </p:txBody>
+      </p:sp>
+      <p:sp>
+        <p:nvSpPr>
+          <p:cNvPr id="6" name="TextBox 5"/>
           <p:cNvSpPr txBox="1"/>
           <p:nvPr/>
         </p:nvSpPr>
         <p:spPr>
           <a:xfrm>
-            <a:off x="1828800" y="4480560"/>
-            <a:ext cx="8503920" cy="822960"/>
+            <a:off x="548640" y="2377440"/>
+            <a:ext cx="5303520" cy="3657600"/>
+          </a:xfrm>
+          <a:prstGeom prst="rect">
+            <a:avLst/>
+          </a:prstGeom>
+          <a:noFill/>
+        </p:spPr>
+        <p:txBody>
+          <a:bodyPr wrap="square">
+            <a:spAutoFit/>
+          </a:bodyPr>
+          <a:lstStyle/>
+          <a:p>
+            <a:pPr>
+              <a:spcAft>
+                <a:spcPts val="1500"/>
+              </a:spcAft>
+              <a:defRPr sz="1500" b="1">
+                <a:solidFill>
+                  <a:srgbClr val="2563EB"/>
+                </a:solidFill>
+                <a:latin typeface="Segoe UI"/>
+              </a:defRPr>
+            </a:pPr>
+            <a:r>
+              <a:t>AUDIT RECORDS &amp; EXPORTS</a:t>
+            </a:r>
+          </a:p>
+          <a:p>
+            <a:pPr>
+              <a:spcAft>
+                <a:spcPts val="1200"/>
+              </a:spcAft>
+              <a:defRPr sz="1150">
+                <a:solidFill>
+                  <a:srgbClr val="334155"/>
+                </a:solidFill>
+                <a:latin typeface="Segoe UI"/>
+              </a:defRPr>
+            </a:pPr>
+            <a:r>
+              <a:t>◆  Granular transaction tables list exact passenger rows.</a:t>
+            </a:r>
+          </a:p>
+          <a:p>
+            <a:pPr>
+              <a:spcAft>
+                <a:spcPts val="1200"/>
+              </a:spcAft>
+              <a:defRPr sz="1150">
+                <a:solidFill>
+                  <a:srgbClr val="334155"/>
+                </a:solidFill>
+                <a:latin typeface="Segoe UI"/>
+              </a:defRPr>
+            </a:pPr>
+            <a:r>
+              <a:t>◆  Integrated dynamic search bars look up booking IDs and customer details instantly.</a:t>
+            </a:r>
+          </a:p>
+          <a:p>
+            <a:pPr>
+              <a:spcAft>
+                <a:spcPts val="1200"/>
+              </a:spcAft>
+              <a:defRPr sz="1150">
+                <a:solidFill>
+                  <a:srgbClr val="334155"/>
+                </a:solidFill>
+                <a:latin typeface="Segoe UI"/>
+              </a:defRPr>
+            </a:pPr>
+            <a:r>
+              <a:t>◆  Supports direct CSV table exports for spreadsheet calculations.</a:t>
+            </a:r>
+          </a:p>
+          <a:p>
+            <a:pPr>
+              <a:spcAft>
+                <a:spcPts val="1200"/>
+              </a:spcAft>
+              <a:defRPr sz="1150">
+                <a:solidFill>
+                  <a:srgbClr val="334155"/>
+                </a:solidFill>
+                <a:latin typeface="Segoe UI"/>
+              </a:defRPr>
+            </a:pPr>
+            <a:r>
+              <a:t>◆  Formatted alternating rows improve visual scannability.</a:t>
+            </a:r>
+          </a:p>
+        </p:txBody>
+      </p:sp>
+      <p:pic>
+        <p:nvPicPr>
+          <p:cNvPr id="7" name="Picture 6" descr="Screenshot 2026-07-16 005410.png"/>
+          <p:cNvPicPr>
+            <a:picLocks noChangeAspect="1"/>
+          </p:cNvPicPr>
+          <p:nvPr/>
+        </p:nvPicPr>
+        <p:blipFill>
+          <a:blip r:embed="rId2"/>
+          <a:stretch>
+            <a:fillRect/>
+          </a:stretch>
+        </p:blipFill>
+        <p:spPr>
+          <a:xfrm>
+            <a:off x="6217920" y="2286000"/>
+            <a:ext cx="5394960" cy="3035808"/>
+          </a:xfrm>
+          <a:prstGeom prst="rect">
+            <a:avLst/>
+          </a:prstGeom>
+        </p:spPr>
+      </p:pic>
+    </p:spTree>
+  </p:cSld>
+  <mc:AlternateContent xmlns:mc="http://schemas.openxmlformats.org/markup-compatibility/2006">
+    <mc:Choice xmlns:p14="http://schemas.microsoft.com/office/powerpoint/2010/main" Requires="p14">
+      <p:transition spd="slow">
+        <p:fade/>
+      </p:transition>
+    </mc:Choice>
+    <mc:Fallback>
+      <p:transition spd="slow">
+        <p:fade/>
+      </p:transition>
+    </mc:Fallback>
+  </mc:AlternateContent>
+  <p:clrMapOvr>
+    <a:masterClrMapping/>
+  </p:clrMapOvr>
+</p:sld>
+</file>
+
+<file path=ppt/slides/slide14.xml><?xml version="1.0" encoding="utf-8"?>
+<p:sld xmlns:a="http://schemas.openxmlformats.org/drawingml/2006/main" xmlns:p="http://schemas.openxmlformats.org/presentationml/2006/main" xmlns:r="http://schemas.openxmlformats.org/officeDocument/2006/relationships">
+  <p:cSld>
+    <p:bg>
+      <p:bgPr>
+        <a:solidFill>
+          <a:srgbClr val="FFFFFF"/>
+        </a:solidFill>
+        <a:effectLst/>
+      </p:bgPr>
+    </p:bg>
+    <p:spTree>
+      <p:nvGrpSpPr>
+        <p:cNvPr id="1" name=""/>
+        <p:cNvGrpSpPr/>
+        <p:nvPr/>
+      </p:nvGrpSpPr>
+      <p:grpSpPr/>
+      <p:sp>
+        <p:nvSpPr>
+          <p:cNvPr id="2" name="TextBox 1"/>
+          <p:cNvSpPr txBox="1"/>
+          <p:nvPr/>
+        </p:nvSpPr>
+        <p:spPr>
+          <a:xfrm>
+            <a:off x="548640" y="365760"/>
+            <a:ext cx="1371600" cy="822960"/>
           </a:xfrm>
           <a:prstGeom prst="rect">
             <a:avLst/>
@@ -4360,20 +4506,400 @@
           </a:bodyPr>
           <a:lstStyle/>
           <a:p>
+            <a:pPr>
+              <a:defRPr sz="3800" b="1">
+                <a:solidFill>
+                  <a:srgbClr val="2563EB"/>
+                </a:solidFill>
+                <a:latin typeface="Segoe UI"/>
+              </a:defRPr>
+            </a:pPr>
+            <a:r>
+              <a:t>13</a:t>
+            </a:r>
+          </a:p>
+        </p:txBody>
+      </p:sp>
+      <p:sp>
+        <p:nvSpPr>
+          <p:cNvPr id="3" name="TextBox 2"/>
+          <p:cNvSpPr txBox="1"/>
+          <p:nvPr/>
+        </p:nvSpPr>
+        <p:spPr>
+          <a:xfrm>
+            <a:off x="548640" y="1280160"/>
+            <a:ext cx="3657600" cy="36576"/>
+          </a:xfrm>
+          <a:prstGeom prst="rect">
+            <a:avLst/>
+          </a:prstGeom>
+          <a:noFill/>
+        </p:spPr>
+        <p:txBody>
+          <a:bodyPr wrap="none">
+            <a:spAutoFit/>
+          </a:bodyPr>
+          <a:lstStyle/>
+          <a:p/>
+        </p:txBody>
+      </p:sp>
+      <p:sp>
+        <p:nvSpPr>
+          <p:cNvPr id="4" name="TextBox 3"/>
+          <p:cNvSpPr txBox="1"/>
+          <p:nvPr/>
+        </p:nvSpPr>
+        <p:spPr>
+          <a:xfrm>
+            <a:off x="548640" y="1417320"/>
+            <a:ext cx="8229600" cy="640080"/>
+          </a:xfrm>
+          <a:prstGeom prst="rect">
+            <a:avLst/>
+          </a:prstGeom>
+          <a:noFill/>
+        </p:spPr>
+        <p:txBody>
+          <a:bodyPr wrap="square">
+            <a:spAutoFit/>
+          </a:bodyPr>
+          <a:lstStyle/>
+          <a:p>
+            <a:pPr>
+              <a:defRPr sz="2400" b="1">
+                <a:solidFill>
+                  <a:srgbClr val="0F172A"/>
+                </a:solidFill>
+                <a:latin typeface="Segoe UI"/>
+              </a:defRPr>
+            </a:pPr>
+            <a:r>
+              <a:t>Strategic Recommendations</a:t>
+            </a:r>
+          </a:p>
+        </p:txBody>
+      </p:sp>
+      <p:sp>
+        <p:nvSpPr>
+          <p:cNvPr id="5" name="TextBox 4"/>
+          <p:cNvSpPr txBox="1"/>
+          <p:nvPr/>
+        </p:nvSpPr>
+        <p:spPr>
+          <a:xfrm>
+            <a:off x="365760" y="6309360"/>
+            <a:ext cx="1371600" cy="365760"/>
+          </a:xfrm>
+          <a:prstGeom prst="rect">
+            <a:avLst/>
+          </a:prstGeom>
+          <a:noFill/>
+        </p:spPr>
+        <p:txBody>
+          <a:bodyPr wrap="none">
+            <a:spAutoFit/>
+          </a:bodyPr>
+          <a:lstStyle/>
+          <a:p>
+            <a:pPr>
+              <a:defRPr sz="1100">
+                <a:solidFill>
+                  <a:srgbClr val="64748B"/>
+                </a:solidFill>
+                <a:latin typeface="Segoe UI"/>
+              </a:defRPr>
+            </a:pPr>
+            <a:r>
+              <a:t>14 / 14</a:t>
+            </a:r>
+          </a:p>
+        </p:txBody>
+      </p:sp>
+      <p:sp>
+        <p:nvSpPr>
+          <p:cNvPr id="6" name="Rounded Rectangle 5"/>
+          <p:cNvSpPr/>
+          <p:nvPr/>
+        </p:nvSpPr>
+        <p:spPr>
+          <a:xfrm>
+            <a:off x="457200" y="2377440"/>
+            <a:ext cx="5303520" cy="1645920"/>
+          </a:xfrm>
+          <a:prstGeom prst="roundRect">
+            <a:avLst/>
+          </a:prstGeom>
+          <a:solidFill>
+            <a:srgbClr val="1A152C"/>
+          </a:solidFill>
+          <a:ln>
+            <a:noFill/>
+          </a:ln>
+        </p:spPr>
+        <p:style>
+          <a:lnRef idx="1">
+            <a:schemeClr val="accent1"/>
+          </a:lnRef>
+          <a:fillRef idx="3">
+            <a:schemeClr val="accent1"/>
+          </a:fillRef>
+          <a:effectRef idx="2">
+            <a:schemeClr val="accent1"/>
+          </a:effectRef>
+          <a:fontRef idx="minor">
+            <a:schemeClr val="lt1"/>
+          </a:fontRef>
+        </p:style>
+        <p:txBody>
+          <a:bodyPr rtlCol="0" anchor="ctr" wrap="square" lIns="228600" tIns="228600" rIns="228600" bIns="228600"/>
+          <a:lstStyle/>
+          <a:p>
             <a:pPr algn="ctr">
-              <a:defRPr sz="1300">
-                <a:solidFill>
-                  <a:srgbClr val="64748B"/>
-                </a:solidFill>
-                <a:latin typeface="Segoe UI"/>
-              </a:defRPr>
-            </a:pPr>
-            <a:r>
-              <a:t>Gururaj Shetty  |  Revature Data Analytics</a:t>
-            </a:r>
-            <a:br/>
-            <a:r>
-              <a:t>Email: shettygururaj279@gmail.com  |  GitHub: SHETYGURU</a:t>
+              <a:spcAft>
+                <a:spcPts val="1400"/>
+              </a:spcAft>
+              <a:defRPr sz="1300" b="1">
+                <a:solidFill>
+                  <a:srgbClr val="2563EB"/>
+                </a:solidFill>
+                <a:latin typeface="Segoe UI"/>
+              </a:defRPr>
+            </a:pPr>
+            <a:r>
+              <a:t>🎫 Pricing Managers</a:t>
+            </a:r>
+          </a:p>
+          <a:p>
+            <a:pPr>
+              <a:spcAft>
+                <a:spcPts val="1000"/>
+              </a:spcAft>
+              <a:defRPr sz="1100">
+                <a:solidFill>
+                  <a:srgbClr val="FFFFFF"/>
+                </a:solidFill>
+                <a:latin typeface="Segoe UI"/>
+              </a:defRPr>
+            </a:pPr>
+            <a:r>
+              <a:t>◆  Leverage dynamic pricing during May-June peaks. Elevate AC Sleeper rates by 10% on high-demand weekends to capture maximum yield.</a:t>
+            </a:r>
+          </a:p>
+        </p:txBody>
+      </p:sp>
+      <p:sp>
+        <p:nvSpPr>
+          <p:cNvPr id="7" name="Rounded Rectangle 6"/>
+          <p:cNvSpPr/>
+          <p:nvPr/>
+        </p:nvSpPr>
+        <p:spPr>
+          <a:xfrm>
+            <a:off x="6217920" y="2377440"/>
+            <a:ext cx="5303520" cy="1645920"/>
+          </a:xfrm>
+          <a:prstGeom prst="roundRect">
+            <a:avLst/>
+          </a:prstGeom>
+          <a:solidFill>
+            <a:srgbClr val="1A152C"/>
+          </a:solidFill>
+          <a:ln>
+            <a:noFill/>
+          </a:ln>
+        </p:spPr>
+        <p:style>
+          <a:lnRef idx="1">
+            <a:schemeClr val="accent1"/>
+          </a:lnRef>
+          <a:fillRef idx="3">
+            <a:schemeClr val="accent1"/>
+          </a:fillRef>
+          <a:effectRef idx="2">
+            <a:schemeClr val="accent1"/>
+          </a:effectRef>
+          <a:fontRef idx="minor">
+            <a:schemeClr val="lt1"/>
+          </a:fontRef>
+        </p:style>
+        <p:txBody>
+          <a:bodyPr rtlCol="0" anchor="ctr" wrap="square" lIns="228600" tIns="228600" rIns="228600" bIns="228600"/>
+          <a:lstStyle/>
+          <a:p>
+            <a:pPr algn="ctr">
+              <a:spcAft>
+                <a:spcPts val="1400"/>
+              </a:spcAft>
+              <a:defRPr sz="1300" b="1">
+                <a:solidFill>
+                  <a:srgbClr val="2563EB"/>
+                </a:solidFill>
+                <a:latin typeface="Segoe UI"/>
+              </a:defRPr>
+            </a:pPr>
+            <a:r>
+              <a:t>🚌 Dispatch Coordinators</a:t>
+            </a:r>
+          </a:p>
+          <a:p>
+            <a:pPr>
+              <a:spcAft>
+                <a:spcPts val="1000"/>
+              </a:spcAft>
+              <a:defRPr sz="1100">
+                <a:solidFill>
+                  <a:srgbClr val="FFFFFF"/>
+                </a:solidFill>
+                <a:latin typeface="Segoe UI"/>
+              </a:defRPr>
+            </a:pPr>
+            <a:r>
+              <a:t>◆  Improve the 51% fleet load factor. Consolidate low-occupancy weekday runs and reassign AC Seater buses to peak Bangalore/Delhi schedules.</a:t>
+            </a:r>
+          </a:p>
+        </p:txBody>
+      </p:sp>
+      <p:sp>
+        <p:nvSpPr>
+          <p:cNvPr id="8" name="Rounded Rectangle 7"/>
+          <p:cNvSpPr/>
+          <p:nvPr/>
+        </p:nvSpPr>
+        <p:spPr>
+          <a:xfrm>
+            <a:off x="457200" y="4297680"/>
+            <a:ext cx="5303520" cy="1645920"/>
+          </a:xfrm>
+          <a:prstGeom prst="roundRect">
+            <a:avLst/>
+          </a:prstGeom>
+          <a:solidFill>
+            <a:srgbClr val="1A152C"/>
+          </a:solidFill>
+          <a:ln>
+            <a:noFill/>
+          </a:ln>
+        </p:spPr>
+        <p:style>
+          <a:lnRef idx="1">
+            <a:schemeClr val="accent1"/>
+          </a:lnRef>
+          <a:fillRef idx="3">
+            <a:schemeClr val="accent1"/>
+          </a:fillRef>
+          <a:effectRef idx="2">
+            <a:schemeClr val="accent1"/>
+          </a:effectRef>
+          <a:fontRef idx="minor">
+            <a:schemeClr val="lt1"/>
+          </a:fontRef>
+        </p:style>
+        <p:txBody>
+          <a:bodyPr rtlCol="0" anchor="ctr" wrap="square" lIns="228600" tIns="228600" rIns="228600" bIns="228600"/>
+          <a:lstStyle/>
+          <a:p>
+            <a:pPr algn="ctr">
+              <a:spcAft>
+                <a:spcPts val="1400"/>
+              </a:spcAft>
+              <a:defRPr sz="1300" b="1">
+                <a:solidFill>
+                  <a:srgbClr val="2563EB"/>
+                </a:solidFill>
+                <a:latin typeface="Segoe UI"/>
+              </a:defRPr>
+            </a:pPr>
+            <a:r>
+              <a:t>📢 Marketing Specialists</a:t>
+            </a:r>
+          </a:p>
+          <a:p>
+            <a:pPr>
+              <a:spcAft>
+                <a:spcPts val="1000"/>
+              </a:spcAft>
+              <a:defRPr sz="1100">
+                <a:solidFill>
+                  <a:srgbClr val="FFFFFF"/>
+                </a:solidFill>
+                <a:latin typeface="Segoe UI"/>
+              </a:defRPr>
+            </a:pPr>
+            <a:r>
+              <a:t>◆  Launch targeted loyalty campaigns to boost retention past the 80% mark, focusing on the highly-profitable 25-45 age group bracket.</a:t>
+            </a:r>
+          </a:p>
+        </p:txBody>
+      </p:sp>
+      <p:sp>
+        <p:nvSpPr>
+          <p:cNvPr id="9" name="Rounded Rectangle 8"/>
+          <p:cNvSpPr/>
+          <p:nvPr/>
+        </p:nvSpPr>
+        <p:spPr>
+          <a:xfrm>
+            <a:off x="6217920" y="4297680"/>
+            <a:ext cx="5303520" cy="1645920"/>
+          </a:xfrm>
+          <a:prstGeom prst="roundRect">
+            <a:avLst/>
+          </a:prstGeom>
+          <a:solidFill>
+            <a:srgbClr val="1A152C"/>
+          </a:solidFill>
+          <a:ln>
+            <a:noFill/>
+          </a:ln>
+        </p:spPr>
+        <p:style>
+          <a:lnRef idx="1">
+            <a:schemeClr val="accent1"/>
+          </a:lnRef>
+          <a:fillRef idx="3">
+            <a:schemeClr val="accent1"/>
+          </a:fillRef>
+          <a:effectRef idx="2">
+            <a:schemeClr val="accent1"/>
+          </a:effectRef>
+          <a:fontRef idx="minor">
+            <a:schemeClr val="lt1"/>
+          </a:fontRef>
+        </p:style>
+        <p:txBody>
+          <a:bodyPr rtlCol="0" anchor="ctr" wrap="square" lIns="228600" tIns="228600" rIns="228600" bIns="228600"/>
+          <a:lstStyle/>
+          <a:p>
+            <a:pPr algn="ctr">
+              <a:spcAft>
+                <a:spcPts val="1400"/>
+              </a:spcAft>
+              <a:defRPr sz="1300" b="1">
+                <a:solidFill>
+                  <a:srgbClr val="2563EB"/>
+                </a:solidFill>
+                <a:latin typeface="Segoe UI"/>
+              </a:defRPr>
+            </a:pPr>
+            <a:r>
+              <a:t>⚙️ System Architects</a:t>
+            </a:r>
+          </a:p>
+          <a:p>
+            <a:pPr>
+              <a:spcAft>
+                <a:spcPts val="1000"/>
+              </a:spcAft>
+              <a:defRPr sz="1100">
+                <a:solidFill>
+                  <a:srgbClr val="FFFFFF"/>
+                </a:solidFill>
+                <a:latin typeface="Segoe UI"/>
+              </a:defRPr>
+            </a:pPr>
+            <a:r>
+              <a:t>◆  Preserve the MySQL relational schema for secure append runs. Protect local server config details inside separated configuration keys.</a:t>
             </a:r>
           </a:p>
         </p:txBody>
@@ -4389,6 +4915,156 @@
     <mc:Fallback>
       <p:transition spd="slow">
         <p:push dir="l"/>
+      </p:transition>
+    </mc:Fallback>
+  </mc:AlternateContent>
+  <p:clrMapOvr>
+    <a:masterClrMapping/>
+  </p:clrMapOvr>
+</p:sld>
+</file>
+
+<file path=ppt/slides/slide15.xml><?xml version="1.0" encoding="utf-8"?>
+<p:sld xmlns:a="http://schemas.openxmlformats.org/drawingml/2006/main" xmlns:p="http://schemas.openxmlformats.org/presentationml/2006/main" xmlns:r="http://schemas.openxmlformats.org/officeDocument/2006/relationships">
+  <p:cSld>
+    <p:bg>
+      <p:bgPr>
+        <a:solidFill>
+          <a:srgbClr val="FFFFFF"/>
+        </a:solidFill>
+        <a:effectLst/>
+      </p:bgPr>
+    </p:bg>
+    <p:spTree>
+      <p:nvGrpSpPr>
+        <p:cNvPr id="1" name=""/>
+        <p:cNvGrpSpPr/>
+        <p:nvPr/>
+      </p:nvGrpSpPr>
+      <p:grpSpPr/>
+      <p:sp>
+        <p:nvSpPr>
+          <p:cNvPr id="2" name="TextBox 1"/>
+          <p:cNvSpPr txBox="1"/>
+          <p:nvPr/>
+        </p:nvSpPr>
+        <p:spPr>
+          <a:xfrm>
+            <a:off x="1828800" y="2468880"/>
+            <a:ext cx="8503920" cy="1371600"/>
+          </a:xfrm>
+          <a:prstGeom prst="rect">
+            <a:avLst/>
+          </a:prstGeom>
+          <a:noFill/>
+        </p:spPr>
+        <p:txBody>
+          <a:bodyPr wrap="square">
+            <a:spAutoFit/>
+          </a:bodyPr>
+          <a:lstStyle/>
+          <a:p>
+            <a:pPr algn="ctr">
+              <a:defRPr sz="4800" b="1">
+                <a:solidFill>
+                  <a:srgbClr val="2563EB"/>
+                </a:solidFill>
+                <a:latin typeface="Segoe UI"/>
+              </a:defRPr>
+            </a:pPr>
+            <a:r>
+              <a:t>Thank You</a:t>
+            </a:r>
+          </a:p>
+        </p:txBody>
+      </p:sp>
+      <p:sp>
+        <p:nvSpPr>
+          <p:cNvPr id="3" name="TextBox 2"/>
+          <p:cNvSpPr txBox="1"/>
+          <p:nvPr/>
+        </p:nvSpPr>
+        <p:spPr>
+          <a:xfrm>
+            <a:off x="1828800" y="3840480"/>
+            <a:ext cx="8503920" cy="548640"/>
+          </a:xfrm>
+          <a:prstGeom prst="rect">
+            <a:avLst/>
+          </a:prstGeom>
+          <a:noFill/>
+        </p:spPr>
+        <p:txBody>
+          <a:bodyPr wrap="none">
+            <a:spAutoFit/>
+          </a:bodyPr>
+          <a:lstStyle/>
+          <a:p>
+            <a:pPr algn="ctr">
+              <a:defRPr sz="1600" b="1">
+                <a:solidFill>
+                  <a:srgbClr val="0F172A"/>
+                </a:solidFill>
+                <a:latin typeface="Segoe UI"/>
+              </a:defRPr>
+            </a:pPr>
+            <a:r>
+              <a:t>Bus Booking Analytics System  |  Phase 2 Final Project</a:t>
+            </a:r>
+          </a:p>
+        </p:txBody>
+      </p:sp>
+      <p:sp>
+        <p:nvSpPr>
+          <p:cNvPr id="4" name="TextBox 3"/>
+          <p:cNvSpPr txBox="1"/>
+          <p:nvPr/>
+        </p:nvSpPr>
+        <p:spPr>
+          <a:xfrm>
+            <a:off x="1828800" y="4480560"/>
+            <a:ext cx="8503920" cy="822960"/>
+          </a:xfrm>
+          <a:prstGeom prst="rect">
+            <a:avLst/>
+          </a:prstGeom>
+          <a:noFill/>
+        </p:spPr>
+        <p:txBody>
+          <a:bodyPr wrap="none">
+            <a:spAutoFit/>
+          </a:bodyPr>
+          <a:lstStyle/>
+          <a:p>
+            <a:pPr algn="ctr">
+              <a:defRPr sz="1300">
+                <a:solidFill>
+                  <a:srgbClr val="64748B"/>
+                </a:solidFill>
+                <a:latin typeface="Segoe UI"/>
+              </a:defRPr>
+            </a:pPr>
+            <a:r>
+              <a:t>Gururaj Shetty  |  Revature Data Analytics</a:t>
+            </a:r>
+            <a:br/>
+            <a:r>
+              <a:t>Email: shettygururaj279@gmail.com  |  GitHub: SHETYGURU</a:t>
+            </a:r>
+          </a:p>
+        </p:txBody>
+      </p:sp>
+    </p:spTree>
+  </p:cSld>
+  <mc:AlternateContent xmlns:mc="http://schemas.openxmlformats.org/markup-compatibility/2006">
+    <mc:Choice xmlns:p14="http://schemas.microsoft.com/office/powerpoint/2010/main" Requires="p14">
+      <p:transition spd="slow">
+        <p:fade/>
+      </p:transition>
+    </mc:Choice>
+    <mc:Fallback>
+      <p:transition spd="slow">
+        <p:fade/>
       </p:transition>
     </mc:Fallback>
   </mc:AlternateContent>
@@ -4424,8 +5100,8 @@
         </p:nvSpPr>
         <p:spPr>
           <a:xfrm>
-            <a:off x="548640" y="457200"/>
-            <a:ext cx="1371600" cy="1097280"/>
+            <a:off x="548640" y="365760"/>
+            <a:ext cx="1371600" cy="822960"/>
           </a:xfrm>
           <a:prstGeom prst="rect">
             <a:avLst/>
@@ -4439,9 +5115,9 @@
           <a:lstStyle/>
           <a:p>
             <a:pPr>
-              <a:defRPr sz="3600" b="1">
-                <a:solidFill>
-                  <a:srgbClr val="4F46E5"/>
+              <a:defRPr sz="3800" b="1">
+                <a:solidFill>
+                  <a:srgbClr val="2563EB"/>
                 </a:solidFill>
                 <a:latin typeface="Segoe UI"/>
               </a:defRPr>
@@ -4460,7 +5136,7 @@
         </p:nvSpPr>
         <p:spPr>
           <a:xfrm>
-            <a:off x="548640" y="1417320"/>
+            <a:off x="548640" y="1280160"/>
             <a:ext cx="3657600" cy="36576"/>
           </a:xfrm>
           <a:prstGeom prst="rect">
@@ -4484,8 +5160,8 @@
         </p:nvSpPr>
         <p:spPr>
           <a:xfrm>
-            <a:off x="548640" y="1554480"/>
-            <a:ext cx="7315200" cy="640080"/>
+            <a:off x="548640" y="1417320"/>
+            <a:ext cx="8229600" cy="640080"/>
           </a:xfrm>
           <a:prstGeom prst="rect">
             <a:avLst/>
@@ -4543,7 +5219,7 @@
               </a:defRPr>
             </a:pPr>
             <a:r>
-              <a:t>2 / 10</a:t>
+              <a:t>2 / 14</a:t>
             </a:r>
           </a:p>
         </p:txBody>
@@ -4729,8 +5405,8 @@
         </p:nvSpPr>
         <p:spPr>
           <a:xfrm>
-            <a:off x="548640" y="457200"/>
-            <a:ext cx="1371600" cy="1097280"/>
+            <a:off x="548640" y="365760"/>
+            <a:ext cx="1371600" cy="822960"/>
           </a:xfrm>
           <a:prstGeom prst="rect">
             <a:avLst/>
@@ -4744,9 +5420,9 @@
           <a:lstStyle/>
           <a:p>
             <a:pPr>
-              <a:defRPr sz="3600" b="1">
-                <a:solidFill>
-                  <a:srgbClr val="4F46E5"/>
+              <a:defRPr sz="3800" b="1">
+                <a:solidFill>
+                  <a:srgbClr val="2563EB"/>
                 </a:solidFill>
                 <a:latin typeface="Segoe UI"/>
               </a:defRPr>
@@ -4765,7 +5441,7 @@
         </p:nvSpPr>
         <p:spPr>
           <a:xfrm>
-            <a:off x="548640" y="1417320"/>
+            <a:off x="548640" y="1280160"/>
             <a:ext cx="3657600" cy="36576"/>
           </a:xfrm>
           <a:prstGeom prst="rect">
@@ -4789,8 +5465,8 @@
         </p:nvSpPr>
         <p:spPr>
           <a:xfrm>
-            <a:off x="548640" y="1554480"/>
-            <a:ext cx="7315200" cy="640080"/>
+            <a:off x="548640" y="1417320"/>
+            <a:ext cx="8229600" cy="640080"/>
           </a:xfrm>
           <a:prstGeom prst="rect">
             <a:avLst/>
@@ -4848,37 +5524,57 @@
               </a:defRPr>
             </a:pPr>
             <a:r>
-              <a:t>3 / 10</a:t>
-            </a:r>
-          </a:p>
-        </p:txBody>
-      </p:sp>
-      <p:sp>
-        <p:nvSpPr>
-          <p:cNvPr id="6" name="TextBox 5"/>
-          <p:cNvSpPr txBox="1"/>
+              <a:t>3 / 14</a:t>
+            </a:r>
+          </a:p>
+        </p:txBody>
+      </p:sp>
+      <p:sp>
+        <p:nvSpPr>
+          <p:cNvPr id="6" name="Rounded Rectangle 5"/>
+          <p:cNvSpPr/>
           <p:nvPr/>
         </p:nvSpPr>
         <p:spPr>
           <a:xfrm>
             <a:off x="548640" y="2468880"/>
-            <a:ext cx="3474720" cy="457200"/>
-          </a:xfrm>
-          <a:prstGeom prst="rect">
-            <a:avLst/>
-          </a:prstGeom>
-          <a:noFill/>
-        </p:spPr>
-        <p:txBody>
-          <a:bodyPr wrap="none">
-            <a:spAutoFit/>
-          </a:bodyPr>
-          <a:lstStyle/>
-          <a:p>
-            <a:pPr>
-              <a:defRPr sz="1500" b="1">
-                <a:solidFill>
-                  <a:srgbClr val="4F46E5"/>
+            <a:ext cx="3474720" cy="3657600"/>
+          </a:xfrm>
+          <a:prstGeom prst="roundRect">
+            <a:avLst/>
+          </a:prstGeom>
+          <a:solidFill>
+            <a:srgbClr val="1A152C"/>
+          </a:solidFill>
+          <a:ln>
+            <a:noFill/>
+          </a:ln>
+        </p:spPr>
+        <p:style>
+          <a:lnRef idx="1">
+            <a:schemeClr val="accent1"/>
+          </a:lnRef>
+          <a:fillRef idx="3">
+            <a:schemeClr val="accent1"/>
+          </a:fillRef>
+          <a:effectRef idx="2">
+            <a:schemeClr val="accent1"/>
+          </a:effectRef>
+          <a:fontRef idx="minor">
+            <a:schemeClr val="lt1"/>
+          </a:fontRef>
+        </p:style>
+        <p:txBody>
+          <a:bodyPr rtlCol="0" anchor="ctr" wrap="square" lIns="228600" tIns="228600" rIns="228600" bIns="228600"/>
+          <a:lstStyle/>
+          <a:p>
+            <a:pPr algn="ctr">
+              <a:spcAft>
+                <a:spcPts val="1400"/>
+              </a:spcAft>
+              <a:defRPr sz="1300" b="1">
+                <a:solidFill>
+                  <a:srgbClr val="EF4444"/>
                 </a:solidFill>
                 <a:latin typeface="Segoe UI"/>
               </a:defRPr>
@@ -4887,212 +5583,206 @@
               <a:t>⚡ THE PROBLEM</a:t>
             </a:r>
           </a:p>
-        </p:txBody>
-      </p:sp>
-      <p:sp>
-        <p:nvSpPr>
-          <p:cNvPr id="7" name="TextBox 6"/>
-          <p:cNvSpPr txBox="1"/>
-          <p:nvPr/>
-        </p:nvSpPr>
-        <p:spPr>
-          <a:xfrm>
-            <a:off x="548640" y="3017520"/>
-            <a:ext cx="3474720" cy="2926080"/>
-          </a:xfrm>
-          <a:prstGeom prst="rect">
-            <a:avLst/>
-          </a:prstGeom>
-          <a:noFill/>
-        </p:spPr>
-        <p:txBody>
-          <a:bodyPr wrap="square">
-            <a:spAutoFit/>
-          </a:bodyPr>
-          <a:lstStyle/>
-          <a:p>
-            <a:pPr>
-              <a:spcAft>
-                <a:spcPts val="1200"/>
-              </a:spcAft>
-              <a:defRPr sz="1200">
-                <a:solidFill>
-                  <a:srgbClr val="334155"/>
-                </a:solidFill>
-                <a:latin typeface="Segoe UI"/>
-              </a:defRPr>
-            </a:pPr>
-            <a:r>
-              <a:t>◆  Manual ticketing operations lack unified business reporting metrics</a:t>
-            </a:r>
-          </a:p>
-          <a:p>
-            <a:pPr>
-              <a:spcAft>
-                <a:spcPts val="1200"/>
-              </a:spcAft>
-              <a:defRPr sz="1200">
-                <a:solidFill>
-                  <a:srgbClr val="334155"/>
-                </a:solidFill>
-                <a:latin typeface="Segoe UI"/>
-              </a:defRPr>
-            </a:pPr>
-            <a:r>
-              <a:t>◆  Inconsistent data logs (duplicate IDs, unparseable dates) skew metrics</a:t>
-            </a:r>
-          </a:p>
-          <a:p>
-            <a:pPr>
-              <a:spcAft>
-                <a:spcPts val="1200"/>
-              </a:spcAft>
-              <a:defRPr sz="1200">
-                <a:solidFill>
-                  <a:srgbClr val="334155"/>
-                </a:solidFill>
-                <a:latin typeface="Segoe UI"/>
-              </a:defRPr>
-            </a:pPr>
-            <a:r>
-              <a:t>◆  Operations team lacks insights on asset yield and customer retention</a:t>
-            </a:r>
-          </a:p>
-        </p:txBody>
-      </p:sp>
-      <p:sp>
-        <p:nvSpPr>
-          <p:cNvPr id="8" name="TextBox 7"/>
-          <p:cNvSpPr txBox="1"/>
+          <a:p>
+            <a:pPr>
+              <a:spcAft>
+                <a:spcPts val="1000"/>
+              </a:spcAft>
+              <a:defRPr sz="1100">
+                <a:solidFill>
+                  <a:srgbClr val="FFFFFF"/>
+                </a:solidFill>
+                <a:latin typeface="Segoe UI"/>
+              </a:defRPr>
+            </a:pPr>
+            <a:r>
+              <a:t>◆  Studios risk millions greenlighting films with no data-backed insights</a:t>
+            </a:r>
+          </a:p>
+          <a:p>
+            <a:pPr>
+              <a:spcAft>
+                <a:spcPts val="1000"/>
+              </a:spcAft>
+              <a:defRPr sz="1100">
+                <a:solidFill>
+                  <a:srgbClr val="FFFFFF"/>
+                </a:solidFill>
+                <a:latin typeface="Segoe UI"/>
+              </a:defRPr>
+            </a:pPr>
+            <a:r>
+              <a:t>◆  Intuition-based decisions fail to predict ratings or revenue</a:t>
+            </a:r>
+          </a:p>
+          <a:p>
+            <a:pPr>
+              <a:spcAft>
+                <a:spcPts val="1000"/>
+              </a:spcAft>
+              <a:defRPr sz="1100">
+                <a:solidFill>
+                  <a:srgbClr val="FFFFFF"/>
+                </a:solidFill>
+                <a:latin typeface="Segoe UI"/>
+              </a:defRPr>
+            </a:pPr>
+            <a:r>
+              <a:t>◆  Raw unstructured data hides critical patterns and trends</a:t>
+            </a:r>
+          </a:p>
+        </p:txBody>
+      </p:sp>
+      <p:sp>
+        <p:nvSpPr>
+          <p:cNvPr id="7" name="Rounded Rectangle 6"/>
+          <p:cNvSpPr/>
           <p:nvPr/>
         </p:nvSpPr>
         <p:spPr>
           <a:xfrm>
             <a:off x="4297680" y="2468880"/>
-            <a:ext cx="3474720" cy="457200"/>
-          </a:xfrm>
-          <a:prstGeom prst="rect">
-            <a:avLst/>
-          </a:prstGeom>
-          <a:noFill/>
-        </p:spPr>
-        <p:txBody>
-          <a:bodyPr wrap="none">
-            <a:spAutoFit/>
-          </a:bodyPr>
-          <a:lstStyle/>
-          <a:p>
-            <a:pPr>
-              <a:defRPr sz="1500" b="1">
-                <a:solidFill>
-                  <a:srgbClr val="4F46E5"/>
-                </a:solidFill>
-                <a:latin typeface="Segoe UI"/>
-              </a:defRPr>
-            </a:pPr>
-            <a:r>
-              <a:t>✅ OUR SOLUTION</a:t>
-            </a:r>
-          </a:p>
-        </p:txBody>
-      </p:sp>
-      <p:sp>
-        <p:nvSpPr>
-          <p:cNvPr id="9" name="TextBox 8"/>
-          <p:cNvSpPr txBox="1"/>
-          <p:nvPr/>
-        </p:nvSpPr>
-        <p:spPr>
-          <a:xfrm>
-            <a:off x="4297680" y="3017520"/>
-            <a:ext cx="3474720" cy="2926080"/>
-          </a:xfrm>
-          <a:prstGeom prst="rect">
-            <a:avLst/>
-          </a:prstGeom>
-          <a:noFill/>
-        </p:spPr>
-        <p:txBody>
-          <a:bodyPr wrap="square">
-            <a:spAutoFit/>
-          </a:bodyPr>
-          <a:lstStyle/>
-          <a:p>
-            <a:pPr>
-              <a:spcAft>
-                <a:spcPts val="1200"/>
-              </a:spcAft>
-              <a:defRPr sz="1200">
-                <a:solidFill>
-                  <a:srgbClr val="334155"/>
-                </a:solidFill>
-                <a:latin typeface="Segoe UI"/>
-              </a:defRPr>
-            </a:pPr>
-            <a:r>
-              <a:t>◆  Standardize mixed date formats and deduplicate transaction lists</a:t>
-            </a:r>
-          </a:p>
-          <a:p>
-            <a:pPr>
-              <a:spcAft>
-                <a:spcPts val="1200"/>
-              </a:spcAft>
-              <a:defRPr sz="1200">
-                <a:solidFill>
-                  <a:srgbClr val="334155"/>
-                </a:solidFill>
-                <a:latin typeface="Segoe UI"/>
-              </a:defRPr>
-            </a:pPr>
-            <a:r>
-              <a:t>◆  Build relational MySQL schema enforcing reference key integrity</a:t>
-            </a:r>
-          </a:p>
-          <a:p>
-            <a:pPr>
-              <a:spcAft>
-                <a:spcPts val="1200"/>
-              </a:spcAft>
-              <a:defRPr sz="1200">
-                <a:solidFill>
-                  <a:srgbClr val="334155"/>
-                </a:solidFill>
-                <a:latin typeface="Segoe UI"/>
-              </a:defRPr>
-            </a:pPr>
-            <a:r>
-              <a:t>◆  Establish analytical dashboard platforms in Power BI</a:t>
-            </a:r>
-          </a:p>
-        </p:txBody>
-      </p:sp>
-      <p:sp>
-        <p:nvSpPr>
-          <p:cNvPr id="10" name="TextBox 9"/>
-          <p:cNvSpPr txBox="1"/>
+            <a:ext cx="3474720" cy="3657600"/>
+          </a:xfrm>
+          <a:prstGeom prst="roundRect">
+            <a:avLst/>
+          </a:prstGeom>
+          <a:solidFill>
+            <a:srgbClr val="1A152C"/>
+          </a:solidFill>
+          <a:ln>
+            <a:noFill/>
+          </a:ln>
+        </p:spPr>
+        <p:style>
+          <a:lnRef idx="1">
+            <a:schemeClr val="accent1"/>
+          </a:lnRef>
+          <a:fillRef idx="3">
+            <a:schemeClr val="accent1"/>
+          </a:fillRef>
+          <a:effectRef idx="2">
+            <a:schemeClr val="accent1"/>
+          </a:effectRef>
+          <a:fontRef idx="minor">
+            <a:schemeClr val="lt1"/>
+          </a:fontRef>
+        </p:style>
+        <p:txBody>
+          <a:bodyPr rtlCol="0" anchor="ctr" wrap="square" lIns="228600" tIns="228600" rIns="228600" bIns="228600"/>
+          <a:lstStyle/>
+          <a:p>
+            <a:pPr algn="ctr">
+              <a:spcAft>
+                <a:spcPts val="1400"/>
+              </a:spcAft>
+              <a:defRPr sz="1300" b="1">
+                <a:solidFill>
+                  <a:srgbClr val="22C55E"/>
+                </a:solidFill>
+                <a:latin typeface="Segoe UI"/>
+              </a:defRPr>
+            </a:pPr>
+            <a:r>
+              <a:t>✓ OUR SOLUTION</a:t>
+            </a:r>
+          </a:p>
+          <a:p>
+            <a:pPr>
+              <a:spcAft>
+                <a:spcPts val="1000"/>
+              </a:spcAft>
+              <a:defRPr sz="1100">
+                <a:solidFill>
+                  <a:srgbClr val="FFFFFF"/>
+                </a:solidFill>
+                <a:latin typeface="Segoe UI"/>
+              </a:defRPr>
+            </a:pPr>
+            <a:r>
+              <a:t>◆  Clean &amp; preprocess 5,043-movie IMDB dataset with Python/Pandas</a:t>
+            </a:r>
+          </a:p>
+          <a:p>
+            <a:pPr>
+              <a:spcAft>
+                <a:spcPts val="1000"/>
+              </a:spcAft>
+              <a:defRPr sz="1100">
+                <a:solidFill>
+                  <a:srgbClr val="FFFFFF"/>
+                </a:solidFill>
+                <a:latin typeface="Segoe UI"/>
+              </a:defRPr>
+            </a:pPr>
+            <a:r>
+              <a:t>◆  Build normalized MySQL schema (3NF) with junction tables</a:t>
+            </a:r>
+          </a:p>
+          <a:p>
+            <a:pPr>
+              <a:spcAft>
+                <a:spcPts val="1000"/>
+              </a:spcAft>
+              <a:defRPr sz="1100">
+                <a:solidFill>
+                  <a:srgbClr val="FFFFFF"/>
+                </a:solidFill>
+                <a:latin typeface="Segoe UI"/>
+              </a:defRPr>
+            </a:pPr>
+            <a:r>
+              <a:t>◆  Create 7 interactive Plotly charts with real-time filtering</a:t>
+            </a:r>
+          </a:p>
+        </p:txBody>
+      </p:sp>
+      <p:sp>
+        <p:nvSpPr>
+          <p:cNvPr id="8" name="Rounded Rectangle 7"/>
+          <p:cNvSpPr/>
           <p:nvPr/>
         </p:nvSpPr>
         <p:spPr>
           <a:xfrm>
             <a:off x="8046720" y="2468880"/>
-            <a:ext cx="3474720" cy="457200"/>
-          </a:xfrm>
-          <a:prstGeom prst="rect">
-            <a:avLst/>
-          </a:prstGeom>
-          <a:noFill/>
-        </p:spPr>
-        <p:txBody>
-          <a:bodyPr wrap="none">
-            <a:spAutoFit/>
-          </a:bodyPr>
-          <a:lstStyle/>
-          <a:p>
-            <a:pPr>
-              <a:defRPr sz="1500" b="1">
-                <a:solidFill>
-                  <a:srgbClr val="4F46E5"/>
+            <a:ext cx="3474720" cy="3657600"/>
+          </a:xfrm>
+          <a:prstGeom prst="roundRect">
+            <a:avLst/>
+          </a:prstGeom>
+          <a:solidFill>
+            <a:srgbClr val="1A152C"/>
+          </a:solidFill>
+          <a:ln>
+            <a:noFill/>
+          </a:ln>
+        </p:spPr>
+        <p:style>
+          <a:lnRef idx="1">
+            <a:schemeClr val="accent1"/>
+          </a:lnRef>
+          <a:fillRef idx="3">
+            <a:schemeClr val="accent1"/>
+          </a:fillRef>
+          <a:effectRef idx="2">
+            <a:schemeClr val="accent1"/>
+          </a:effectRef>
+          <a:fontRef idx="minor">
+            <a:schemeClr val="lt1"/>
+          </a:fontRef>
+        </p:style>
+        <p:txBody>
+          <a:bodyPr rtlCol="0" anchor="ctr" wrap="square" lIns="228600" tIns="228600" rIns="228600" bIns="228600"/>
+          <a:lstStyle/>
+          <a:p>
+            <a:pPr algn="ctr">
+              <a:spcAft>
+                <a:spcPts val="1400"/>
+              </a:spcAft>
+              <a:defRPr sz="1300" b="1">
+                <a:solidFill>
+                  <a:srgbClr val="EAB308"/>
                 </a:solidFill>
                 <a:latin typeface="Segoe UI"/>
               </a:defRPr>
@@ -5101,75 +5791,52 @@
               <a:t>🎯 IMPACT</a:t>
             </a:r>
           </a:p>
-        </p:txBody>
-      </p:sp>
-      <p:sp>
-        <p:nvSpPr>
-          <p:cNvPr id="11" name="TextBox 10"/>
-          <p:cNvSpPr txBox="1"/>
-          <p:nvPr/>
-        </p:nvSpPr>
-        <p:spPr>
-          <a:xfrm>
-            <a:off x="8046720" y="3017520"/>
-            <a:ext cx="3474720" cy="2926080"/>
-          </a:xfrm>
-          <a:prstGeom prst="rect">
-            <a:avLst/>
-          </a:prstGeom>
-          <a:noFill/>
-        </p:spPr>
-        <p:txBody>
-          <a:bodyPr wrap="square">
-            <a:spAutoFit/>
-          </a:bodyPr>
-          <a:lstStyle/>
-          <a:p>
-            <a:pPr>
-              <a:spcAft>
-                <a:spcPts val="1200"/>
-              </a:spcAft>
-              <a:defRPr sz="1200">
-                <a:solidFill>
-                  <a:srgbClr val="334155"/>
-                </a:solidFill>
-                <a:latin typeface="Segoe UI"/>
-              </a:defRPr>
-            </a:pPr>
-            <a:r>
-              <a:t>◆  Instant clarity on fleet load factor and ticket sales performance</a:t>
-            </a:r>
-          </a:p>
-          <a:p>
-            <a:pPr>
-              <a:spcAft>
-                <a:spcPts val="1200"/>
-              </a:spcAft>
-              <a:defRPr sz="1200">
-                <a:solidFill>
-                  <a:srgbClr val="334155"/>
-                </a:solidFill>
-                <a:latin typeface="Segoe UI"/>
-              </a:defRPr>
-            </a:pPr>
-            <a:r>
-              <a:t>◆  Durable database structures support secure incremental loads</a:t>
-            </a:r>
-          </a:p>
-          <a:p>
-            <a:pPr>
-              <a:spcAft>
-                <a:spcPts val="1200"/>
-              </a:spcAft>
-              <a:defRPr sz="1200">
-                <a:solidFill>
-                  <a:srgbClr val="334155"/>
-                </a:solidFill>
-                <a:latin typeface="Segoe UI"/>
-              </a:defRPr>
-            </a:pPr>
-            <a:r>
-              <a:t>◆  Data-driven routing guides operational dispatch strategies</a:t>
+          <a:p>
+            <a:pPr>
+              <a:spcAft>
+                <a:spcPts val="1000"/>
+              </a:spcAft>
+              <a:defRPr sz="1100">
+                <a:solidFill>
+                  <a:srgbClr val="FFFFFF"/>
+                </a:solidFill>
+                <a:latin typeface="Segoe UI"/>
+              </a:defRPr>
+            </a:pPr>
+            <a:r>
+              <a:t>◆  Data-driven decisions reduce financial risk for studios</a:t>
+            </a:r>
+          </a:p>
+          <a:p>
+            <a:pPr>
+              <a:spcAft>
+                <a:spcPts val="1000"/>
+              </a:spcAft>
+              <a:defRPr sz="1100">
+                <a:solidFill>
+                  <a:srgbClr val="FFFFFF"/>
+                </a:solidFill>
+                <a:latin typeface="Segoe UI"/>
+              </a:defRPr>
+            </a:pPr>
+            <a:r>
+              <a:t>◆  Interactive dashboards enable on-the-fly business exploration</a:t>
+            </a:r>
+          </a:p>
+          <a:p>
+            <a:pPr>
+              <a:spcAft>
+                <a:spcPts val="1000"/>
+              </a:spcAft>
+              <a:defRPr sz="1100">
+                <a:solidFill>
+                  <a:srgbClr val="FFFFFF"/>
+                </a:solidFill>
+                <a:latin typeface="Segoe UI"/>
+              </a:defRPr>
+            </a:pPr>
+            <a:r>
+              <a:t>◆  Actionable genre &amp; director insights for stakeholders</a:t>
             </a:r>
           </a:p>
         </p:txBody>
@@ -5220,8 +5887,8 @@
         </p:nvSpPr>
         <p:spPr>
           <a:xfrm>
-            <a:off x="548640" y="457200"/>
-            <a:ext cx="1371600" cy="1097280"/>
+            <a:off x="548640" y="365760"/>
+            <a:ext cx="1371600" cy="822960"/>
           </a:xfrm>
           <a:prstGeom prst="rect">
             <a:avLst/>
@@ -5235,9 +5902,9 @@
           <a:lstStyle/>
           <a:p>
             <a:pPr>
-              <a:defRPr sz="3600" b="1">
-                <a:solidFill>
-                  <a:srgbClr val="4F46E5"/>
+              <a:defRPr sz="3800" b="1">
+                <a:solidFill>
+                  <a:srgbClr val="2563EB"/>
                 </a:solidFill>
                 <a:latin typeface="Segoe UI"/>
               </a:defRPr>
@@ -5256,7 +5923,7 @@
         </p:nvSpPr>
         <p:spPr>
           <a:xfrm>
-            <a:off x="548640" y="1417320"/>
+            <a:off x="548640" y="1280160"/>
             <a:ext cx="3657600" cy="36576"/>
           </a:xfrm>
           <a:prstGeom prst="rect">
@@ -5280,8 +5947,8 @@
         </p:nvSpPr>
         <p:spPr>
           <a:xfrm>
-            <a:off x="548640" y="1554480"/>
-            <a:ext cx="7315200" cy="640080"/>
+            <a:off x="548640" y="1417320"/>
+            <a:ext cx="8229600" cy="640080"/>
           </a:xfrm>
           <a:prstGeom prst="rect">
             <a:avLst/>
@@ -5339,37 +6006,57 @@
               </a:defRPr>
             </a:pPr>
             <a:r>
-              <a:t>4 / 10</a:t>
-            </a:r>
-          </a:p>
-        </p:txBody>
-      </p:sp>
-      <p:sp>
-        <p:nvSpPr>
-          <p:cNvPr id="6" name="TextBox 5"/>
-          <p:cNvSpPr txBox="1"/>
-          <p:nvPr/>
-        </p:nvSpPr>
-        <p:spPr>
-          <a:xfrm>
-            <a:off x="548640" y="2651760"/>
-            <a:ext cx="2560320" cy="457200"/>
-          </a:xfrm>
-          <a:prstGeom prst="rect">
-            <a:avLst/>
-          </a:prstGeom>
-          <a:noFill/>
-        </p:spPr>
-        <p:txBody>
-          <a:bodyPr wrap="none">
-            <a:spAutoFit/>
-          </a:bodyPr>
-          <a:lstStyle/>
-          <a:p>
-            <a:pPr>
-              <a:defRPr sz="1600" b="1">
-                <a:solidFill>
-                  <a:srgbClr val="4F46E5"/>
+              <a:t>4 / 14</a:t>
+            </a:r>
+          </a:p>
+        </p:txBody>
+      </p:sp>
+      <p:sp>
+        <p:nvSpPr>
+          <p:cNvPr id="6" name="Rounded Rectangle 5"/>
+          <p:cNvSpPr/>
+          <p:nvPr/>
+        </p:nvSpPr>
+        <p:spPr>
+          <a:xfrm>
+            <a:off x="548640" y="2560320"/>
+            <a:ext cx="2560320" cy="3383280"/>
+          </a:xfrm>
+          <a:prstGeom prst="roundRect">
+            <a:avLst/>
+          </a:prstGeom>
+          <a:solidFill>
+            <a:srgbClr val="1A152C"/>
+          </a:solidFill>
+          <a:ln>
+            <a:noFill/>
+          </a:ln>
+        </p:spPr>
+        <p:style>
+          <a:lnRef idx="1">
+            <a:schemeClr val="accent1"/>
+          </a:lnRef>
+          <a:fillRef idx="3">
+            <a:schemeClr val="accent1"/>
+          </a:fillRef>
+          <a:effectRef idx="2">
+            <a:schemeClr val="accent1"/>
+          </a:effectRef>
+          <a:fontRef idx="minor">
+            <a:schemeClr val="lt1"/>
+          </a:fontRef>
+        </p:style>
+        <p:txBody>
+          <a:bodyPr rtlCol="0" anchor="ctr" wrap="square" lIns="228600" tIns="228600" rIns="228600" bIns="228600"/>
+          <a:lstStyle/>
+          <a:p>
+            <a:pPr algn="ctr">
+              <a:spcAft>
+                <a:spcPts val="1400"/>
+              </a:spcAft>
+              <a:defRPr sz="1300" b="1">
+                <a:solidFill>
+                  <a:srgbClr val="2563EB"/>
                 </a:solidFill>
                 <a:latin typeface="Segoe UI"/>
               </a:defRPr>
@@ -5378,78 +6065,102 @@
               <a:t>Python 3</a:t>
             </a:r>
           </a:p>
-        </p:txBody>
-      </p:sp>
-      <p:sp>
-        <p:nvSpPr>
-          <p:cNvPr id="7" name="TextBox 6"/>
-          <p:cNvSpPr txBox="1"/>
-          <p:nvPr/>
-        </p:nvSpPr>
-        <p:spPr>
-          <a:xfrm>
-            <a:off x="548640" y="3291840"/>
-            <a:ext cx="2560320" cy="2286000"/>
-          </a:xfrm>
-          <a:prstGeom prst="rect">
-            <a:avLst/>
-          </a:prstGeom>
-          <a:noFill/>
-        </p:spPr>
-        <p:txBody>
-          <a:bodyPr wrap="square">
-            <a:spAutoFit/>
-          </a:bodyPr>
-          <a:lstStyle/>
-          <a:p>
-            <a:pPr>
-              <a:defRPr sz="1300">
-                <a:solidFill>
-                  <a:srgbClr val="334155"/>
-                </a:solidFill>
-                <a:latin typeface="Segoe UI"/>
-              </a:defRPr>
-            </a:pPr>
-            <a:r>
-              <a:t>Pandas, NumPy</a:t>
-            </a:r>
-            <a:br/>
-            <a:r>
-              <a:t>Core data processing</a:t>
-            </a:r>
-            <a:br/>
-            <a:r>
-              <a:t>&amp; validation engine</a:t>
-            </a:r>
-          </a:p>
-        </p:txBody>
-      </p:sp>
-      <p:sp>
-        <p:nvSpPr>
-          <p:cNvPr id="8" name="TextBox 7"/>
-          <p:cNvSpPr txBox="1"/>
-          <p:nvPr/>
-        </p:nvSpPr>
-        <p:spPr>
-          <a:xfrm>
-            <a:off x="3383280" y="2651760"/>
-            <a:ext cx="2560320" cy="457200"/>
-          </a:xfrm>
-          <a:prstGeom prst="rect">
-            <a:avLst/>
-          </a:prstGeom>
-          <a:noFill/>
-        </p:spPr>
-        <p:txBody>
-          <a:bodyPr wrap="none">
-            <a:spAutoFit/>
-          </a:bodyPr>
-          <a:lstStyle/>
-          <a:p>
-            <a:pPr>
-              <a:defRPr sz="1600" b="1">
-                <a:solidFill>
-                  <a:srgbClr val="4F46E5"/>
+          <a:p>
+            <a:pPr>
+              <a:spcAft>
+                <a:spcPts val="1000"/>
+              </a:spcAft>
+              <a:defRPr sz="1100">
+                <a:solidFill>
+                  <a:srgbClr val="FFFFFF"/>
+                </a:solidFill>
+                <a:latin typeface="Segoe UI"/>
+              </a:defRPr>
+            </a:pPr>
+            <a:r>
+              <a:t>◆  Pandas, NumPy libraries</a:t>
+            </a:r>
+          </a:p>
+          <a:p>
+            <a:pPr>
+              <a:spcAft>
+                <a:spcPts val="1000"/>
+              </a:spcAft>
+              <a:defRPr sz="1100">
+                <a:solidFill>
+                  <a:srgbClr val="FFFFFF"/>
+                </a:solidFill>
+                <a:latin typeface="Segoe UI"/>
+              </a:defRPr>
+            </a:pPr>
+            <a:r>
+              <a:t>◆  Core data cleaning engine</a:t>
+            </a:r>
+          </a:p>
+          <a:p>
+            <a:pPr>
+              <a:spcAft>
+                <a:spcPts val="1000"/>
+              </a:spcAft>
+              <a:defRPr sz="1100">
+                <a:solidFill>
+                  <a:srgbClr val="FFFFFF"/>
+                </a:solidFill>
+                <a:latin typeface="Segoe UI"/>
+              </a:defRPr>
+            </a:pPr>
+            <a:r>
+              <a:t>◆  Constraint verification</a:t>
+            </a:r>
+          </a:p>
+        </p:txBody>
+      </p:sp>
+      <p:sp>
+        <p:nvSpPr>
+          <p:cNvPr id="7" name="Rounded Rectangle 6"/>
+          <p:cNvSpPr/>
+          <p:nvPr/>
+        </p:nvSpPr>
+        <p:spPr>
+          <a:xfrm>
+            <a:off x="3383280" y="2560320"/>
+            <a:ext cx="2560320" cy="3383280"/>
+          </a:xfrm>
+          <a:prstGeom prst="roundRect">
+            <a:avLst/>
+          </a:prstGeom>
+          <a:solidFill>
+            <a:srgbClr val="1A152C"/>
+          </a:solidFill>
+          <a:ln>
+            <a:noFill/>
+          </a:ln>
+        </p:spPr>
+        <p:style>
+          <a:lnRef idx="1">
+            <a:schemeClr val="accent1"/>
+          </a:lnRef>
+          <a:fillRef idx="3">
+            <a:schemeClr val="accent1"/>
+          </a:fillRef>
+          <a:effectRef idx="2">
+            <a:schemeClr val="accent1"/>
+          </a:effectRef>
+          <a:fontRef idx="minor">
+            <a:schemeClr val="lt1"/>
+          </a:fontRef>
+        </p:style>
+        <p:txBody>
+          <a:bodyPr rtlCol="0" anchor="ctr" wrap="square" lIns="228600" tIns="228600" rIns="228600" bIns="228600"/>
+          <a:lstStyle/>
+          <a:p>
+            <a:pPr algn="ctr">
+              <a:spcAft>
+                <a:spcPts val="1400"/>
+              </a:spcAft>
+              <a:defRPr sz="1300" b="1">
+                <a:solidFill>
+                  <a:srgbClr val="2563EB"/>
                 </a:solidFill>
                 <a:latin typeface="Segoe UI"/>
               </a:defRPr>
@@ -5458,78 +6169,102 @@
               <a:t>MySQL</a:t>
             </a:r>
           </a:p>
-        </p:txBody>
-      </p:sp>
-      <p:sp>
-        <p:nvSpPr>
-          <p:cNvPr id="9" name="TextBox 8"/>
-          <p:cNvSpPr txBox="1"/>
-          <p:nvPr/>
-        </p:nvSpPr>
-        <p:spPr>
-          <a:xfrm>
-            <a:off x="3383280" y="3291840"/>
-            <a:ext cx="2560320" cy="2286000"/>
-          </a:xfrm>
-          <a:prstGeom prst="rect">
-            <a:avLst/>
-          </a:prstGeom>
-          <a:noFill/>
-        </p:spPr>
-        <p:txBody>
-          <a:bodyPr wrap="square">
-            <a:spAutoFit/>
-          </a:bodyPr>
-          <a:lstStyle/>
-          <a:p>
-            <a:pPr>
-              <a:defRPr sz="1300">
-                <a:solidFill>
-                  <a:srgbClr val="334155"/>
-                </a:solidFill>
-                <a:latin typeface="Segoe UI"/>
-              </a:defRPr>
-            </a:pPr>
-            <a:r>
-              <a:t>Relational Database</a:t>
-            </a:r>
-            <a:br/>
-            <a:r>
-              <a:t>Staged schemas</a:t>
-            </a:r>
-            <a:br/>
-            <a:r>
-              <a:t>Reference keys</a:t>
-            </a:r>
-          </a:p>
-        </p:txBody>
-      </p:sp>
-      <p:sp>
-        <p:nvSpPr>
-          <p:cNvPr id="10" name="TextBox 9"/>
-          <p:cNvSpPr txBox="1"/>
-          <p:nvPr/>
-        </p:nvSpPr>
-        <p:spPr>
-          <a:xfrm>
-            <a:off x="6217920" y="2651760"/>
-            <a:ext cx="2560320" cy="457200"/>
-          </a:xfrm>
-          <a:prstGeom prst="rect">
-            <a:avLst/>
-          </a:prstGeom>
-          <a:noFill/>
-        </p:spPr>
-        <p:txBody>
-          <a:bodyPr wrap="none">
-            <a:spAutoFit/>
-          </a:bodyPr>
-          <a:lstStyle/>
-          <a:p>
-            <a:pPr>
-              <a:defRPr sz="1600" b="1">
-                <a:solidFill>
-                  <a:srgbClr val="4F46E5"/>
+          <a:p>
+            <a:pPr>
+              <a:spcAft>
+                <a:spcPts val="1000"/>
+              </a:spcAft>
+              <a:defRPr sz="1100">
+                <a:solidFill>
+                  <a:srgbClr val="FFFFFF"/>
+                </a:solidFill>
+                <a:latin typeface="Segoe UI"/>
+              </a:defRPr>
+            </a:pPr>
+            <a:r>
+              <a:t>◆  Relational tables structure</a:t>
+            </a:r>
+          </a:p>
+          <a:p>
+            <a:pPr>
+              <a:spcAft>
+                <a:spcPts val="1000"/>
+              </a:spcAft>
+              <a:defRPr sz="1100">
+                <a:solidFill>
+                  <a:srgbClr val="FFFFFF"/>
+                </a:solidFill>
+                <a:latin typeface="Segoe UI"/>
+              </a:defRPr>
+            </a:pPr>
+            <a:r>
+              <a:t>◆  Durable staging keys</a:t>
+            </a:r>
+          </a:p>
+          <a:p>
+            <a:pPr>
+              <a:spcAft>
+                <a:spcPts val="1000"/>
+              </a:spcAft>
+              <a:defRPr sz="1100">
+                <a:solidFill>
+                  <a:srgbClr val="FFFFFF"/>
+                </a:solidFill>
+                <a:latin typeface="Segoe UI"/>
+              </a:defRPr>
+            </a:pPr>
+            <a:r>
+              <a:t>◆  Performance indexes</a:t>
+            </a:r>
+          </a:p>
+        </p:txBody>
+      </p:sp>
+      <p:sp>
+        <p:nvSpPr>
+          <p:cNvPr id="8" name="Rounded Rectangle 7"/>
+          <p:cNvSpPr/>
+          <p:nvPr/>
+        </p:nvSpPr>
+        <p:spPr>
+          <a:xfrm>
+            <a:off x="6217920" y="2560320"/>
+            <a:ext cx="2560320" cy="3383280"/>
+          </a:xfrm>
+          <a:prstGeom prst="roundRect">
+            <a:avLst/>
+          </a:prstGeom>
+          <a:solidFill>
+            <a:srgbClr val="1A152C"/>
+          </a:solidFill>
+          <a:ln>
+            <a:noFill/>
+          </a:ln>
+        </p:spPr>
+        <p:style>
+          <a:lnRef idx="1">
+            <a:schemeClr val="accent1"/>
+          </a:lnRef>
+          <a:fillRef idx="3">
+            <a:schemeClr val="accent1"/>
+          </a:fillRef>
+          <a:effectRef idx="2">
+            <a:schemeClr val="accent1"/>
+          </a:effectRef>
+          <a:fontRef idx="minor">
+            <a:schemeClr val="lt1"/>
+          </a:fontRef>
+        </p:style>
+        <p:txBody>
+          <a:bodyPr rtlCol="0" anchor="ctr" wrap="square" lIns="228600" tIns="228600" rIns="228600" bIns="228600"/>
+          <a:lstStyle/>
+          <a:p>
+            <a:pPr algn="ctr">
+              <a:spcAft>
+                <a:spcPts val="1400"/>
+              </a:spcAft>
+              <a:defRPr sz="1300" b="1">
+                <a:solidFill>
+                  <a:srgbClr val="2563EB"/>
                 </a:solidFill>
                 <a:latin typeface="Segoe UI"/>
               </a:defRPr>
@@ -5538,78 +6273,102 @@
               <a:t>Power BI</a:t>
             </a:r>
           </a:p>
-        </p:txBody>
-      </p:sp>
-      <p:sp>
-        <p:nvSpPr>
-          <p:cNvPr id="11" name="TextBox 10"/>
-          <p:cNvSpPr txBox="1"/>
-          <p:nvPr/>
-        </p:nvSpPr>
-        <p:spPr>
-          <a:xfrm>
-            <a:off x="6217920" y="3291840"/>
-            <a:ext cx="2560320" cy="2286000"/>
-          </a:xfrm>
-          <a:prstGeom prst="rect">
-            <a:avLst/>
-          </a:prstGeom>
-          <a:noFill/>
-        </p:spPr>
-        <p:txBody>
-          <a:bodyPr wrap="square">
-            <a:spAutoFit/>
-          </a:bodyPr>
-          <a:lstStyle/>
-          <a:p>
-            <a:pPr>
-              <a:defRPr sz="1300">
-                <a:solidFill>
-                  <a:srgbClr val="334155"/>
-                </a:solidFill>
-                <a:latin typeface="Segoe UI"/>
-              </a:defRPr>
-            </a:pPr>
-            <a:r>
-              <a:t>Corporate visualization</a:t>
-            </a:r>
-            <a:br/>
-            <a:r>
-              <a:t>Dynamic filter panels</a:t>
-            </a:r>
-            <a:br/>
-            <a:r>
-              <a:t>Dashboard reporting</a:t>
-            </a:r>
-          </a:p>
-        </p:txBody>
-      </p:sp>
-      <p:sp>
-        <p:nvSpPr>
-          <p:cNvPr id="12" name="TextBox 11"/>
-          <p:cNvSpPr txBox="1"/>
-          <p:nvPr/>
-        </p:nvSpPr>
-        <p:spPr>
-          <a:xfrm>
-            <a:off x="9052560" y="2651760"/>
-            <a:ext cx="2560320" cy="457200"/>
-          </a:xfrm>
-          <a:prstGeom prst="rect">
-            <a:avLst/>
-          </a:prstGeom>
-          <a:noFill/>
-        </p:spPr>
-        <p:txBody>
-          <a:bodyPr wrap="none">
-            <a:spAutoFit/>
-          </a:bodyPr>
-          <a:lstStyle/>
-          <a:p>
-            <a:pPr>
-              <a:defRPr sz="1600" b="1">
-                <a:solidFill>
-                  <a:srgbClr val="4F46E5"/>
+          <a:p>
+            <a:pPr>
+              <a:spcAft>
+                <a:spcPts val="1000"/>
+              </a:spcAft>
+              <a:defRPr sz="1100">
+                <a:solidFill>
+                  <a:srgbClr val="FFFFFF"/>
+                </a:solidFill>
+                <a:latin typeface="Segoe UI"/>
+              </a:defRPr>
+            </a:pPr>
+            <a:r>
+              <a:t>◆  Corporate data dashboards</a:t>
+            </a:r>
+          </a:p>
+          <a:p>
+            <a:pPr>
+              <a:spcAft>
+                <a:spcPts val="1000"/>
+              </a:spcAft>
+              <a:defRPr sz="1100">
+                <a:solidFill>
+                  <a:srgbClr val="FFFFFF"/>
+                </a:solidFill>
+                <a:latin typeface="Segoe UI"/>
+              </a:defRPr>
+            </a:pPr>
+            <a:r>
+              <a:t>◆  Dynamic slicer panels</a:t>
+            </a:r>
+          </a:p>
+          <a:p>
+            <a:pPr>
+              <a:spcAft>
+                <a:spcPts val="1000"/>
+              </a:spcAft>
+              <a:defRPr sz="1100">
+                <a:solidFill>
+                  <a:srgbClr val="FFFFFF"/>
+                </a:solidFill>
+                <a:latin typeface="Segoe UI"/>
+              </a:defRPr>
+            </a:pPr>
+            <a:r>
+              <a:t>◆  Executive summaries</a:t>
+            </a:r>
+          </a:p>
+        </p:txBody>
+      </p:sp>
+      <p:sp>
+        <p:nvSpPr>
+          <p:cNvPr id="9" name="Rounded Rectangle 8"/>
+          <p:cNvSpPr/>
+          <p:nvPr/>
+        </p:nvSpPr>
+        <p:spPr>
+          <a:xfrm>
+            <a:off x="9052560" y="2560320"/>
+            <a:ext cx="2560320" cy="3383280"/>
+          </a:xfrm>
+          <a:prstGeom prst="roundRect">
+            <a:avLst/>
+          </a:prstGeom>
+          <a:solidFill>
+            <a:srgbClr val="1A152C"/>
+          </a:solidFill>
+          <a:ln>
+            <a:noFill/>
+          </a:ln>
+        </p:spPr>
+        <p:style>
+          <a:lnRef idx="1">
+            <a:schemeClr val="accent1"/>
+          </a:lnRef>
+          <a:fillRef idx="3">
+            <a:schemeClr val="accent1"/>
+          </a:fillRef>
+          <a:effectRef idx="2">
+            <a:schemeClr val="accent1"/>
+          </a:effectRef>
+          <a:fontRef idx="minor">
+            <a:schemeClr val="lt1"/>
+          </a:fontRef>
+        </p:style>
+        <p:txBody>
+          <a:bodyPr rtlCol="0" anchor="ctr" wrap="square" lIns="228600" tIns="228600" rIns="228600" bIns="228600"/>
+          <a:lstStyle/>
+          <a:p>
+            <a:pPr algn="ctr">
+              <a:spcAft>
+                <a:spcPts val="1400"/>
+              </a:spcAft>
+              <a:defRPr sz="1300" b="1">
+                <a:solidFill>
+                  <a:srgbClr val="2563EB"/>
                 </a:solidFill>
                 <a:latin typeface="Segoe UI"/>
               </a:defRPr>
@@ -5618,48 +6377,52 @@
               <a:t>DAX &amp; PQ</a:t>
             </a:r>
           </a:p>
-        </p:txBody>
-      </p:sp>
-      <p:sp>
-        <p:nvSpPr>
-          <p:cNvPr id="13" name="TextBox 12"/>
-          <p:cNvSpPr txBox="1"/>
-          <p:nvPr/>
-        </p:nvSpPr>
-        <p:spPr>
-          <a:xfrm>
-            <a:off x="9052560" y="3291840"/>
-            <a:ext cx="2560320" cy="2286000"/>
-          </a:xfrm>
-          <a:prstGeom prst="rect">
-            <a:avLst/>
-          </a:prstGeom>
-          <a:noFill/>
-        </p:spPr>
-        <p:txBody>
-          <a:bodyPr wrap="square">
-            <a:spAutoFit/>
-          </a:bodyPr>
-          <a:lstStyle/>
-          <a:p>
-            <a:pPr>
-              <a:defRPr sz="1300">
-                <a:solidFill>
-                  <a:srgbClr val="334155"/>
-                </a:solidFill>
-                <a:latin typeface="Segoe UI"/>
-              </a:defRPr>
-            </a:pPr>
-            <a:r>
-              <a:t>Data modeling</a:t>
-            </a:r>
-            <a:br/>
-            <a:r>
-              <a:t>Power Query cleansing</a:t>
-            </a:r>
-            <a:br/>
-            <a:r>
-              <a:t>KPI measures</a:t>
+          <a:p>
+            <a:pPr>
+              <a:spcAft>
+                <a:spcPts val="1000"/>
+              </a:spcAft>
+              <a:defRPr sz="1100">
+                <a:solidFill>
+                  <a:srgbClr val="FFFFFF"/>
+                </a:solidFill>
+                <a:latin typeface="Segoe UI"/>
+              </a:defRPr>
+            </a:pPr>
+            <a:r>
+              <a:t>◆  Custom calculated measures</a:t>
+            </a:r>
+          </a:p>
+          <a:p>
+            <a:pPr>
+              <a:spcAft>
+                <a:spcPts val="1000"/>
+              </a:spcAft>
+              <a:defRPr sz="1100">
+                <a:solidFill>
+                  <a:srgbClr val="FFFFFF"/>
+                </a:solidFill>
+                <a:latin typeface="Segoe UI"/>
+              </a:defRPr>
+            </a:pPr>
+            <a:r>
+              <a:t>◆  Power Query pipelines</a:t>
+            </a:r>
+          </a:p>
+          <a:p>
+            <a:pPr>
+              <a:spcAft>
+                <a:spcPts val="1000"/>
+              </a:spcAft>
+              <a:defRPr sz="1100">
+                <a:solidFill>
+                  <a:srgbClr val="FFFFFF"/>
+                </a:solidFill>
+                <a:latin typeface="Segoe UI"/>
+              </a:defRPr>
+            </a:pPr>
+            <a:r>
+              <a:t>◆  Star-schema modeling</a:t>
             </a:r>
           </a:p>
         </p:txBody>
@@ -5710,8 +6473,8 @@
         </p:nvSpPr>
         <p:spPr>
           <a:xfrm>
-            <a:off x="548640" y="457200"/>
-            <a:ext cx="1371600" cy="1097280"/>
+            <a:off x="548640" y="365760"/>
+            <a:ext cx="1371600" cy="822960"/>
           </a:xfrm>
           <a:prstGeom prst="rect">
             <a:avLst/>
@@ -5725,9 +6488,9 @@
           <a:lstStyle/>
           <a:p>
             <a:pPr>
-              <a:defRPr sz="3600" b="1">
-                <a:solidFill>
-                  <a:srgbClr val="4F46E5"/>
+              <a:defRPr sz="3800" b="1">
+                <a:solidFill>
+                  <a:srgbClr val="2563EB"/>
                 </a:solidFill>
                 <a:latin typeface="Segoe UI"/>
               </a:defRPr>
@@ -5746,7 +6509,7 @@
         </p:nvSpPr>
         <p:spPr>
           <a:xfrm>
-            <a:off x="548640" y="1417320"/>
+            <a:off x="548640" y="1280160"/>
             <a:ext cx="3657600" cy="36576"/>
           </a:xfrm>
           <a:prstGeom prst="rect">
@@ -5770,8 +6533,8 @@
         </p:nvSpPr>
         <p:spPr>
           <a:xfrm>
-            <a:off x="548640" y="1554480"/>
-            <a:ext cx="7315200" cy="640080"/>
+            <a:off x="548640" y="1417320"/>
+            <a:ext cx="8229600" cy="640080"/>
           </a:xfrm>
           <a:prstGeom prst="rect">
             <a:avLst/>
@@ -5829,7 +6592,7 @@
               </a:defRPr>
             </a:pPr>
             <a:r>
-              <a:t>5 / 10</a:t>
+              <a:t>5 / 14</a:t>
             </a:r>
           </a:p>
         </p:txBody>
@@ -5859,7 +6622,7 @@
             <a:pPr>
               <a:defRPr sz="1600" b="1">
                 <a:solidFill>
-                  <a:srgbClr val="4F46E5"/>
+                  <a:srgbClr val="2563EB"/>
                 </a:solidFill>
                 <a:latin typeface="Segoe UI"/>
               </a:defRPr>
@@ -5975,33 +6738,50 @@
       </p:sp>
       <p:sp>
         <p:nvSpPr>
-          <p:cNvPr id="8" name="TextBox 7"/>
-          <p:cNvSpPr txBox="1"/>
+          <p:cNvPr id="8" name="Rounded Rectangle 7"/>
+          <p:cNvSpPr/>
           <p:nvPr/>
         </p:nvSpPr>
         <p:spPr>
           <a:xfrm>
             <a:off x="6217920" y="2377440"/>
-            <a:ext cx="5303520" cy="3474720"/>
-          </a:xfrm>
-          <a:prstGeom prst="rect">
-            <a:avLst/>
-          </a:prstGeom>
-          <a:noFill/>
-        </p:spPr>
-        <p:txBody>
-          <a:bodyPr wrap="square">
-            <a:spAutoFit/>
-          </a:bodyPr>
-          <a:lstStyle/>
-          <a:p>
-            <a:pPr>
-              <a:spcAft>
-                <a:spcPts val="1500"/>
-              </a:spcAft>
-              <a:defRPr sz="1500" b="1">
-                <a:solidFill>
-                  <a:srgbClr val="4F46E5"/>
+            <a:ext cx="5303520" cy="3566160"/>
+          </a:xfrm>
+          <a:prstGeom prst="roundRect">
+            <a:avLst/>
+          </a:prstGeom>
+          <a:solidFill>
+            <a:srgbClr val="1A152C"/>
+          </a:solidFill>
+          <a:ln>
+            <a:noFill/>
+          </a:ln>
+        </p:spPr>
+        <p:style>
+          <a:lnRef idx="1">
+            <a:schemeClr val="accent1"/>
+          </a:lnRef>
+          <a:fillRef idx="3">
+            <a:schemeClr val="accent1"/>
+          </a:fillRef>
+          <a:effectRef idx="2">
+            <a:schemeClr val="accent1"/>
+          </a:effectRef>
+          <a:fontRef idx="minor">
+            <a:schemeClr val="lt1"/>
+          </a:fontRef>
+        </p:style>
+        <p:txBody>
+          <a:bodyPr rtlCol="0" anchor="ctr" wrap="square" lIns="228600" tIns="228600" rIns="228600" bIns="228600"/>
+          <a:lstStyle/>
+          <a:p>
+            <a:pPr algn="ctr">
+              <a:spcAft>
+                <a:spcPts val="1400"/>
+              </a:spcAft>
+              <a:defRPr sz="1300" b="1">
+                <a:solidFill>
+                  <a:srgbClr val="22C55E"/>
                 </a:solidFill>
                 <a:latin typeface="Segoe UI"/>
               </a:defRPr>
@@ -6012,137 +6792,82 @@
           </a:p>
           <a:p>
             <a:pPr>
-              <a:defRPr sz="1200" b="1">
-                <a:solidFill>
-                  <a:srgbClr val="334155"/>
-                </a:solidFill>
-              </a:defRPr>
-            </a:pPr>
-            <a:r>
-              <a:t>• Raw Input Volume:</a:t>
-            </a:r>
-          </a:p>
-          <a:p>
-            <a:pPr>
-              <a:spcAft>
-                <a:spcPts val="800"/>
+              <a:spcAft>
+                <a:spcPts val="1000"/>
               </a:spcAft>
               <a:defRPr sz="1100">
                 <a:solidFill>
-                  <a:srgbClr val="64748B"/>
-                </a:solidFill>
-              </a:defRPr>
-            </a:pPr>
-            <a:r>
-              <a:t>  11,848 booking records (dirty logs)</a:t>
-            </a:r>
-          </a:p>
-          <a:p>
-            <a:pPr>
-              <a:defRPr sz="1200" b="1">
-                <a:solidFill>
-                  <a:srgbClr val="334155"/>
-                </a:solidFill>
-              </a:defRPr>
-            </a:pPr>
-            <a:r>
-              <a:t>• Clean Output Volume:</a:t>
-            </a:r>
-          </a:p>
-          <a:p>
-            <a:pPr>
-              <a:spcAft>
-                <a:spcPts val="800"/>
+                  <a:srgbClr val="FFFFFF"/>
+                </a:solidFill>
+                <a:latin typeface="Segoe UI"/>
+              </a:defRPr>
+            </a:pPr>
+            <a:r>
+              <a:t>◆  Raw Input Volume: 11,848 booking records</a:t>
+            </a:r>
+          </a:p>
+          <a:p>
+            <a:pPr>
+              <a:spcAft>
+                <a:spcPts val="1000"/>
               </a:spcAft>
               <a:defRPr sz="1100">
                 <a:solidFill>
-                  <a:srgbClr val="64748B"/>
-                </a:solidFill>
-              </a:defRPr>
-            </a:pPr>
-            <a:r>
-              <a:t>  10,381 booking records (fully validated)</a:t>
-            </a:r>
-          </a:p>
-          <a:p>
-            <a:pPr>
-              <a:defRPr sz="1200" b="1">
-                <a:solidFill>
-                  <a:srgbClr val="334155"/>
-                </a:solidFill>
-              </a:defRPr>
-            </a:pPr>
-            <a:r>
-              <a:t>• Database Constraint Enforced:</a:t>
-            </a:r>
-          </a:p>
-          <a:p>
-            <a:pPr>
-              <a:spcAft>
-                <a:spcPts val="800"/>
+                  <a:srgbClr val="FFFFFF"/>
+                </a:solidFill>
+                <a:latin typeface="Segoe UI"/>
+              </a:defRPr>
+            </a:pPr>
+            <a:r>
+              <a:t>◆  Clean Output Volume: 10,381 booking records</a:t>
+            </a:r>
+          </a:p>
+          <a:p>
+            <a:pPr>
+              <a:spcAft>
+                <a:spcPts val="1000"/>
               </a:spcAft>
               <a:defRPr sz="1100">
                 <a:solidFill>
-                  <a:srgbClr val="64748B"/>
-                </a:solidFill>
-              </a:defRPr>
-            </a:pPr>
-            <a:r>
-              <a:t>  Travel_Date &gt;= Booking_Date</a:t>
-            </a:r>
-          </a:p>
-          <a:p>
-            <a:pPr>
-              <a:defRPr sz="1200" b="1">
-                <a:solidFill>
-                  <a:srgbClr val="334155"/>
-                </a:solidFill>
-              </a:defRPr>
-            </a:pPr>
-            <a:r>
-              <a:t>• Deduplicated Entries:</a:t>
-            </a:r>
-          </a:p>
-          <a:p>
-            <a:pPr>
-              <a:spcAft>
-                <a:spcPts val="800"/>
+                  <a:srgbClr val="FFFFFF"/>
+                </a:solidFill>
+                <a:latin typeface="Segoe UI"/>
+              </a:defRPr>
+            </a:pPr>
+            <a:r>
+              <a:t>◆  Database Constraint Enforced: Travel_Date &gt;= Booking_Date</a:t>
+            </a:r>
+          </a:p>
+          <a:p>
+            <a:pPr>
+              <a:spcAft>
+                <a:spcPts val="1000"/>
               </a:spcAft>
               <a:defRPr sz="1100">
                 <a:solidFill>
-                  <a:srgbClr val="64748B"/>
-                </a:solidFill>
-              </a:defRPr>
-            </a:pPr>
-            <a:r>
-              <a:t>  Removed 601 exact duplicate booking rows</a:t>
-            </a:r>
-          </a:p>
-          <a:p>
-            <a:pPr>
-              <a:defRPr sz="1200" b="1">
-                <a:solidFill>
-                  <a:srgbClr val="334155"/>
-                </a:solidFill>
-              </a:defRPr>
-            </a:pPr>
-            <a:r>
-              <a:t>• Customer Retention Target:</a:t>
-            </a:r>
-          </a:p>
-          <a:p>
-            <a:pPr>
-              <a:spcAft>
-                <a:spcPts val="800"/>
+                  <a:srgbClr val="FFFFFF"/>
+                </a:solidFill>
+                <a:latin typeface="Segoe UI"/>
+              </a:defRPr>
+            </a:pPr>
+            <a:r>
+              <a:t>◆  Deduplicated Entries: Removed 601 duplicate rows</a:t>
+            </a:r>
+          </a:p>
+          <a:p>
+            <a:pPr>
+              <a:spcAft>
+                <a:spcPts val="1000"/>
               </a:spcAft>
               <a:defRPr sz="1100">
                 <a:solidFill>
-                  <a:srgbClr val="64748B"/>
-                </a:solidFill>
-              </a:defRPr>
-            </a:pPr>
-            <a:r>
-              <a:t>  Cleaned skew lands at 75.0% retention rate</a:t>
+                  <a:srgbClr val="FFFFFF"/>
+                </a:solidFill>
+                <a:latin typeface="Segoe UI"/>
+              </a:defRPr>
+            </a:pPr>
+            <a:r>
+              <a:t>◆  Customer Retention Target: Cleansed at 75.0% rate</a:t>
             </a:r>
           </a:p>
         </p:txBody>
@@ -6193,8 +6918,8 @@
         </p:nvSpPr>
         <p:spPr>
           <a:xfrm>
-            <a:off x="548640" y="457200"/>
-            <a:ext cx="1371600" cy="1097280"/>
+            <a:off x="548640" y="365760"/>
+            <a:ext cx="1371600" cy="822960"/>
           </a:xfrm>
           <a:prstGeom prst="rect">
             <a:avLst/>
@@ -6208,9 +6933,9 @@
           <a:lstStyle/>
           <a:p>
             <a:pPr>
-              <a:defRPr sz="3600" b="1">
-                <a:solidFill>
-                  <a:srgbClr val="4F46E5"/>
+              <a:defRPr sz="3800" b="1">
+                <a:solidFill>
+                  <a:srgbClr val="2563EB"/>
                 </a:solidFill>
                 <a:latin typeface="Segoe UI"/>
               </a:defRPr>
@@ -6229,7 +6954,7 @@
         </p:nvSpPr>
         <p:spPr>
           <a:xfrm>
-            <a:off x="548640" y="1417320"/>
+            <a:off x="548640" y="1280160"/>
             <a:ext cx="3657600" cy="36576"/>
           </a:xfrm>
           <a:prstGeom prst="rect">
@@ -6253,8 +6978,8 @@
         </p:nvSpPr>
         <p:spPr>
           <a:xfrm>
-            <a:off x="548640" y="1554480"/>
-            <a:ext cx="7315200" cy="640080"/>
+            <a:off x="548640" y="1417320"/>
+            <a:ext cx="8229600" cy="640080"/>
           </a:xfrm>
           <a:prstGeom prst="rect">
             <a:avLst/>
@@ -6312,7 +7037,7 @@
               </a:defRPr>
             </a:pPr>
             <a:r>
-              <a:t>6 / 10</a:t>
+              <a:t>6 / 14</a:t>
             </a:r>
           </a:p>
         </p:txBody>
@@ -6342,7 +7067,7 @@
             <a:pPr>
               <a:defRPr sz="1600" b="1">
                 <a:solidFill>
-                  <a:srgbClr val="4F46E5"/>
+                  <a:srgbClr val="2563EB"/>
                 </a:solidFill>
                 <a:latin typeface="Segoe UI"/>
               </a:defRPr>
@@ -6458,33 +7183,50 @@
       </p:sp>
       <p:sp>
         <p:nvSpPr>
-          <p:cNvPr id="8" name="TextBox 7"/>
-          <p:cNvSpPr txBox="1"/>
+          <p:cNvPr id="8" name="Rounded Rectangle 7"/>
+          <p:cNvSpPr/>
           <p:nvPr/>
         </p:nvSpPr>
         <p:spPr>
           <a:xfrm>
             <a:off x="6217920" y="2377440"/>
-            <a:ext cx="5303520" cy="3474720"/>
-          </a:xfrm>
-          <a:prstGeom prst="rect">
-            <a:avLst/>
-          </a:prstGeom>
-          <a:noFill/>
-        </p:spPr>
-        <p:txBody>
-          <a:bodyPr wrap="square">
-            <a:spAutoFit/>
-          </a:bodyPr>
-          <a:lstStyle/>
-          <a:p>
-            <a:pPr>
-              <a:spcAft>
-                <a:spcPts val="1500"/>
-              </a:spcAft>
-              <a:defRPr sz="1500" b="1">
-                <a:solidFill>
-                  <a:srgbClr val="4F46E5"/>
+            <a:ext cx="5303520" cy="3566160"/>
+          </a:xfrm>
+          <a:prstGeom prst="roundRect">
+            <a:avLst/>
+          </a:prstGeom>
+          <a:solidFill>
+            <a:srgbClr val="1A152C"/>
+          </a:solidFill>
+          <a:ln>
+            <a:noFill/>
+          </a:ln>
+        </p:spPr>
+        <p:style>
+          <a:lnRef idx="1">
+            <a:schemeClr val="accent1"/>
+          </a:lnRef>
+          <a:fillRef idx="3">
+            <a:schemeClr val="accent1"/>
+          </a:fillRef>
+          <a:effectRef idx="2">
+            <a:schemeClr val="accent1"/>
+          </a:effectRef>
+          <a:fontRef idx="minor">
+            <a:schemeClr val="lt1"/>
+          </a:fontRef>
+        </p:style>
+        <p:txBody>
+          <a:bodyPr rtlCol="0" anchor="ctr" wrap="square" lIns="228600" tIns="228600" rIns="228600" bIns="228600"/>
+          <a:lstStyle/>
+          <a:p>
+            <a:pPr algn="ctr">
+              <a:spcAft>
+                <a:spcPts val="1400"/>
+              </a:spcAft>
+              <a:defRPr sz="1300" b="1">
+                <a:solidFill>
+                  <a:srgbClr val="EAB308"/>
                 </a:solidFill>
                 <a:latin typeface="Segoe UI"/>
               </a:defRPr>
@@ -6495,41 +7237,18 @@
           </a:p>
           <a:p>
             <a:pPr>
-              <a:defRPr sz="1200" b="1">
-                <a:solidFill>
-                  <a:srgbClr val="334155"/>
-                </a:solidFill>
-              </a:defRPr>
-            </a:pPr>
-            <a:r>
-              <a:t>• Customers (Dimension):</a:t>
-            </a:r>
-          </a:p>
-          <a:p>
-            <a:pPr>
               <a:spcAft>
                 <a:spcPts val="1000"/>
               </a:spcAft>
-              <a:defRPr sz="1050">
-                <a:solidFill>
-                  <a:srgbClr val="64748B"/>
-                </a:solidFill>
-              </a:defRPr>
-            </a:pPr>
-            <a:r>
-              <a:t>  Customer_ID (PK) | Name | Email | Phone | Gender | Age</a:t>
-            </a:r>
-          </a:p>
-          <a:p>
-            <a:pPr>
-              <a:defRPr sz="1200" b="1">
-                <a:solidFill>
-                  <a:srgbClr val="334155"/>
-                </a:solidFill>
-              </a:defRPr>
-            </a:pPr>
-            <a:r>
-              <a:t>• Buses (Dimension):</a:t>
+              <a:defRPr sz="1100">
+                <a:solidFill>
+                  <a:srgbClr val="FFFFFF"/>
+                </a:solidFill>
+                <a:latin typeface="Segoe UI"/>
+              </a:defRPr>
+            </a:pPr>
+            <a:r>
+              <a:t>◆  Customers: Customer_ID (PK) | Name | Email | Phone | Gender | Age</a:t>
             </a:r>
           </a:p>
           <a:p>
@@ -6537,26 +7256,15 @@
               <a:spcAft>
                 <a:spcPts val="1000"/>
               </a:spcAft>
-              <a:defRPr sz="1050">
-                <a:solidFill>
-                  <a:srgbClr val="64748B"/>
-                </a:solidFill>
-              </a:defRPr>
-            </a:pPr>
-            <a:r>
-              <a:t>  Bus_ID (PK) | Bus_Number | Bus_Type | Capacity</a:t>
-            </a:r>
-          </a:p>
-          <a:p>
-            <a:pPr>
-              <a:defRPr sz="1200" b="1">
-                <a:solidFill>
-                  <a:srgbClr val="334155"/>
-                </a:solidFill>
-              </a:defRPr>
-            </a:pPr>
-            <a:r>
-              <a:t>• Routes (Dimension):</a:t>
+              <a:defRPr sz="1100">
+                <a:solidFill>
+                  <a:srgbClr val="FFFFFF"/>
+                </a:solidFill>
+                <a:latin typeface="Segoe UI"/>
+              </a:defRPr>
+            </a:pPr>
+            <a:r>
+              <a:t>◆  Buses: Bus_ID (PK) | Bus_Number | Bus_Type | Capacity</a:t>
             </a:r>
           </a:p>
           <a:p>
@@ -6564,26 +7272,15 @@
               <a:spcAft>
                 <a:spcPts val="1000"/>
               </a:spcAft>
-              <a:defRPr sz="1050">
-                <a:solidFill>
-                  <a:srgbClr val="64748B"/>
-                </a:solidFill>
-              </a:defRPr>
-            </a:pPr>
-            <a:r>
-              <a:t>  Route_ID (PK) | Source | Destination | Distance</a:t>
-            </a:r>
-          </a:p>
-          <a:p>
-            <a:pPr>
-              <a:defRPr sz="1200" b="1">
-                <a:solidFill>
-                  <a:srgbClr val="334155"/>
-                </a:solidFill>
-              </a:defRPr>
-            </a:pPr>
-            <a:r>
-              <a:t>• Bookings (Fact):</a:t>
+              <a:defRPr sz="1100">
+                <a:solidFill>
+                  <a:srgbClr val="FFFFFF"/>
+                </a:solidFill>
+                <a:latin typeface="Segoe UI"/>
+              </a:defRPr>
+            </a:pPr>
+            <a:r>
+              <a:t>◆  Routes: Route_ID (PK) | Source | Destination | Distance</a:t>
             </a:r>
           </a:p>
           <a:p>
@@ -6591,14 +7288,15 @@
               <a:spcAft>
                 <a:spcPts val="1000"/>
               </a:spcAft>
-              <a:defRPr sz="1050">
-                <a:solidFill>
-                  <a:srgbClr val="64748B"/>
-                </a:solidFill>
-              </a:defRPr>
-            </a:pPr>
-            <a:r>
-              <a:t>  Booking_ID (PK) | Customer_ID (FK) | Bus_ID (FK) | Route_ID (FK) | Booking_Date | Travel_Date | Seat_Number | Fare_Amount | Booking_Status</a:t>
+              <a:defRPr sz="1100">
+                <a:solidFill>
+                  <a:srgbClr val="FFFFFF"/>
+                </a:solidFill>
+                <a:latin typeface="Segoe UI"/>
+              </a:defRPr>
+            </a:pPr>
+            <a:r>
+              <a:t>◆  Bookings: Booking_ID (PK) | Customer_ID (FK) | Bus_ID (FK) | Route_ID (FK)</a:t>
             </a:r>
           </a:p>
         </p:txBody>
@@ -6649,8 +7347,8 @@
         </p:nvSpPr>
         <p:spPr>
           <a:xfrm>
-            <a:off x="548640" y="457200"/>
-            <a:ext cx="1371600" cy="1097280"/>
+            <a:off x="548640" y="365760"/>
+            <a:ext cx="1371600" cy="822960"/>
           </a:xfrm>
           <a:prstGeom prst="rect">
             <a:avLst/>
@@ -6664,9 +7362,9 @@
           <a:lstStyle/>
           <a:p>
             <a:pPr>
-              <a:defRPr sz="3600" b="1">
-                <a:solidFill>
-                  <a:srgbClr val="4F46E5"/>
+              <a:defRPr sz="3800" b="1">
+                <a:solidFill>
+                  <a:srgbClr val="2563EB"/>
                 </a:solidFill>
                 <a:latin typeface="Segoe UI"/>
               </a:defRPr>
@@ -6685,7 +7383,7 @@
         </p:nvSpPr>
         <p:spPr>
           <a:xfrm>
-            <a:off x="548640" y="1417320"/>
+            <a:off x="548640" y="1280160"/>
             <a:ext cx="3657600" cy="36576"/>
           </a:xfrm>
           <a:prstGeom prst="rect">
@@ -6709,8 +7407,8 @@
         </p:nvSpPr>
         <p:spPr>
           <a:xfrm>
-            <a:off x="548640" y="1554480"/>
-            <a:ext cx="7315200" cy="640080"/>
+            <a:off x="548640" y="1417320"/>
+            <a:ext cx="8229600" cy="640080"/>
           </a:xfrm>
           <a:prstGeom prst="rect">
             <a:avLst/>
@@ -6732,7 +7430,7 @@
               </a:defRPr>
             </a:pPr>
             <a:r>
-              <a:t>Executive Overview Dashboard</a:t>
+              <a:t>Executive Overview Dashboard (Page 1)</a:t>
             </a:r>
           </a:p>
         </p:txBody>
@@ -6768,7 +7466,7 @@
               </a:defRPr>
             </a:pPr>
             <a:r>
-              <a:t>7 / 10</a:t>
+              <a:t>7 / 14</a:t>
             </a:r>
           </a:p>
         </p:txBody>
@@ -6801,13 +7499,13 @@
               </a:spcAft>
               <a:defRPr sz="1500" b="1">
                 <a:solidFill>
-                  <a:srgbClr val="4F46E5"/>
-                </a:solidFill>
-                <a:latin typeface="Segoe UI"/>
-              </a:defRPr>
-            </a:pPr>
-            <a:r>
-              <a:t>PAGE 1: CORE KPIs &amp; TRENDS</a:t>
+                  <a:srgbClr val="2563EB"/>
+                </a:solidFill>
+                <a:latin typeface="Segoe UI"/>
+              </a:defRPr>
+            </a:pPr>
+            <a:r>
+              <a:t>CORE KPIs &amp; GENERAL DEMANDS</a:t>
             </a:r>
           </a:p>
           <a:p>
@@ -6878,7 +7576,7 @@
       </p:sp>
       <p:pic>
         <p:nvPicPr>
-          <p:cNvPr id="7" name="Picture 6" descr="media__1784141692134.png"/>
+          <p:cNvPr id="7" name="Picture 6" descr="Screenshot 2026-07-16 005206.png"/>
           <p:cNvPicPr>
             <a:picLocks noChangeAspect="1"/>
           </p:cNvPicPr>
@@ -6946,8 +7644,8 @@
         </p:nvSpPr>
         <p:spPr>
           <a:xfrm>
-            <a:off x="548640" y="457200"/>
-            <a:ext cx="1371600" cy="1097280"/>
+            <a:off x="548640" y="365760"/>
+            <a:ext cx="1371600" cy="822960"/>
           </a:xfrm>
           <a:prstGeom prst="rect">
             <a:avLst/>
@@ -6961,9 +7659,9 @@
           <a:lstStyle/>
           <a:p>
             <a:pPr>
-              <a:defRPr sz="3600" b="1">
-                <a:solidFill>
-                  <a:srgbClr val="4F46E5"/>
+              <a:defRPr sz="3800" b="1">
+                <a:solidFill>
+                  <a:srgbClr val="2563EB"/>
                 </a:solidFill>
                 <a:latin typeface="Segoe UI"/>
               </a:defRPr>
@@ -6982,7 +7680,7 @@
         </p:nvSpPr>
         <p:spPr>
           <a:xfrm>
-            <a:off x="548640" y="1417320"/>
+            <a:off x="548640" y="1280160"/>
             <a:ext cx="3657600" cy="36576"/>
           </a:xfrm>
           <a:prstGeom prst="rect">
@@ -7006,8 +7704,8 @@
         </p:nvSpPr>
         <p:spPr>
           <a:xfrm>
-            <a:off x="548640" y="1554480"/>
-            <a:ext cx="7315200" cy="640080"/>
+            <a:off x="548640" y="1417320"/>
+            <a:ext cx="8229600" cy="640080"/>
           </a:xfrm>
           <a:prstGeom prst="rect">
             <a:avLst/>
@@ -7029,7 +7727,7 @@
               </a:defRPr>
             </a:pPr>
             <a:r>
-              <a:t>Operations &amp; Bookings Analysis</a:t>
+              <a:t>Operations &amp; Bookings Analysis (Page 2)</a:t>
             </a:r>
           </a:p>
         </p:txBody>
@@ -7065,7 +7763,7 @@
               </a:defRPr>
             </a:pPr>
             <a:r>
-              <a:t>8 / 10</a:t>
+              <a:t>8 / 14</a:t>
             </a:r>
           </a:p>
         </p:txBody>
@@ -7098,13 +7796,13 @@
               </a:spcAft>
               <a:defRPr sz="1500" b="1">
                 <a:solidFill>
-                  <a:srgbClr val="4F46E5"/>
-                </a:solidFill>
-                <a:latin typeface="Segoe UI"/>
-              </a:defRPr>
-            </a:pPr>
-            <a:r>
-              <a:t>PAGE 2: DEMAND &amp; VERIFICATION</a:t>
+                  <a:srgbClr val="2563EB"/>
+                </a:solidFill>
+                <a:latin typeface="Segoe UI"/>
+              </a:defRPr>
+            </a:pPr>
+            <a:r>
+              <a:t>DEMAND &amp; VERIFICATION RATIOS</a:t>
             </a:r>
           </a:p>
           <a:p>
@@ -7175,7 +7873,7 @@
       </p:sp>
       <p:pic>
         <p:nvPicPr>
-          <p:cNvPr id="7" name="Picture 6" descr="media__1784141725211.png"/>
+          <p:cNvPr id="7" name="Picture 6" descr="Screenshot 2026-07-16 005249.png"/>
           <p:cNvPicPr>
             <a:picLocks noChangeAspect="1"/>
           </p:cNvPicPr>
@@ -7243,8 +7941,8 @@
         </p:nvSpPr>
         <p:spPr>
           <a:xfrm>
-            <a:off x="548640" y="457200"/>
-            <a:ext cx="1371600" cy="1097280"/>
+            <a:off x="548640" y="365760"/>
+            <a:ext cx="1371600" cy="822960"/>
           </a:xfrm>
           <a:prstGeom prst="rect">
             <a:avLst/>
@@ -7258,9 +7956,9 @@
           <a:lstStyle/>
           <a:p>
             <a:pPr>
-              <a:defRPr sz="3600" b="1">
-                <a:solidFill>
-                  <a:srgbClr val="4F46E5"/>
+              <a:defRPr sz="3800" b="1">
+                <a:solidFill>
+                  <a:srgbClr val="2563EB"/>
                 </a:solidFill>
                 <a:latin typeface="Segoe UI"/>
               </a:defRPr>
@@ -7279,7 +7977,7 @@
         </p:nvSpPr>
         <p:spPr>
           <a:xfrm>
-            <a:off x="548640" y="1417320"/>
+            <a:off x="548640" y="1280160"/>
             <a:ext cx="3657600" cy="36576"/>
           </a:xfrm>
           <a:prstGeom prst="rect">
@@ -7303,8 +8001,8 @@
         </p:nvSpPr>
         <p:spPr>
           <a:xfrm>
-            <a:off x="548640" y="1554480"/>
-            <a:ext cx="7315200" cy="640080"/>
+            <a:off x="548640" y="1417320"/>
+            <a:ext cx="8229600" cy="640080"/>
           </a:xfrm>
           <a:prstGeom prst="rect">
             <a:avLst/>
@@ -7326,7 +8024,7 @@
               </a:defRPr>
             </a:pPr>
             <a:r>
-              <a:t>Revenue &amp; Yield Optimization</a:t>
+              <a:t>Revenue &amp; Yield Optimization (Page 3)</a:t>
             </a:r>
           </a:p>
         </p:txBody>
@@ -7362,7 +8060,7 @@
               </a:defRPr>
             </a:pPr>
             <a:r>
-              <a:t>9 / 10</a:t>
+              <a:t>9 / 14</a:t>
             </a:r>
           </a:p>
         </p:txBody>
@@ -7395,13 +8093,13 @@
               </a:spcAft>
               <a:defRPr sz="1500" b="1">
                 <a:solidFill>
-                  <a:srgbClr val="4F46E5"/>
-                </a:solidFill>
-                <a:latin typeface="Segoe UI"/>
-              </a:defRPr>
-            </a:pPr>
-            <a:r>
-              <a:t>PAGE 3: FINANCIAL YIELD CORRIDORS</a:t>
+                  <a:srgbClr val="2563EB"/>
+                </a:solidFill>
+                <a:latin typeface="Segoe UI"/>
+              </a:defRPr>
+            </a:pPr>
+            <a:r>
+              <a:t>FINANCIAL YIELD CORRIDORS</a:t>
             </a:r>
           </a:p>
           <a:p>
@@ -7472,7 +8170,7 @@
       </p:sp>
       <p:pic>
         <p:nvPicPr>
-          <p:cNvPr id="7" name="Picture 6" descr="media__1784141745466.png"/>
+          <p:cNvPr id="7" name="Picture 6" descr="Screenshot 2026-07-16 005307.png"/>
           <p:cNvPicPr>
             <a:picLocks noChangeAspect="1"/>
           </p:cNvPicPr>

--- a/Bus Booking Analytics System (PowerBI)/documents/Bus_Booking_Analytics_PowerBI_light.pptx
+++ b/Bus Booking Analytics System (PowerBI)/documents/Bus_Booking_Analytics_PowerBI_light.pptx
@@ -3135,7 +3135,7 @@
             <a:pPr>
               <a:defRPr sz="1400" b="1">
                 <a:solidFill>
-                  <a:srgbClr val="2563EB"/>
+                  <a:srgbClr val="06B6D4"/>
                 </a:solidFill>
                 <a:latin typeface="Segoe UI"/>
               </a:defRPr>
@@ -3171,7 +3171,7 @@
             <a:pPr>
               <a:defRPr sz="4000" b="1">
                 <a:solidFill>
-                  <a:srgbClr val="0F172A"/>
+                  <a:srgbClr val="054A75"/>
                 </a:solidFill>
                 <a:latin typeface="Segoe UI"/>
               </a:defRPr>
@@ -3249,7 +3249,7 @@
               </a:defRPr>
             </a:pPr>
             <a:r>
-              <a:t>Submitted by: Gururaj Shetty  |  Revature Data Analytics Phase 2</a:t>
+              <a:t>Submitted by: Harish, Harini, Gururaj Shetty  |  Revature Data Analytics Phase 2</a:t>
             </a:r>
             <a:br/>
             <a:r>
@@ -3321,7 +3321,7 @@
             <a:pPr>
               <a:defRPr sz="3800" b="1">
                 <a:solidFill>
-                  <a:srgbClr val="2563EB"/>
+                  <a:srgbClr val="06B6D4"/>
                 </a:solidFill>
                 <a:latin typeface="Segoe UI"/>
               </a:defRPr>
@@ -3381,7 +3381,7 @@
             <a:pPr>
               <a:defRPr sz="2400" b="1">
                 <a:solidFill>
-                  <a:srgbClr val="0F172A"/>
+                  <a:srgbClr val="054A75"/>
                 </a:solidFill>
                 <a:latin typeface="Segoe UI"/>
               </a:defRPr>
@@ -3436,7 +3436,7 @@
         </p:nvSpPr>
         <p:spPr>
           <a:xfrm>
-            <a:off x="548640" y="2377440"/>
+            <a:off x="557784" y="2377440"/>
             <a:ext cx="5303520" cy="3657600"/>
           </a:xfrm>
           <a:prstGeom prst="rect">
@@ -3456,7 +3456,7 @@
               </a:spcAft>
               <a:defRPr sz="1500" b="1">
                 <a:solidFill>
-                  <a:srgbClr val="2563EB"/>
+                  <a:srgbClr val="06B6D4"/>
                 </a:solidFill>
                 <a:latin typeface="Segoe UI"/>
               </a:defRPr>
@@ -3547,8 +3547,8 @@
         </p:blipFill>
         <p:spPr>
           <a:xfrm>
-            <a:off x="6217920" y="2286000"/>
-            <a:ext cx="5394960" cy="3035808"/>
+            <a:off x="6409944" y="2286000"/>
+            <a:ext cx="5212080" cy="2926080"/>
           </a:xfrm>
           <a:prstGeom prst="rect">
             <a:avLst/>
@@ -3618,7 +3618,7 @@
             <a:pPr>
               <a:defRPr sz="3800" b="1">
                 <a:solidFill>
-                  <a:srgbClr val="2563EB"/>
+                  <a:srgbClr val="06B6D4"/>
                 </a:solidFill>
                 <a:latin typeface="Segoe UI"/>
               </a:defRPr>
@@ -3678,7 +3678,7 @@
             <a:pPr>
               <a:defRPr sz="2400" b="1">
                 <a:solidFill>
-                  <a:srgbClr val="0F172A"/>
+                  <a:srgbClr val="054A75"/>
                 </a:solidFill>
                 <a:latin typeface="Segoe UI"/>
               </a:defRPr>
@@ -3733,7 +3733,7 @@
         </p:nvSpPr>
         <p:spPr>
           <a:xfrm>
-            <a:off x="548640" y="2377440"/>
+            <a:off x="557784" y="2377440"/>
             <a:ext cx="5303520" cy="3657600"/>
           </a:xfrm>
           <a:prstGeom prst="rect">
@@ -3753,7 +3753,7 @@
               </a:spcAft>
               <a:defRPr sz="1500" b="1">
                 <a:solidFill>
-                  <a:srgbClr val="2563EB"/>
+                  <a:srgbClr val="06B6D4"/>
                 </a:solidFill>
                 <a:latin typeface="Segoe UI"/>
               </a:defRPr>
@@ -3844,8 +3844,8 @@
         </p:blipFill>
         <p:spPr>
           <a:xfrm>
-            <a:off x="6217920" y="2286000"/>
-            <a:ext cx="5394960" cy="3035808"/>
+            <a:off x="6409944" y="2286000"/>
+            <a:ext cx="5212080" cy="2926080"/>
           </a:xfrm>
           <a:prstGeom prst="rect">
             <a:avLst/>
@@ -3915,7 +3915,7 @@
             <a:pPr>
               <a:defRPr sz="3800" b="1">
                 <a:solidFill>
-                  <a:srgbClr val="2563EB"/>
+                  <a:srgbClr val="06B6D4"/>
                 </a:solidFill>
                 <a:latin typeface="Segoe UI"/>
               </a:defRPr>
@@ -3975,7 +3975,7 @@
             <a:pPr>
               <a:defRPr sz="2400" b="1">
                 <a:solidFill>
-                  <a:srgbClr val="0F172A"/>
+                  <a:srgbClr val="054A75"/>
                 </a:solidFill>
                 <a:latin typeface="Segoe UI"/>
               </a:defRPr>
@@ -4030,7 +4030,7 @@
         </p:nvSpPr>
         <p:spPr>
           <a:xfrm>
-            <a:off x="548640" y="2377440"/>
+            <a:off x="557784" y="2377440"/>
             <a:ext cx="5303520" cy="3657600"/>
           </a:xfrm>
           <a:prstGeom prst="rect">
@@ -4050,7 +4050,7 @@
               </a:spcAft>
               <a:defRPr sz="1500" b="1">
                 <a:solidFill>
-                  <a:srgbClr val="2563EB"/>
+                  <a:srgbClr val="06B6D4"/>
                 </a:solidFill>
                 <a:latin typeface="Segoe UI"/>
               </a:defRPr>
@@ -4141,8 +4141,8 @@
         </p:blipFill>
         <p:spPr>
           <a:xfrm>
-            <a:off x="6217920" y="2286000"/>
-            <a:ext cx="5394960" cy="3035808"/>
+            <a:off x="6409944" y="2286000"/>
+            <a:ext cx="5212080" cy="2926080"/>
           </a:xfrm>
           <a:prstGeom prst="rect">
             <a:avLst/>
@@ -4212,7 +4212,7 @@
             <a:pPr>
               <a:defRPr sz="3800" b="1">
                 <a:solidFill>
-                  <a:srgbClr val="2563EB"/>
+                  <a:srgbClr val="06B6D4"/>
                 </a:solidFill>
                 <a:latin typeface="Segoe UI"/>
               </a:defRPr>
@@ -4272,7 +4272,7 @@
             <a:pPr>
               <a:defRPr sz="2400" b="1">
                 <a:solidFill>
-                  <a:srgbClr val="0F172A"/>
+                  <a:srgbClr val="054A75"/>
                 </a:solidFill>
                 <a:latin typeface="Segoe UI"/>
               </a:defRPr>
@@ -4327,7 +4327,7 @@
         </p:nvSpPr>
         <p:spPr>
           <a:xfrm>
-            <a:off x="548640" y="2377440"/>
+            <a:off x="557784" y="2377440"/>
             <a:ext cx="5303520" cy="3657600"/>
           </a:xfrm>
           <a:prstGeom prst="rect">
@@ -4347,7 +4347,7 @@
               </a:spcAft>
               <a:defRPr sz="1500" b="1">
                 <a:solidFill>
-                  <a:srgbClr val="2563EB"/>
+                  <a:srgbClr val="06B6D4"/>
                 </a:solidFill>
                 <a:latin typeface="Segoe UI"/>
               </a:defRPr>
@@ -4438,8 +4438,8 @@
         </p:blipFill>
         <p:spPr>
           <a:xfrm>
-            <a:off x="6217920" y="2286000"/>
-            <a:ext cx="5394960" cy="3035808"/>
+            <a:off x="6409944" y="2286000"/>
+            <a:ext cx="5212080" cy="2926080"/>
           </a:xfrm>
           <a:prstGeom prst="rect">
             <a:avLst/>
@@ -4509,7 +4509,7 @@
             <a:pPr>
               <a:defRPr sz="3800" b="1">
                 <a:solidFill>
-                  <a:srgbClr val="2563EB"/>
+                  <a:srgbClr val="06B6D4"/>
                 </a:solidFill>
                 <a:latin typeface="Segoe UI"/>
               </a:defRPr>
@@ -4569,7 +4569,7 @@
             <a:pPr>
               <a:defRPr sz="2400" b="1">
                 <a:solidFill>
-                  <a:srgbClr val="0F172A"/>
+                  <a:srgbClr val="054A75"/>
                 </a:solidFill>
                 <a:latin typeface="Segoe UI"/>
               </a:defRPr>
@@ -4624,8 +4624,8 @@
         </p:nvSpPr>
         <p:spPr>
           <a:xfrm>
-            <a:off x="457200" y="2377440"/>
-            <a:ext cx="5303520" cy="1645920"/>
+            <a:off x="694944" y="2377440"/>
+            <a:ext cx="5120640" cy="1645920"/>
           </a:xfrm>
           <a:prstGeom prst="roundRect">
             <a:avLst/>
@@ -4661,7 +4661,7 @@
               </a:spcAft>
               <a:defRPr sz="1300" b="1">
                 <a:solidFill>
-                  <a:srgbClr val="2563EB"/>
+                  <a:srgbClr val="06B6D4"/>
                 </a:solidFill>
                 <a:latin typeface="Segoe UI"/>
               </a:defRPr>
@@ -4696,8 +4696,8 @@
         </p:nvSpPr>
         <p:spPr>
           <a:xfrm>
-            <a:off x="6217920" y="2377440"/>
-            <a:ext cx="5303520" cy="1645920"/>
+            <a:off x="6364224" y="2377440"/>
+            <a:ext cx="5120640" cy="1645920"/>
           </a:xfrm>
           <a:prstGeom prst="roundRect">
             <a:avLst/>
@@ -4733,7 +4733,7 @@
               </a:spcAft>
               <a:defRPr sz="1300" b="1">
                 <a:solidFill>
-                  <a:srgbClr val="2563EB"/>
+                  <a:srgbClr val="06B6D4"/>
                 </a:solidFill>
                 <a:latin typeface="Segoe UI"/>
               </a:defRPr>
@@ -4768,8 +4768,8 @@
         </p:nvSpPr>
         <p:spPr>
           <a:xfrm>
-            <a:off x="457200" y="4297680"/>
-            <a:ext cx="5303520" cy="1645920"/>
+            <a:off x="694944" y="4297680"/>
+            <a:ext cx="5120640" cy="1645920"/>
           </a:xfrm>
           <a:prstGeom prst="roundRect">
             <a:avLst/>
@@ -4805,7 +4805,7 @@
               </a:spcAft>
               <a:defRPr sz="1300" b="1">
                 <a:solidFill>
-                  <a:srgbClr val="2563EB"/>
+                  <a:srgbClr val="06B6D4"/>
                 </a:solidFill>
                 <a:latin typeface="Segoe UI"/>
               </a:defRPr>
@@ -4840,8 +4840,8 @@
         </p:nvSpPr>
         <p:spPr>
           <a:xfrm>
-            <a:off x="6217920" y="4297680"/>
-            <a:ext cx="5303520" cy="1645920"/>
+            <a:off x="6364224" y="4297680"/>
+            <a:ext cx="5120640" cy="1645920"/>
           </a:xfrm>
           <a:prstGeom prst="roundRect">
             <a:avLst/>
@@ -4877,7 +4877,7 @@
               </a:spcAft>
               <a:defRPr sz="1300" b="1">
                 <a:solidFill>
-                  <a:srgbClr val="2563EB"/>
+                  <a:srgbClr val="06B6D4"/>
                 </a:solidFill>
                 <a:latin typeface="Segoe UI"/>
               </a:defRPr>
@@ -4967,7 +4967,7 @@
             <a:pPr algn="ctr">
               <a:defRPr sz="4800" b="1">
                 <a:solidFill>
-                  <a:srgbClr val="2563EB"/>
+                  <a:srgbClr val="06B6D4"/>
                 </a:solidFill>
                 <a:latin typeface="Segoe UI"/>
               </a:defRPr>
@@ -5003,7 +5003,7 @@
             <a:pPr algn="ctr">
               <a:defRPr sz="1600" b="1">
                 <a:solidFill>
-                  <a:srgbClr val="0F172A"/>
+                  <a:srgbClr val="054A75"/>
                 </a:solidFill>
                 <a:latin typeface="Segoe UI"/>
               </a:defRPr>
@@ -5045,7 +5045,7 @@
               </a:defRPr>
             </a:pPr>
             <a:r>
-              <a:t>Gururaj Shetty  |  Revature Data Analytics</a:t>
+              <a:t>Harish, Harini, Gururaj Shetty  |  Revature Data Analytics</a:t>
             </a:r>
             <a:br/>
             <a:r>
@@ -5117,7 +5117,7 @@
             <a:pPr>
               <a:defRPr sz="3800" b="1">
                 <a:solidFill>
-                  <a:srgbClr val="2563EB"/>
+                  <a:srgbClr val="06B6D4"/>
                 </a:solidFill>
                 <a:latin typeface="Segoe UI"/>
               </a:defRPr>
@@ -5177,7 +5177,7 @@
             <a:pPr>
               <a:defRPr sz="2400" b="1">
                 <a:solidFill>
-                  <a:srgbClr val="0F172A"/>
+                  <a:srgbClr val="054A75"/>
                 </a:solidFill>
                 <a:latin typeface="Segoe UI"/>
               </a:defRPr>
@@ -5422,7 +5422,7 @@
             <a:pPr>
               <a:defRPr sz="3800" b="1">
                 <a:solidFill>
-                  <a:srgbClr val="2563EB"/>
+                  <a:srgbClr val="06B6D4"/>
                 </a:solidFill>
                 <a:latin typeface="Segoe UI"/>
               </a:defRPr>
@@ -5482,7 +5482,7 @@
             <a:pPr>
               <a:defRPr sz="2400" b="1">
                 <a:solidFill>
-                  <a:srgbClr val="0F172A"/>
+                  <a:srgbClr val="054A75"/>
                 </a:solidFill>
                 <a:latin typeface="Segoe UI"/>
               </a:defRPr>
@@ -5537,7 +5537,7 @@
         </p:nvSpPr>
         <p:spPr>
           <a:xfrm>
-            <a:off x="548640" y="2468880"/>
+            <a:off x="877824" y="2468880"/>
             <a:ext cx="3474720" cy="3657600"/>
           </a:xfrm>
           <a:prstGeom prst="roundRect">
@@ -5641,7 +5641,7 @@
         </p:nvSpPr>
         <p:spPr>
           <a:xfrm>
-            <a:off x="4297680" y="2468880"/>
+            <a:off x="4626864" y="2468880"/>
             <a:ext cx="3474720" cy="3657600"/>
           </a:xfrm>
           <a:prstGeom prst="roundRect">
@@ -5745,7 +5745,7 @@
         </p:nvSpPr>
         <p:spPr>
           <a:xfrm>
-            <a:off x="8046720" y="2468880"/>
+            <a:off x="8375904" y="2468880"/>
             <a:ext cx="3474720" cy="3657600"/>
           </a:xfrm>
           <a:prstGeom prst="roundRect">
@@ -5904,7 +5904,7 @@
             <a:pPr>
               <a:defRPr sz="3800" b="1">
                 <a:solidFill>
-                  <a:srgbClr val="2563EB"/>
+                  <a:srgbClr val="06B6D4"/>
                 </a:solidFill>
                 <a:latin typeface="Segoe UI"/>
               </a:defRPr>
@@ -5964,7 +5964,7 @@
             <a:pPr>
               <a:defRPr sz="2400" b="1">
                 <a:solidFill>
-                  <a:srgbClr val="0F172A"/>
+                  <a:srgbClr val="054A75"/>
                 </a:solidFill>
                 <a:latin typeface="Segoe UI"/>
               </a:defRPr>
@@ -6019,7 +6019,7 @@
         </p:nvSpPr>
         <p:spPr>
           <a:xfrm>
-            <a:off x="548640" y="2560320"/>
+            <a:off x="969264" y="2560320"/>
             <a:ext cx="2560320" cy="3383280"/>
           </a:xfrm>
           <a:prstGeom prst="roundRect">
@@ -6056,7 +6056,7 @@
               </a:spcAft>
               <a:defRPr sz="1300" b="1">
                 <a:solidFill>
-                  <a:srgbClr val="2563EB"/>
+                  <a:srgbClr val="06B6D4"/>
                 </a:solidFill>
                 <a:latin typeface="Segoe UI"/>
               </a:defRPr>
@@ -6123,7 +6123,7 @@
         </p:nvSpPr>
         <p:spPr>
           <a:xfrm>
-            <a:off x="3383280" y="2560320"/>
+            <a:off x="3803904" y="2560320"/>
             <a:ext cx="2560320" cy="3383280"/>
           </a:xfrm>
           <a:prstGeom prst="roundRect">
@@ -6160,7 +6160,7 @@
               </a:spcAft>
               <a:defRPr sz="1300" b="1">
                 <a:solidFill>
-                  <a:srgbClr val="2563EB"/>
+                  <a:srgbClr val="06B6D4"/>
                 </a:solidFill>
                 <a:latin typeface="Segoe UI"/>
               </a:defRPr>
@@ -6227,7 +6227,7 @@
         </p:nvSpPr>
         <p:spPr>
           <a:xfrm>
-            <a:off x="6217920" y="2560320"/>
+            <a:off x="6638544" y="2560320"/>
             <a:ext cx="2560320" cy="3383280"/>
           </a:xfrm>
           <a:prstGeom prst="roundRect">
@@ -6264,7 +6264,7 @@
               </a:spcAft>
               <a:defRPr sz="1300" b="1">
                 <a:solidFill>
-                  <a:srgbClr val="2563EB"/>
+                  <a:srgbClr val="06B6D4"/>
                 </a:solidFill>
                 <a:latin typeface="Segoe UI"/>
               </a:defRPr>
@@ -6331,7 +6331,7 @@
         </p:nvSpPr>
         <p:spPr>
           <a:xfrm>
-            <a:off x="9052560" y="2560320"/>
+            <a:off x="9473184" y="2560320"/>
             <a:ext cx="2560320" cy="3383280"/>
           </a:xfrm>
           <a:prstGeom prst="roundRect">
@@ -6368,7 +6368,7 @@
               </a:spcAft>
               <a:defRPr sz="1300" b="1">
                 <a:solidFill>
-                  <a:srgbClr val="2563EB"/>
+                  <a:srgbClr val="06B6D4"/>
                 </a:solidFill>
                 <a:latin typeface="Segoe UI"/>
               </a:defRPr>
@@ -6490,7 +6490,7 @@
             <a:pPr>
               <a:defRPr sz="3800" b="1">
                 <a:solidFill>
-                  <a:srgbClr val="2563EB"/>
+                  <a:srgbClr val="06B6D4"/>
                 </a:solidFill>
                 <a:latin typeface="Segoe UI"/>
               </a:defRPr>
@@ -6550,7 +6550,7 @@
             <a:pPr>
               <a:defRPr sz="2400" b="1">
                 <a:solidFill>
-                  <a:srgbClr val="0F172A"/>
+                  <a:srgbClr val="054A75"/>
                 </a:solidFill>
                 <a:latin typeface="Segoe UI"/>
               </a:defRPr>
@@ -6605,7 +6605,7 @@
         </p:nvSpPr>
         <p:spPr>
           <a:xfrm>
-            <a:off x="548640" y="2377440"/>
+            <a:off x="557784" y="2377440"/>
             <a:ext cx="5303520" cy="457200"/>
           </a:xfrm>
           <a:prstGeom prst="rect">
@@ -6622,7 +6622,7 @@
             <a:pPr>
               <a:defRPr sz="1600" b="1">
                 <a:solidFill>
-                  <a:srgbClr val="2563EB"/>
+                  <a:srgbClr val="06B6D4"/>
                 </a:solidFill>
                 <a:latin typeface="Segoe UI"/>
               </a:defRPr>
@@ -6641,7 +6641,7 @@
         </p:nvSpPr>
         <p:spPr>
           <a:xfrm>
-            <a:off x="548640" y="2926080"/>
+            <a:off x="557784" y="2926080"/>
             <a:ext cx="5303520" cy="3200400"/>
           </a:xfrm>
           <a:prstGeom prst="rect">
@@ -6744,8 +6744,8 @@
         </p:nvSpPr>
         <p:spPr>
           <a:xfrm>
-            <a:off x="6217920" y="2377440"/>
-            <a:ext cx="5303520" cy="3566160"/>
+            <a:off x="6409944" y="2377440"/>
+            <a:ext cx="5212080" cy="3566160"/>
           </a:xfrm>
           <a:prstGeom prst="roundRect">
             <a:avLst/>
@@ -6935,7 +6935,7 @@
             <a:pPr>
               <a:defRPr sz="3800" b="1">
                 <a:solidFill>
-                  <a:srgbClr val="2563EB"/>
+                  <a:srgbClr val="06B6D4"/>
                 </a:solidFill>
                 <a:latin typeface="Segoe UI"/>
               </a:defRPr>
@@ -6995,7 +6995,7 @@
             <a:pPr>
               <a:defRPr sz="2400" b="1">
                 <a:solidFill>
-                  <a:srgbClr val="0F172A"/>
+                  <a:srgbClr val="054A75"/>
                 </a:solidFill>
                 <a:latin typeface="Segoe UI"/>
               </a:defRPr>
@@ -7050,7 +7050,7 @@
         </p:nvSpPr>
         <p:spPr>
           <a:xfrm>
-            <a:off x="548640" y="2377440"/>
+            <a:off x="557784" y="2377440"/>
             <a:ext cx="5303520" cy="457200"/>
           </a:xfrm>
           <a:prstGeom prst="rect">
@@ -7067,7 +7067,7 @@
             <a:pPr>
               <a:defRPr sz="1600" b="1">
                 <a:solidFill>
-                  <a:srgbClr val="2563EB"/>
+                  <a:srgbClr val="06B6D4"/>
                 </a:solidFill>
                 <a:latin typeface="Segoe UI"/>
               </a:defRPr>
@@ -7086,7 +7086,7 @@
         </p:nvSpPr>
         <p:spPr>
           <a:xfrm>
-            <a:off x="548640" y="2926080"/>
+            <a:off x="557784" y="2926080"/>
             <a:ext cx="5303520" cy="3200400"/>
           </a:xfrm>
           <a:prstGeom prst="rect">
@@ -7189,8 +7189,8 @@
         </p:nvSpPr>
         <p:spPr>
           <a:xfrm>
-            <a:off x="6217920" y="2377440"/>
-            <a:ext cx="5303520" cy="3566160"/>
+            <a:off x="6409944" y="2377440"/>
+            <a:ext cx="5212080" cy="3566160"/>
           </a:xfrm>
           <a:prstGeom prst="roundRect">
             <a:avLst/>
@@ -7226,7 +7226,7 @@
               </a:spcAft>
               <a:defRPr sz="1300" b="1">
                 <a:solidFill>
-                  <a:srgbClr val="EAB308"/>
+                  <a:srgbClr val="06B6D4"/>
                 </a:solidFill>
                 <a:latin typeface="Segoe UI"/>
               </a:defRPr>
@@ -7364,7 +7364,7 @@
             <a:pPr>
               <a:defRPr sz="3800" b="1">
                 <a:solidFill>
-                  <a:srgbClr val="2563EB"/>
+                  <a:srgbClr val="06B6D4"/>
                 </a:solidFill>
                 <a:latin typeface="Segoe UI"/>
               </a:defRPr>
@@ -7424,7 +7424,7 @@
             <a:pPr>
               <a:defRPr sz="2400" b="1">
                 <a:solidFill>
-                  <a:srgbClr val="0F172A"/>
+                  <a:srgbClr val="054A75"/>
                 </a:solidFill>
                 <a:latin typeface="Segoe UI"/>
               </a:defRPr>
@@ -7479,7 +7479,7 @@
         </p:nvSpPr>
         <p:spPr>
           <a:xfrm>
-            <a:off x="548640" y="2377440"/>
+            <a:off x="557784" y="2377440"/>
             <a:ext cx="5303520" cy="3657600"/>
           </a:xfrm>
           <a:prstGeom prst="rect">
@@ -7499,7 +7499,7 @@
               </a:spcAft>
               <a:defRPr sz="1500" b="1">
                 <a:solidFill>
-                  <a:srgbClr val="2563EB"/>
+                  <a:srgbClr val="06B6D4"/>
                 </a:solidFill>
                 <a:latin typeface="Segoe UI"/>
               </a:defRPr>
@@ -7590,8 +7590,8 @@
         </p:blipFill>
         <p:spPr>
           <a:xfrm>
-            <a:off x="6217920" y="2286000"/>
-            <a:ext cx="5394960" cy="3035808"/>
+            <a:off x="6409944" y="2286000"/>
+            <a:ext cx="5212080" cy="2926080"/>
           </a:xfrm>
           <a:prstGeom prst="rect">
             <a:avLst/>
@@ -7661,7 +7661,7 @@
             <a:pPr>
               <a:defRPr sz="3800" b="1">
                 <a:solidFill>
-                  <a:srgbClr val="2563EB"/>
+                  <a:srgbClr val="06B6D4"/>
                 </a:solidFill>
                 <a:latin typeface="Segoe UI"/>
               </a:defRPr>
@@ -7721,7 +7721,7 @@
             <a:pPr>
               <a:defRPr sz="2400" b="1">
                 <a:solidFill>
-                  <a:srgbClr val="0F172A"/>
+                  <a:srgbClr val="054A75"/>
                 </a:solidFill>
                 <a:latin typeface="Segoe UI"/>
               </a:defRPr>
@@ -7776,7 +7776,7 @@
         </p:nvSpPr>
         <p:spPr>
           <a:xfrm>
-            <a:off x="548640" y="2377440"/>
+            <a:off x="557784" y="2377440"/>
             <a:ext cx="5303520" cy="3657600"/>
           </a:xfrm>
           <a:prstGeom prst="rect">
@@ -7796,7 +7796,7 @@
               </a:spcAft>
               <a:defRPr sz="1500" b="1">
                 <a:solidFill>
-                  <a:srgbClr val="2563EB"/>
+                  <a:srgbClr val="06B6D4"/>
                 </a:solidFill>
                 <a:latin typeface="Segoe UI"/>
               </a:defRPr>
@@ -7887,8 +7887,8 @@
         </p:blipFill>
         <p:spPr>
           <a:xfrm>
-            <a:off x="6217920" y="2286000"/>
-            <a:ext cx="5394960" cy="3035808"/>
+            <a:off x="6409944" y="2286000"/>
+            <a:ext cx="5212080" cy="2926080"/>
           </a:xfrm>
           <a:prstGeom prst="rect">
             <a:avLst/>
@@ -7958,7 +7958,7 @@
             <a:pPr>
               <a:defRPr sz="3800" b="1">
                 <a:solidFill>
-                  <a:srgbClr val="2563EB"/>
+                  <a:srgbClr val="06B6D4"/>
                 </a:solidFill>
                 <a:latin typeface="Segoe UI"/>
               </a:defRPr>
@@ -8018,7 +8018,7 @@
             <a:pPr>
               <a:defRPr sz="2400" b="1">
                 <a:solidFill>
-                  <a:srgbClr val="0F172A"/>
+                  <a:srgbClr val="054A75"/>
                 </a:solidFill>
                 <a:latin typeface="Segoe UI"/>
               </a:defRPr>
@@ -8073,7 +8073,7 @@
         </p:nvSpPr>
         <p:spPr>
           <a:xfrm>
-            <a:off x="548640" y="2377440"/>
+            <a:off x="557784" y="2377440"/>
             <a:ext cx="5303520" cy="3657600"/>
           </a:xfrm>
           <a:prstGeom prst="rect">
@@ -8093,7 +8093,7 @@
               </a:spcAft>
               <a:defRPr sz="1500" b="1">
                 <a:solidFill>
-                  <a:srgbClr val="2563EB"/>
+                  <a:srgbClr val="06B6D4"/>
                 </a:solidFill>
                 <a:latin typeface="Segoe UI"/>
               </a:defRPr>
@@ -8184,8 +8184,8 @@
         </p:blipFill>
         <p:spPr>
           <a:xfrm>
-            <a:off x="6217920" y="2286000"/>
-            <a:ext cx="5394960" cy="3035808"/>
+            <a:off x="6409944" y="2286000"/>
+            <a:ext cx="5212080" cy="2926080"/>
           </a:xfrm>
           <a:prstGeom prst="rect">
             <a:avLst/>

--- a/Bus Booking Analytics System (PowerBI)/documents/Bus_Booking_Analytics_PowerBI_light.pptx
+++ b/Bus Booking Analytics System (PowerBI)/documents/Bus_Booking_Analytics_PowerBI_light.pptx
@@ -1,29 +1,29 @@
 
 <file path=ppt/presentation.xml><?xml version="1.0" encoding="utf-8"?>
-<p:presentation xmlns:a="http://schemas.openxmlformats.org/drawingml/2006/main" xmlns:r="http://schemas.openxmlformats.org/officeDocument/2006/relationships" xmlns:p="http://schemas.openxmlformats.org/presentationml/2006/main" saveSubsetFonts="1" autoCompressPictures="0">
+<p:presentation xmlns:a="http://schemas.openxmlformats.org/drawingml/2006/main" xmlns:r="http://schemas.openxmlformats.org/officeDocument/2006/relationships" xmlns:p="http://schemas.openxmlformats.org/presentationml/2006/main" autoCompressPictures="0">
   <p:sldMasterIdLst>
     <p:sldMasterId id="2147483648" r:id="rId1"/>
   </p:sldMasterIdLst>
   <p:sldIdLst>
-    <p:sldId id="256" r:id="rId7"/>
-    <p:sldId id="257" r:id="rId8"/>
-    <p:sldId id="258" r:id="rId9"/>
-    <p:sldId id="259" r:id="rId10"/>
-    <p:sldId id="260" r:id="rId11"/>
-    <p:sldId id="261" r:id="rId12"/>
-    <p:sldId id="262" r:id="rId13"/>
-    <p:sldId id="263" r:id="rId14"/>
-    <p:sldId id="264" r:id="rId15"/>
-    <p:sldId id="265" r:id="rId16"/>
-    <p:sldId id="266" r:id="rId17"/>
-    <p:sldId id="267" r:id="rId18"/>
-    <p:sldId id="268" r:id="rId19"/>
-    <p:sldId id="269" r:id="rId20"/>
-    <p:sldId id="270" r:id="rId21"/>
-    <p:sldId id="271" r:id="rId22"/>
-    <p:sldId id="272" r:id="rId23"/>
+    <p:sldId id="256" r:id="rId3"/>
+    <p:sldId id="257" r:id="rId4"/>
+    <p:sldId id="258" r:id="rId5"/>
+    <p:sldId id="259" r:id="rId6"/>
+    <p:sldId id="260" r:id="rId7"/>
+    <p:sldId id="261" r:id="rId8"/>
+    <p:sldId id="262" r:id="rId9"/>
+    <p:sldId id="263" r:id="rId10"/>
+    <p:sldId id="264" r:id="rId11"/>
+    <p:sldId id="265" r:id="rId12"/>
+    <p:sldId id="266" r:id="rId13"/>
+    <p:sldId id="267" r:id="rId14"/>
+    <p:sldId id="268" r:id="rId15"/>
+    <p:sldId id="269" r:id="rId16"/>
+    <p:sldId id="270" r:id="rId17"/>
+    <p:sldId id="271" r:id="rId18"/>
+    <p:sldId id="272" r:id="rId19"/>
   </p:sldIdLst>
-  <p:sldSz cx="12188952" cy="6858000" type="screen4x3"/>
+  <p:sldSz cx="12188825" cy="6858000" type="screen4x3"/>
   <p:notesSz cx="6858000" cy="9144000"/>
   <p:defaultTextStyle>
     <a:defPPr>
@@ -120,6 +120,22 @@
       </a:defRPr>
     </a:lvl9pPr>
   </p:defaultTextStyle>
+  <p:extLst>
+    <p:ext uri="{EFAFB233-063F-42B5-8137-9DF3F51BA10A}">
+      <p15:sldGuideLst xmlns:p15="http://schemas.microsoft.com/office/powerpoint/2012/main">
+        <p15:guide id="1" orient="horz" pos="2160" userDrawn="1">
+          <p15:clr>
+            <a:srgbClr val="A4A3A4"/>
+          </p15:clr>
+        </p15:guide>
+        <p15:guide id="2" pos="2880" userDrawn="1">
+          <p15:clr>
+            <a:srgbClr val="A4A3A4"/>
+          </p15:clr>
+        </p15:guide>
+      </p15:sldGuideLst>
+    </p:ext>
+  </p:extLst>
 </p:presentation>
 </file>
 
@@ -304,7 +320,6 @@
           <a:p>
             <a:fld id="{5BCAD085-E8A6-8845-BD4E-CB4CCA059FC4}" type="datetimeFigureOut">
               <a:rPr lang="en-US" smtClean="0"/>
-              <a:t>1/27/13</a:t>
             </a:fld>
             <a:endParaRPr lang="en-US"/>
           </a:p>
@@ -346,18 +361,12 @@
           <a:p>
             <a:fld id="{C1FF6DA9-008F-8B48-92A6-B652298478BF}" type="slidenum">
               <a:rPr lang="en-US" smtClean="0"/>
-              <a:t>‹#›</a:t>
             </a:fld>
             <a:endParaRPr lang="en-US"/>
           </a:p>
         </p:txBody>
       </p:sp>
     </p:spTree>
-    <p:extLst>
-      <p:ext uri="{BB962C8B-B14F-4D97-AF65-F5344CB8AC3E}">
-        <p14:creationId xmlns:p14="http://schemas.microsoft.com/office/powerpoint/2010/main" val="3168075583"/>
-      </p:ext>
-    </p:extLst>
   </p:cSld>
   <p:clrMapOvr>
     <a:masterClrMapping/>
@@ -425,6 +434,7 @@
               <a:rPr lang="en-US" smtClean="0"/>
               <a:t>Click to edit Master text styles</a:t>
             </a:r>
+            <a:endParaRPr lang="en-US" smtClean="0"/>
           </a:p>
           <a:p>
             <a:pPr lvl="1"/>
@@ -432,6 +442,7 @@
               <a:rPr lang="en-US" smtClean="0"/>
               <a:t>Second level</a:t>
             </a:r>
+            <a:endParaRPr lang="en-US" smtClean="0"/>
           </a:p>
           <a:p>
             <a:pPr lvl="2"/>
@@ -439,6 +450,7 @@
               <a:rPr lang="en-US" smtClean="0"/>
               <a:t>Third level</a:t>
             </a:r>
+            <a:endParaRPr lang="en-US" smtClean="0"/>
           </a:p>
           <a:p>
             <a:pPr lvl="3"/>
@@ -446,6 +458,7 @@
               <a:rPr lang="en-US" smtClean="0"/>
               <a:t>Fourth level</a:t>
             </a:r>
+            <a:endParaRPr lang="en-US" smtClean="0"/>
           </a:p>
           <a:p>
             <a:pPr lvl="4"/>
@@ -474,7 +487,6 @@
           <a:p>
             <a:fld id="{5BCAD085-E8A6-8845-BD4E-CB4CCA059FC4}" type="datetimeFigureOut">
               <a:rPr lang="en-US" smtClean="0"/>
-              <a:t>1/27/13</a:t>
             </a:fld>
             <a:endParaRPr lang="en-US"/>
           </a:p>
@@ -516,18 +528,12 @@
           <a:p>
             <a:fld id="{C1FF6DA9-008F-8B48-92A6-B652298478BF}" type="slidenum">
               <a:rPr lang="en-US" smtClean="0"/>
-              <a:t>‹#›</a:t>
             </a:fld>
             <a:endParaRPr lang="en-US"/>
           </a:p>
         </p:txBody>
       </p:sp>
     </p:spTree>
-    <p:extLst>
-      <p:ext uri="{BB962C8B-B14F-4D97-AF65-F5344CB8AC3E}">
-        <p14:creationId xmlns:p14="http://schemas.microsoft.com/office/powerpoint/2010/main" val="2910927964"/>
-      </p:ext>
-    </p:extLst>
   </p:cSld>
   <p:clrMapOvr>
     <a:masterClrMapping/>
@@ -605,6 +611,7 @@
               <a:rPr lang="en-US" smtClean="0"/>
               <a:t>Click to edit Master text styles</a:t>
             </a:r>
+            <a:endParaRPr lang="en-US" smtClean="0"/>
           </a:p>
           <a:p>
             <a:pPr lvl="1"/>
@@ -612,6 +619,7 @@
               <a:rPr lang="en-US" smtClean="0"/>
               <a:t>Second level</a:t>
             </a:r>
+            <a:endParaRPr lang="en-US" smtClean="0"/>
           </a:p>
           <a:p>
             <a:pPr lvl="2"/>
@@ -619,6 +627,7 @@
               <a:rPr lang="en-US" smtClean="0"/>
               <a:t>Third level</a:t>
             </a:r>
+            <a:endParaRPr lang="en-US" smtClean="0"/>
           </a:p>
           <a:p>
             <a:pPr lvl="3"/>
@@ -626,6 +635,7 @@
               <a:rPr lang="en-US" smtClean="0"/>
               <a:t>Fourth level</a:t>
             </a:r>
+            <a:endParaRPr lang="en-US" smtClean="0"/>
           </a:p>
           <a:p>
             <a:pPr lvl="4"/>
@@ -654,7 +664,6 @@
           <a:p>
             <a:fld id="{5BCAD085-E8A6-8845-BD4E-CB4CCA059FC4}" type="datetimeFigureOut">
               <a:rPr lang="en-US" smtClean="0"/>
-              <a:t>1/27/13</a:t>
             </a:fld>
             <a:endParaRPr lang="en-US"/>
           </a:p>
@@ -696,18 +705,12 @@
           <a:p>
             <a:fld id="{C1FF6DA9-008F-8B48-92A6-B652298478BF}" type="slidenum">
               <a:rPr lang="en-US" smtClean="0"/>
-              <a:t>‹#›</a:t>
             </a:fld>
             <a:endParaRPr lang="en-US"/>
           </a:p>
         </p:txBody>
       </p:sp>
     </p:spTree>
-    <p:extLst>
-      <p:ext uri="{BB962C8B-B14F-4D97-AF65-F5344CB8AC3E}">
-        <p14:creationId xmlns:p14="http://schemas.microsoft.com/office/powerpoint/2010/main" val="3612223792"/>
-      </p:ext>
-    </p:extLst>
   </p:cSld>
   <p:clrMapOvr>
     <a:masterClrMapping/>
@@ -775,6 +778,7 @@
               <a:rPr lang="en-US" smtClean="0"/>
               <a:t>Click to edit Master text styles</a:t>
             </a:r>
+            <a:endParaRPr lang="en-US" smtClean="0"/>
           </a:p>
           <a:p>
             <a:pPr lvl="1"/>
@@ -782,6 +786,7 @@
               <a:rPr lang="en-US" smtClean="0"/>
               <a:t>Second level</a:t>
             </a:r>
+            <a:endParaRPr lang="en-US" smtClean="0"/>
           </a:p>
           <a:p>
             <a:pPr lvl="2"/>
@@ -789,6 +794,7 @@
               <a:rPr lang="en-US" smtClean="0"/>
               <a:t>Third level</a:t>
             </a:r>
+            <a:endParaRPr lang="en-US" smtClean="0"/>
           </a:p>
           <a:p>
             <a:pPr lvl="3"/>
@@ -796,6 +802,7 @@
               <a:rPr lang="en-US" smtClean="0"/>
               <a:t>Fourth level</a:t>
             </a:r>
+            <a:endParaRPr lang="en-US" smtClean="0"/>
           </a:p>
           <a:p>
             <a:pPr lvl="4"/>
@@ -824,7 +831,6 @@
           <a:p>
             <a:fld id="{5BCAD085-E8A6-8845-BD4E-CB4CCA059FC4}" type="datetimeFigureOut">
               <a:rPr lang="en-US" smtClean="0"/>
-              <a:t>1/27/13</a:t>
             </a:fld>
             <a:endParaRPr lang="en-US"/>
           </a:p>
@@ -866,18 +872,12 @@
           <a:p>
             <a:fld id="{C1FF6DA9-008F-8B48-92A6-B652298478BF}" type="slidenum">
               <a:rPr lang="en-US" smtClean="0"/>
-              <a:t>‹#›</a:t>
             </a:fld>
             <a:endParaRPr lang="en-US"/>
           </a:p>
         </p:txBody>
       </p:sp>
     </p:spTree>
-    <p:extLst>
-      <p:ext uri="{BB962C8B-B14F-4D97-AF65-F5344CB8AC3E}">
-        <p14:creationId xmlns:p14="http://schemas.microsoft.com/office/powerpoint/2010/main" val="2614314258"/>
-      </p:ext>
-    </p:extLst>
   </p:cSld>
   <p:clrMapOvr>
     <a:masterClrMapping/>
@@ -1050,6 +1050,7 @@
               <a:rPr lang="en-US" smtClean="0"/>
               <a:t>Click to edit Master text styles</a:t>
             </a:r>
+            <a:endParaRPr lang="en-US" smtClean="0"/>
           </a:p>
         </p:txBody>
       </p:sp>
@@ -1070,7 +1071,6 @@
           <a:p>
             <a:fld id="{5BCAD085-E8A6-8845-BD4E-CB4CCA059FC4}" type="datetimeFigureOut">
               <a:rPr lang="en-US" smtClean="0"/>
-              <a:t>1/27/13</a:t>
             </a:fld>
             <a:endParaRPr lang="en-US"/>
           </a:p>
@@ -1112,18 +1112,12 @@
           <a:p>
             <a:fld id="{C1FF6DA9-008F-8B48-92A6-B652298478BF}" type="slidenum">
               <a:rPr lang="en-US" smtClean="0"/>
-              <a:t>‹#›</a:t>
             </a:fld>
             <a:endParaRPr lang="en-US"/>
           </a:p>
         </p:txBody>
       </p:sp>
     </p:spTree>
-    <p:extLst>
-      <p:ext uri="{BB962C8B-B14F-4D97-AF65-F5344CB8AC3E}">
-        <p14:creationId xmlns:p14="http://schemas.microsoft.com/office/powerpoint/2010/main" val="960648375"/>
-      </p:ext>
-    </p:extLst>
   </p:cSld>
   <p:clrMapOvr>
     <a:masterClrMapping/>
@@ -1224,6 +1218,7 @@
               <a:rPr lang="en-US" smtClean="0"/>
               <a:t>Click to edit Master text styles</a:t>
             </a:r>
+            <a:endParaRPr lang="en-US" smtClean="0"/>
           </a:p>
           <a:p>
             <a:pPr lvl="1"/>
@@ -1231,6 +1226,7 @@
               <a:rPr lang="en-US" smtClean="0"/>
               <a:t>Second level</a:t>
             </a:r>
+            <a:endParaRPr lang="en-US" smtClean="0"/>
           </a:p>
           <a:p>
             <a:pPr lvl="2"/>
@@ -1238,6 +1234,7 @@
               <a:rPr lang="en-US" smtClean="0"/>
               <a:t>Third level</a:t>
             </a:r>
+            <a:endParaRPr lang="en-US" smtClean="0"/>
           </a:p>
           <a:p>
             <a:pPr lvl="3"/>
@@ -1245,6 +1242,7 @@
               <a:rPr lang="en-US" smtClean="0"/>
               <a:t>Fourth level</a:t>
             </a:r>
+            <a:endParaRPr lang="en-US" smtClean="0"/>
           </a:p>
           <a:p>
             <a:pPr lvl="4"/>
@@ -1309,6 +1307,7 @@
               <a:rPr lang="en-US" smtClean="0"/>
               <a:t>Click to edit Master text styles</a:t>
             </a:r>
+            <a:endParaRPr lang="en-US" smtClean="0"/>
           </a:p>
           <a:p>
             <a:pPr lvl="1"/>
@@ -1316,6 +1315,7 @@
               <a:rPr lang="en-US" smtClean="0"/>
               <a:t>Second level</a:t>
             </a:r>
+            <a:endParaRPr lang="en-US" smtClean="0"/>
           </a:p>
           <a:p>
             <a:pPr lvl="2"/>
@@ -1323,6 +1323,7 @@
               <a:rPr lang="en-US" smtClean="0"/>
               <a:t>Third level</a:t>
             </a:r>
+            <a:endParaRPr lang="en-US" smtClean="0"/>
           </a:p>
           <a:p>
             <a:pPr lvl="3"/>
@@ -1330,6 +1331,7 @@
               <a:rPr lang="en-US" smtClean="0"/>
               <a:t>Fourth level</a:t>
             </a:r>
+            <a:endParaRPr lang="en-US" smtClean="0"/>
           </a:p>
           <a:p>
             <a:pPr lvl="4"/>
@@ -1358,7 +1360,6 @@
           <a:p>
             <a:fld id="{5BCAD085-E8A6-8845-BD4E-CB4CCA059FC4}" type="datetimeFigureOut">
               <a:rPr lang="en-US" smtClean="0"/>
-              <a:t>1/27/13</a:t>
             </a:fld>
             <a:endParaRPr lang="en-US"/>
           </a:p>
@@ -1400,18 +1401,12 @@
           <a:p>
             <a:fld id="{C1FF6DA9-008F-8B48-92A6-B652298478BF}" type="slidenum">
               <a:rPr lang="en-US" smtClean="0"/>
-              <a:t>‹#›</a:t>
             </a:fld>
             <a:endParaRPr lang="en-US"/>
           </a:p>
         </p:txBody>
       </p:sp>
     </p:spTree>
-    <p:extLst>
-      <p:ext uri="{BB962C8B-B14F-4D97-AF65-F5344CB8AC3E}">
-        <p14:creationId xmlns:p14="http://schemas.microsoft.com/office/powerpoint/2010/main" val="2782244947"/>
-      </p:ext>
-    </p:extLst>
   </p:cSld>
   <p:clrMapOvr>
     <a:masterClrMapping/>
@@ -1525,6 +1520,7 @@
               <a:rPr lang="en-US" smtClean="0"/>
               <a:t>Click to edit Master text styles</a:t>
             </a:r>
+            <a:endParaRPr lang="en-US" smtClean="0"/>
           </a:p>
         </p:txBody>
       </p:sp>
@@ -1581,6 +1577,7 @@
               <a:rPr lang="en-US" smtClean="0"/>
               <a:t>Click to edit Master text styles</a:t>
             </a:r>
+            <a:endParaRPr lang="en-US" smtClean="0"/>
           </a:p>
           <a:p>
             <a:pPr lvl="1"/>
@@ -1588,6 +1585,7 @@
               <a:rPr lang="en-US" smtClean="0"/>
               <a:t>Second level</a:t>
             </a:r>
+            <a:endParaRPr lang="en-US" smtClean="0"/>
           </a:p>
           <a:p>
             <a:pPr lvl="2"/>
@@ -1595,6 +1593,7 @@
               <a:rPr lang="en-US" smtClean="0"/>
               <a:t>Third level</a:t>
             </a:r>
+            <a:endParaRPr lang="en-US" smtClean="0"/>
           </a:p>
           <a:p>
             <a:pPr lvl="3"/>
@@ -1602,6 +1601,7 @@
               <a:rPr lang="en-US" smtClean="0"/>
               <a:t>Fourth level</a:t>
             </a:r>
+            <a:endParaRPr lang="en-US" smtClean="0"/>
           </a:p>
           <a:p>
             <a:pPr lvl="4"/>
@@ -1675,6 +1675,7 @@
               <a:rPr lang="en-US" smtClean="0"/>
               <a:t>Click to edit Master text styles</a:t>
             </a:r>
+            <a:endParaRPr lang="en-US" smtClean="0"/>
           </a:p>
         </p:txBody>
       </p:sp>
@@ -1731,6 +1732,7 @@
               <a:rPr lang="en-US" smtClean="0"/>
               <a:t>Click to edit Master text styles</a:t>
             </a:r>
+            <a:endParaRPr lang="en-US" smtClean="0"/>
           </a:p>
           <a:p>
             <a:pPr lvl="1"/>
@@ -1738,6 +1740,7 @@
               <a:rPr lang="en-US" smtClean="0"/>
               <a:t>Second level</a:t>
             </a:r>
+            <a:endParaRPr lang="en-US" smtClean="0"/>
           </a:p>
           <a:p>
             <a:pPr lvl="2"/>
@@ -1745,6 +1748,7 @@
               <a:rPr lang="en-US" smtClean="0"/>
               <a:t>Third level</a:t>
             </a:r>
+            <a:endParaRPr lang="en-US" smtClean="0"/>
           </a:p>
           <a:p>
             <a:pPr lvl="3"/>
@@ -1752,6 +1756,7 @@
               <a:rPr lang="en-US" smtClean="0"/>
               <a:t>Fourth level</a:t>
             </a:r>
+            <a:endParaRPr lang="en-US" smtClean="0"/>
           </a:p>
           <a:p>
             <a:pPr lvl="4"/>
@@ -1780,7 +1785,6 @@
           <a:p>
             <a:fld id="{5BCAD085-E8A6-8845-BD4E-CB4CCA059FC4}" type="datetimeFigureOut">
               <a:rPr lang="en-US" smtClean="0"/>
-              <a:t>1/27/13</a:t>
             </a:fld>
             <a:endParaRPr lang="en-US"/>
           </a:p>
@@ -1822,18 +1826,12 @@
           <a:p>
             <a:fld id="{C1FF6DA9-008F-8B48-92A6-B652298478BF}" type="slidenum">
               <a:rPr lang="en-US" smtClean="0"/>
-              <a:t>‹#›</a:t>
             </a:fld>
             <a:endParaRPr lang="en-US"/>
           </a:p>
         </p:txBody>
       </p:sp>
     </p:spTree>
-    <p:extLst>
-      <p:ext uri="{BB962C8B-B14F-4D97-AF65-F5344CB8AC3E}">
-        <p14:creationId xmlns:p14="http://schemas.microsoft.com/office/powerpoint/2010/main" val="990158736"/>
-      </p:ext>
-    </p:extLst>
   </p:cSld>
   <p:clrMapOvr>
     <a:masterClrMapping/>
@@ -1898,7 +1896,6 @@
           <a:p>
             <a:fld id="{5BCAD085-E8A6-8845-BD4E-CB4CCA059FC4}" type="datetimeFigureOut">
               <a:rPr lang="en-US" smtClean="0"/>
-              <a:t>1/27/13</a:t>
             </a:fld>
             <a:endParaRPr lang="en-US"/>
           </a:p>
@@ -1940,18 +1937,12 @@
           <a:p>
             <a:fld id="{C1FF6DA9-008F-8B48-92A6-B652298478BF}" type="slidenum">
               <a:rPr lang="en-US" smtClean="0"/>
-              <a:t>‹#›</a:t>
             </a:fld>
             <a:endParaRPr lang="en-US"/>
           </a:p>
         </p:txBody>
       </p:sp>
     </p:spTree>
-    <p:extLst>
-      <p:ext uri="{BB962C8B-B14F-4D97-AF65-F5344CB8AC3E}">
-        <p14:creationId xmlns:p14="http://schemas.microsoft.com/office/powerpoint/2010/main" val="727027711"/>
-      </p:ext>
-    </p:extLst>
   </p:cSld>
   <p:clrMapOvr>
     <a:masterClrMapping/>
@@ -1993,7 +1984,6 @@
           <a:p>
             <a:fld id="{5BCAD085-E8A6-8845-BD4E-CB4CCA059FC4}" type="datetimeFigureOut">
               <a:rPr lang="en-US" smtClean="0"/>
-              <a:t>1/27/13</a:t>
             </a:fld>
             <a:endParaRPr lang="en-US"/>
           </a:p>
@@ -2035,18 +2025,12 @@
           <a:p>
             <a:fld id="{C1FF6DA9-008F-8B48-92A6-B652298478BF}" type="slidenum">
               <a:rPr lang="en-US" smtClean="0"/>
-              <a:t>‹#›</a:t>
             </a:fld>
             <a:endParaRPr lang="en-US"/>
           </a:p>
         </p:txBody>
       </p:sp>
     </p:spTree>
-    <p:extLst>
-      <p:ext uri="{BB962C8B-B14F-4D97-AF65-F5344CB8AC3E}">
-        <p14:creationId xmlns:p14="http://schemas.microsoft.com/office/powerpoint/2010/main" val="1212999818"/>
-      </p:ext>
-    </p:extLst>
   </p:cSld>
   <p:clrMapOvr>
     <a:masterClrMapping/>
@@ -2156,6 +2140,7 @@
               <a:rPr lang="en-US" smtClean="0"/>
               <a:t>Click to edit Master text styles</a:t>
             </a:r>
+            <a:endParaRPr lang="en-US" smtClean="0"/>
           </a:p>
           <a:p>
             <a:pPr lvl="1"/>
@@ -2163,6 +2148,7 @@
               <a:rPr lang="en-US" smtClean="0"/>
               <a:t>Second level</a:t>
             </a:r>
+            <a:endParaRPr lang="en-US" smtClean="0"/>
           </a:p>
           <a:p>
             <a:pPr lvl="2"/>
@@ -2170,6 +2156,7 @@
               <a:rPr lang="en-US" smtClean="0"/>
               <a:t>Third level</a:t>
             </a:r>
+            <a:endParaRPr lang="en-US" smtClean="0"/>
           </a:p>
           <a:p>
             <a:pPr lvl="3"/>
@@ -2177,6 +2164,7 @@
               <a:rPr lang="en-US" smtClean="0"/>
               <a:t>Fourth level</a:t>
             </a:r>
+            <a:endParaRPr lang="en-US" smtClean="0"/>
           </a:p>
           <a:p>
             <a:pPr lvl="4"/>
@@ -2250,6 +2238,7 @@
               <a:rPr lang="en-US" smtClean="0"/>
               <a:t>Click to edit Master text styles</a:t>
             </a:r>
+            <a:endParaRPr lang="en-US" smtClean="0"/>
           </a:p>
         </p:txBody>
       </p:sp>
@@ -2270,7 +2259,6 @@
           <a:p>
             <a:fld id="{5BCAD085-E8A6-8845-BD4E-CB4CCA059FC4}" type="datetimeFigureOut">
               <a:rPr lang="en-US" smtClean="0"/>
-              <a:t>1/27/13</a:t>
             </a:fld>
             <a:endParaRPr lang="en-US"/>
           </a:p>
@@ -2312,18 +2300,12 @@
           <a:p>
             <a:fld id="{C1FF6DA9-008F-8B48-92A6-B652298478BF}" type="slidenum">
               <a:rPr lang="en-US" smtClean="0"/>
-              <a:t>‹#›</a:t>
             </a:fld>
             <a:endParaRPr lang="en-US"/>
           </a:p>
         </p:txBody>
       </p:sp>
     </p:spTree>
-    <p:extLst>
-      <p:ext uri="{BB962C8B-B14F-4D97-AF65-F5344CB8AC3E}">
-        <p14:creationId xmlns:p14="http://schemas.microsoft.com/office/powerpoint/2010/main" val="1840726560"/>
-      </p:ext>
-    </p:extLst>
   </p:cSld>
   <p:clrMapOvr>
     <a:masterClrMapping/>
@@ -2503,6 +2485,7 @@
               <a:rPr lang="en-US" smtClean="0"/>
               <a:t>Click to edit Master text styles</a:t>
             </a:r>
+            <a:endParaRPr lang="en-US" smtClean="0"/>
           </a:p>
         </p:txBody>
       </p:sp>
@@ -2523,7 +2506,6 @@
           <a:p>
             <a:fld id="{5BCAD085-E8A6-8845-BD4E-CB4CCA059FC4}" type="datetimeFigureOut">
               <a:rPr lang="en-US" smtClean="0"/>
-              <a:t>1/27/13</a:t>
             </a:fld>
             <a:endParaRPr lang="en-US"/>
           </a:p>
@@ -2565,18 +2547,12 @@
           <a:p>
             <a:fld id="{C1FF6DA9-008F-8B48-92A6-B652298478BF}" type="slidenum">
               <a:rPr lang="en-US" smtClean="0"/>
-              <a:t>‹#›</a:t>
             </a:fld>
             <a:endParaRPr lang="en-US"/>
           </a:p>
         </p:txBody>
       </p:sp>
     </p:spTree>
-    <p:extLst>
-      <p:ext uri="{BB962C8B-B14F-4D97-AF65-F5344CB8AC3E}">
-        <p14:creationId xmlns:p14="http://schemas.microsoft.com/office/powerpoint/2010/main" val="3889236939"/>
-      </p:ext>
-    </p:extLst>
   </p:cSld>
   <p:clrMapOvr>
     <a:masterClrMapping/>
@@ -2669,6 +2645,7 @@
               <a:rPr lang="en-US" smtClean="0"/>
               <a:t>Click to edit Master text styles</a:t>
             </a:r>
+            <a:endParaRPr lang="en-US" smtClean="0"/>
           </a:p>
           <a:p>
             <a:pPr lvl="1"/>
@@ -2676,6 +2653,7 @@
               <a:rPr lang="en-US" smtClean="0"/>
               <a:t>Second level</a:t>
             </a:r>
+            <a:endParaRPr lang="en-US" smtClean="0"/>
           </a:p>
           <a:p>
             <a:pPr lvl="2"/>
@@ -2683,6 +2661,7 @@
               <a:rPr lang="en-US" smtClean="0"/>
               <a:t>Third level</a:t>
             </a:r>
+            <a:endParaRPr lang="en-US" smtClean="0"/>
           </a:p>
           <a:p>
             <a:pPr lvl="3"/>
@@ -2690,6 +2669,7 @@
               <a:rPr lang="en-US" smtClean="0"/>
               <a:t>Fourth level</a:t>
             </a:r>
+            <a:endParaRPr lang="en-US" smtClean="0"/>
           </a:p>
           <a:p>
             <a:pPr lvl="4"/>
@@ -2736,7 +2716,6 @@
           <a:p>
             <a:fld id="{5BCAD085-E8A6-8845-BD4E-CB4CCA059FC4}" type="datetimeFigureOut">
               <a:rPr lang="en-US" smtClean="0"/>
-              <a:t>1/27/13</a:t>
             </a:fld>
             <a:endParaRPr lang="en-US"/>
           </a:p>
@@ -2814,18 +2793,12 @@
           <a:p>
             <a:fld id="{C1FF6DA9-008F-8B48-92A6-B652298478BF}" type="slidenum">
               <a:rPr lang="en-US" smtClean="0"/>
-              <a:t>‹#›</a:t>
             </a:fld>
             <a:endParaRPr lang="en-US"/>
           </a:p>
         </p:txBody>
       </p:sp>
     </p:spTree>
-    <p:extLst>
-      <p:ext uri="{BB962C8B-B14F-4D97-AF65-F5344CB8AC3E}">
-        <p14:creationId xmlns:p14="http://schemas.microsoft.com/office/powerpoint/2010/main" val="2209977519"/>
-      </p:ext>
-    </p:extLst>
   </p:cSld>
   <p:clrMap bg1="lt1" tx1="dk1" bg2="lt2" tx2="dk2" accent1="accent1" accent2="accent2" accent3="accent3" accent4="accent4" accent5="accent5" accent6="accent6" hlink="hlink" folHlink="folHlink"/>
   <p:sldLayoutIdLst>
@@ -2863,7 +2836,7 @@
         <a:spcBef>
           <a:spcPct val="20000"/>
         </a:spcBef>
-        <a:buFont typeface="Arial"/>
+        <a:buFont typeface="Arial" panose="020B0604020202020204"/>
         <a:buChar char="•"/>
         <a:defRPr sz="3200" kern="1200">
           <a:solidFill>
@@ -2878,7 +2851,7 @@
         <a:spcBef>
           <a:spcPct val="20000"/>
         </a:spcBef>
-        <a:buFont typeface="Arial"/>
+        <a:buFont typeface="Arial" panose="020B0604020202020204"/>
         <a:buChar char="–"/>
         <a:defRPr sz="2800" kern="1200">
           <a:solidFill>
@@ -2893,7 +2866,7 @@
         <a:spcBef>
           <a:spcPct val="20000"/>
         </a:spcBef>
-        <a:buFont typeface="Arial"/>
+        <a:buFont typeface="Arial" panose="020B0604020202020204"/>
         <a:buChar char="•"/>
         <a:defRPr sz="2400" kern="1200">
           <a:solidFill>
@@ -2908,7 +2881,7 @@
         <a:spcBef>
           <a:spcPct val="20000"/>
         </a:spcBef>
-        <a:buFont typeface="Arial"/>
+        <a:buFont typeface="Arial" panose="020B0604020202020204"/>
         <a:buChar char="–"/>
         <a:defRPr sz="2000" kern="1200">
           <a:solidFill>
@@ -2923,7 +2896,7 @@
         <a:spcBef>
           <a:spcPct val="20000"/>
         </a:spcBef>
-        <a:buFont typeface="Arial"/>
+        <a:buFont typeface="Arial" panose="020B0604020202020204"/>
         <a:buChar char="»"/>
         <a:defRPr sz="2000" kern="1200">
           <a:solidFill>
@@ -2938,7 +2911,7 @@
         <a:spcBef>
           <a:spcPct val="20000"/>
         </a:spcBef>
-        <a:buFont typeface="Arial"/>
+        <a:buFont typeface="Arial" panose="020B0604020202020204"/>
         <a:buChar char="•"/>
         <a:defRPr sz="2000" kern="1200">
           <a:solidFill>
@@ -2953,7 +2926,7 @@
         <a:spcBef>
           <a:spcPct val="20000"/>
         </a:spcBef>
-        <a:buFont typeface="Arial"/>
+        <a:buFont typeface="Arial" panose="020B0604020202020204"/>
         <a:buChar char="•"/>
         <a:defRPr sz="2000" kern="1200">
           <a:solidFill>
@@ -2968,7 +2941,7 @@
         <a:spcBef>
           <a:spcPct val="20000"/>
         </a:spcBef>
-        <a:buFont typeface="Arial"/>
+        <a:buFont typeface="Arial" panose="020B0604020202020204"/>
         <a:buChar char="•"/>
         <a:defRPr sz="2000" kern="1200">
           <a:solidFill>
@@ -2983,7 +2956,7 @@
         <a:spcBef>
           <a:spcPct val="20000"/>
         </a:spcBef>
-        <a:buFont typeface="Arial"/>
+        <a:buFont typeface="Arial" panose="020B0604020202020204"/>
         <a:buChar char="•"/>
         <a:defRPr sz="2000" kern="1200">
           <a:solidFill>
@@ -3095,7 +3068,7 @@
 </file>
 
 <file path=ppt/slides/slide1.xml><?xml version="1.0" encoding="utf-8"?>
-<p:sld xmlns:a="http://schemas.openxmlformats.org/drawingml/2006/main" xmlns:p="http://schemas.openxmlformats.org/presentationml/2006/main" xmlns:r="http://schemas.openxmlformats.org/officeDocument/2006/relationships">
+<p:sld xmlns:a="http://schemas.openxmlformats.org/drawingml/2006/main" xmlns:r="http://schemas.openxmlformats.org/officeDocument/2006/relationships" xmlns:p="http://schemas.openxmlformats.org/presentationml/2006/main">
   <p:cSld>
     <p:bg>
       <p:bgPr>
@@ -3139,7 +3112,7 @@
                 <a:solidFill>
                   <a:srgbClr val="06B6D4"/>
                 </a:solidFill>
-                <a:latin typeface="Segoe UI"/>
+                <a:latin typeface="Segoe UI" panose="020B0502040204020203"/>
               </a:defRPr>
             </a:pPr>
             <a:r>
@@ -3175,7 +3148,7 @@
                 <a:solidFill>
                   <a:srgbClr val="054A75"/>
                 </a:solidFill>
-                <a:latin typeface="Segoe UI"/>
+                <a:latin typeface="Segoe UI" panose="020B0502040204020203"/>
               </a:defRPr>
             </a:pPr>
             <a:r>
@@ -3211,7 +3184,7 @@
                 <a:solidFill>
                   <a:srgbClr val="334155"/>
                 </a:solidFill>
-                <a:latin typeface="Segoe UI"/>
+                <a:latin typeface="Segoe UI" panose="020B0502040204020203"/>
               </a:defRPr>
             </a:pPr>
             <a:r>
@@ -3247,7 +3220,7 @@
                 <a:solidFill>
                   <a:srgbClr val="64748B"/>
                 </a:solidFill>
-                <a:latin typeface="Segoe UI"/>
+                <a:latin typeface="Segoe UI" panose="020B0502040204020203"/>
               </a:defRPr>
             </a:pPr>
             <a:r>
@@ -3262,26 +3235,17 @@
       </p:sp>
     </p:spTree>
   </p:cSld>
-  <mc:AlternateContent xmlns:mc="http://schemas.openxmlformats.org/markup-compatibility/2006">
-    <mc:Choice xmlns:p14="http://schemas.microsoft.com/office/powerpoint/2010/main" Requires="p14">
-      <p:transition spd="slow">
-        <p:fade/>
-      </p:transition>
-    </mc:Choice>
-    <mc:Fallback>
-      <p:transition spd="slow">
-        <p:fade/>
-      </p:transition>
-    </mc:Fallback>
-  </mc:AlternateContent>
   <p:clrMapOvr>
     <a:masterClrMapping/>
   </p:clrMapOvr>
+  <p:transition spd="slow">
+    <p:fade/>
+  </p:transition>
 </p:sld>
 </file>
 
 <file path=ppt/slides/slide10.xml><?xml version="1.0" encoding="utf-8"?>
-<p:sld xmlns:a="http://schemas.openxmlformats.org/drawingml/2006/main" xmlns:p="http://schemas.openxmlformats.org/presentationml/2006/main" xmlns:r="http://schemas.openxmlformats.org/officeDocument/2006/relationships">
+<p:sld xmlns:a="http://schemas.openxmlformats.org/drawingml/2006/main" xmlns:r="http://schemas.openxmlformats.org/officeDocument/2006/relationships" xmlns:p="http://schemas.openxmlformats.org/presentationml/2006/main">
   <p:cSld>
     <p:bg>
       <p:bgPr>
@@ -3325,7 +3289,7 @@
                 <a:solidFill>
                   <a:srgbClr val="06B6D4"/>
                 </a:solidFill>
-                <a:latin typeface="Segoe UI"/>
+                <a:latin typeface="Segoe UI" panose="020B0502040204020203"/>
               </a:defRPr>
             </a:pPr>
             <a:r>
@@ -3385,7 +3349,7 @@
                 <a:solidFill>
                   <a:srgbClr val="054A75"/>
                 </a:solidFill>
-                <a:latin typeface="Segoe UI"/>
+                <a:latin typeface="Segoe UI" panose="020B0502040204020203"/>
               </a:defRPr>
             </a:pPr>
             <a:r>
@@ -3421,7 +3385,7 @@
                 <a:solidFill>
                   <a:srgbClr val="64748B"/>
                 </a:solidFill>
-                <a:latin typeface="Segoe UI"/>
+                <a:latin typeface="Segoe UI" panose="020B0502040204020203"/>
               </a:defRPr>
             </a:pPr>
             <a:r>
@@ -3460,7 +3424,7 @@
                 <a:solidFill>
                   <a:srgbClr val="06B6D4"/>
                 </a:solidFill>
-                <a:latin typeface="Segoe UI"/>
+                <a:latin typeface="Segoe UI" panose="020B0502040204020203"/>
               </a:defRPr>
             </a:pPr>
             <a:r>
@@ -3476,7 +3440,7 @@
                 <a:solidFill>
                   <a:srgbClr val="334155"/>
                 </a:solidFill>
-                <a:latin typeface="Segoe UI"/>
+                <a:latin typeface="Segoe UI" panose="020B0502040204020203"/>
               </a:defRPr>
             </a:pPr>
             <a:r>
@@ -3492,7 +3456,7 @@
                 <a:solidFill>
                   <a:srgbClr val="334155"/>
                 </a:solidFill>
-                <a:latin typeface="Segoe UI"/>
+                <a:latin typeface="Segoe UI" panose="020B0502040204020203"/>
               </a:defRPr>
             </a:pPr>
             <a:r>
@@ -3508,7 +3472,7 @@
                 <a:solidFill>
                   <a:srgbClr val="334155"/>
                 </a:solidFill>
-                <a:latin typeface="Segoe UI"/>
+                <a:latin typeface="Segoe UI" panose="020B0502040204020203"/>
               </a:defRPr>
             </a:pPr>
             <a:r>
@@ -3524,7 +3488,7 @@
                 <a:solidFill>
                   <a:srgbClr val="334155"/>
                 </a:solidFill>
-                <a:latin typeface="Segoe UI"/>
+                <a:latin typeface="Segoe UI" panose="020B0502040204020203"/>
               </a:defRPr>
             </a:pPr>
             <a:r>
@@ -3542,7 +3506,7 @@
           <p:nvPr/>
         </p:nvPicPr>
         <p:blipFill>
-          <a:blip r:embed="rId2"/>
+          <a:blip r:embed="rId1"/>
           <a:stretch>
             <a:fillRect/>
           </a:stretch>
@@ -3559,26 +3523,17 @@
       </p:pic>
     </p:spTree>
   </p:cSld>
-  <mc:AlternateContent xmlns:mc="http://schemas.openxmlformats.org/markup-compatibility/2006">
-    <mc:Choice xmlns:p14="http://schemas.microsoft.com/office/powerpoint/2010/main" Requires="p14">
-      <p:transition spd="slow">
-        <p:wipe dir="l"/>
-      </p:transition>
-    </mc:Choice>
-    <mc:Fallback>
-      <p:transition spd="slow">
-        <p:wipe dir="l"/>
-      </p:transition>
-    </mc:Fallback>
-  </mc:AlternateContent>
   <p:clrMapOvr>
     <a:masterClrMapping/>
   </p:clrMapOvr>
+  <p:transition spd="slow">
+    <p:wipe/>
+  </p:transition>
 </p:sld>
 </file>
 
 <file path=ppt/slides/slide11.xml><?xml version="1.0" encoding="utf-8"?>
-<p:sld xmlns:a="http://schemas.openxmlformats.org/drawingml/2006/main" xmlns:p="http://schemas.openxmlformats.org/presentationml/2006/main" xmlns:r="http://schemas.openxmlformats.org/officeDocument/2006/relationships">
+<p:sld xmlns:a="http://schemas.openxmlformats.org/drawingml/2006/main" xmlns:r="http://schemas.openxmlformats.org/officeDocument/2006/relationships" xmlns:p="http://schemas.openxmlformats.org/presentationml/2006/main">
   <p:cSld>
     <p:bg>
       <p:bgPr>
@@ -3622,7 +3577,7 @@
                 <a:solidFill>
                   <a:srgbClr val="06B6D4"/>
                 </a:solidFill>
-                <a:latin typeface="Segoe UI"/>
+                <a:latin typeface="Segoe UI" panose="020B0502040204020203"/>
               </a:defRPr>
             </a:pPr>
             <a:r>
@@ -3682,7 +3637,7 @@
                 <a:solidFill>
                   <a:srgbClr val="054A75"/>
                 </a:solidFill>
-                <a:latin typeface="Segoe UI"/>
+                <a:latin typeface="Segoe UI" panose="020B0502040204020203"/>
               </a:defRPr>
             </a:pPr>
             <a:r>
@@ -3718,7 +3673,7 @@
                 <a:solidFill>
                   <a:srgbClr val="64748B"/>
                 </a:solidFill>
-                <a:latin typeface="Segoe UI"/>
+                <a:latin typeface="Segoe UI" panose="020B0502040204020203"/>
               </a:defRPr>
             </a:pPr>
             <a:r>
@@ -3757,7 +3712,7 @@
                 <a:solidFill>
                   <a:srgbClr val="06B6D4"/>
                 </a:solidFill>
-                <a:latin typeface="Segoe UI"/>
+                <a:latin typeface="Segoe UI" panose="020B0502040204020203"/>
               </a:defRPr>
             </a:pPr>
             <a:r>
@@ -3773,7 +3728,7 @@
                 <a:solidFill>
                   <a:srgbClr val="334155"/>
                 </a:solidFill>
-                <a:latin typeface="Segoe UI"/>
+                <a:latin typeface="Segoe UI" panose="020B0502040204020203"/>
               </a:defRPr>
             </a:pPr>
             <a:r>
@@ -3789,7 +3744,7 @@
                 <a:solidFill>
                   <a:srgbClr val="334155"/>
                 </a:solidFill>
-                <a:latin typeface="Segoe UI"/>
+                <a:latin typeface="Segoe UI" panose="020B0502040204020203"/>
               </a:defRPr>
             </a:pPr>
             <a:r>
@@ -3805,7 +3760,7 @@
                 <a:solidFill>
                   <a:srgbClr val="334155"/>
                 </a:solidFill>
-                <a:latin typeface="Segoe UI"/>
+                <a:latin typeface="Segoe UI" panose="020B0502040204020203"/>
               </a:defRPr>
             </a:pPr>
             <a:r>
@@ -3821,7 +3776,7 @@
                 <a:solidFill>
                   <a:srgbClr val="334155"/>
                 </a:solidFill>
-                <a:latin typeface="Segoe UI"/>
+                <a:latin typeface="Segoe UI" panose="020B0502040204020203"/>
               </a:defRPr>
             </a:pPr>
             <a:r>
@@ -3839,7 +3794,7 @@
           <p:nvPr/>
         </p:nvPicPr>
         <p:blipFill>
-          <a:blip r:embed="rId2"/>
+          <a:blip r:embed="rId1"/>
           <a:stretch>
             <a:fillRect/>
           </a:stretch>
@@ -3856,26 +3811,17 @@
       </p:pic>
     </p:spTree>
   </p:cSld>
-  <mc:AlternateContent xmlns:mc="http://schemas.openxmlformats.org/markup-compatibility/2006">
-    <mc:Choice xmlns:p14="http://schemas.microsoft.com/office/powerpoint/2010/main" Requires="p14">
-      <p:transition spd="slow">
-        <p:fade/>
-      </p:transition>
-    </mc:Choice>
-    <mc:Fallback>
-      <p:transition spd="slow">
-        <p:fade/>
-      </p:transition>
-    </mc:Fallback>
-  </mc:AlternateContent>
   <p:clrMapOvr>
     <a:masterClrMapping/>
   </p:clrMapOvr>
+  <p:transition spd="slow">
+    <p:fade/>
+  </p:transition>
 </p:sld>
 </file>
 
 <file path=ppt/slides/slide12.xml><?xml version="1.0" encoding="utf-8"?>
-<p:sld xmlns:a="http://schemas.openxmlformats.org/drawingml/2006/main" xmlns:p="http://schemas.openxmlformats.org/presentationml/2006/main" xmlns:r="http://schemas.openxmlformats.org/officeDocument/2006/relationships">
+<p:sld xmlns:a="http://schemas.openxmlformats.org/drawingml/2006/main" xmlns:r="http://schemas.openxmlformats.org/officeDocument/2006/relationships" xmlns:p="http://schemas.openxmlformats.org/presentationml/2006/main">
   <p:cSld>
     <p:bg>
       <p:bgPr>
@@ -3919,7 +3865,7 @@
                 <a:solidFill>
                   <a:srgbClr val="06B6D4"/>
                 </a:solidFill>
-                <a:latin typeface="Segoe UI"/>
+                <a:latin typeface="Segoe UI" panose="020B0502040204020203"/>
               </a:defRPr>
             </a:pPr>
             <a:r>
@@ -3979,7 +3925,7 @@
                 <a:solidFill>
                   <a:srgbClr val="054A75"/>
                 </a:solidFill>
-                <a:latin typeface="Segoe UI"/>
+                <a:latin typeface="Segoe UI" panose="020B0502040204020203"/>
               </a:defRPr>
             </a:pPr>
             <a:r>
@@ -4015,7 +3961,7 @@
                 <a:solidFill>
                   <a:srgbClr val="64748B"/>
                 </a:solidFill>
-                <a:latin typeface="Segoe UI"/>
+                <a:latin typeface="Segoe UI" panose="020B0502040204020203"/>
               </a:defRPr>
             </a:pPr>
             <a:r>
@@ -4054,7 +4000,7 @@
                 <a:solidFill>
                   <a:srgbClr val="06B6D4"/>
                 </a:solidFill>
-                <a:latin typeface="Segoe UI"/>
+                <a:latin typeface="Segoe UI" panose="020B0502040204020203"/>
               </a:defRPr>
             </a:pPr>
             <a:r>
@@ -4070,7 +4016,7 @@
                 <a:solidFill>
                   <a:srgbClr val="334155"/>
                 </a:solidFill>
-                <a:latin typeface="Segoe UI"/>
+                <a:latin typeface="Segoe UI" panose="020B0502040204020203"/>
               </a:defRPr>
             </a:pPr>
             <a:r>
@@ -4086,7 +4032,7 @@
                 <a:solidFill>
                   <a:srgbClr val="334155"/>
                 </a:solidFill>
-                <a:latin typeface="Segoe UI"/>
+                <a:latin typeface="Segoe UI" panose="020B0502040204020203"/>
               </a:defRPr>
             </a:pPr>
             <a:r>
@@ -4102,7 +4048,7 @@
                 <a:solidFill>
                   <a:srgbClr val="334155"/>
                 </a:solidFill>
-                <a:latin typeface="Segoe UI"/>
+                <a:latin typeface="Segoe UI" panose="020B0502040204020203"/>
               </a:defRPr>
             </a:pPr>
             <a:r>
@@ -4118,7 +4064,7 @@
                 <a:solidFill>
                   <a:srgbClr val="334155"/>
                 </a:solidFill>
-                <a:latin typeface="Segoe UI"/>
+                <a:latin typeface="Segoe UI" panose="020B0502040204020203"/>
               </a:defRPr>
             </a:pPr>
             <a:r>
@@ -4136,7 +4082,7 @@
           <p:nvPr/>
         </p:nvPicPr>
         <p:blipFill>
-          <a:blip r:embed="rId2"/>
+          <a:blip r:embed="rId1"/>
           <a:stretch>
             <a:fillRect/>
           </a:stretch>
@@ -4153,26 +4099,17 @@
       </p:pic>
     </p:spTree>
   </p:cSld>
-  <mc:AlternateContent xmlns:mc="http://schemas.openxmlformats.org/markup-compatibility/2006">
-    <mc:Choice xmlns:p14="http://schemas.microsoft.com/office/powerpoint/2010/main" Requires="p14">
-      <p:transition spd="slow">
-        <p:push dir="l"/>
-      </p:transition>
-    </mc:Choice>
-    <mc:Fallback>
-      <p:transition spd="slow">
-        <p:push dir="l"/>
-      </p:transition>
-    </mc:Fallback>
-  </mc:AlternateContent>
   <p:clrMapOvr>
     <a:masterClrMapping/>
   </p:clrMapOvr>
+  <p:transition spd="slow">
+    <p:push/>
+  </p:transition>
 </p:sld>
 </file>
 
 <file path=ppt/slides/slide13.xml><?xml version="1.0" encoding="utf-8"?>
-<p:sld xmlns:a="http://schemas.openxmlformats.org/drawingml/2006/main" xmlns:p="http://schemas.openxmlformats.org/presentationml/2006/main" xmlns:r="http://schemas.openxmlformats.org/officeDocument/2006/relationships">
+<p:sld xmlns:a="http://schemas.openxmlformats.org/drawingml/2006/main" xmlns:r="http://schemas.openxmlformats.org/officeDocument/2006/relationships" xmlns:p="http://schemas.openxmlformats.org/presentationml/2006/main">
   <p:cSld>
     <p:bg>
       <p:bgPr>
@@ -4216,7 +4153,7 @@
                 <a:solidFill>
                   <a:srgbClr val="06B6D4"/>
                 </a:solidFill>
-                <a:latin typeface="Segoe UI"/>
+                <a:latin typeface="Segoe UI" panose="020B0502040204020203"/>
               </a:defRPr>
             </a:pPr>
             <a:r>
@@ -4276,7 +4213,7 @@
                 <a:solidFill>
                   <a:srgbClr val="054A75"/>
                 </a:solidFill>
-                <a:latin typeface="Segoe UI"/>
+                <a:latin typeface="Segoe UI" panose="020B0502040204020203"/>
               </a:defRPr>
             </a:pPr>
             <a:r>
@@ -4312,7 +4249,7 @@
                 <a:solidFill>
                   <a:srgbClr val="64748B"/>
                 </a:solidFill>
-                <a:latin typeface="Segoe UI"/>
+                <a:latin typeface="Segoe UI" panose="020B0502040204020203"/>
               </a:defRPr>
             </a:pPr>
             <a:r>
@@ -4351,7 +4288,7 @@
                 <a:solidFill>
                   <a:srgbClr val="06B6D4"/>
                 </a:solidFill>
-                <a:latin typeface="Segoe UI"/>
+                <a:latin typeface="Segoe UI" panose="020B0502040204020203"/>
               </a:defRPr>
             </a:pPr>
             <a:r>
@@ -4367,7 +4304,7 @@
                 <a:solidFill>
                   <a:srgbClr val="334155"/>
                 </a:solidFill>
-                <a:latin typeface="Segoe UI"/>
+                <a:latin typeface="Segoe UI" panose="020B0502040204020203"/>
               </a:defRPr>
             </a:pPr>
             <a:r>
@@ -4383,7 +4320,7 @@
                 <a:solidFill>
                   <a:srgbClr val="334155"/>
                 </a:solidFill>
-                <a:latin typeface="Segoe UI"/>
+                <a:latin typeface="Segoe UI" panose="020B0502040204020203"/>
               </a:defRPr>
             </a:pPr>
             <a:r>
@@ -4399,7 +4336,7 @@
                 <a:solidFill>
                   <a:srgbClr val="334155"/>
                 </a:solidFill>
-                <a:latin typeface="Segoe UI"/>
+                <a:latin typeface="Segoe UI" panose="020B0502040204020203"/>
               </a:defRPr>
             </a:pPr>
             <a:r>
@@ -4415,7 +4352,7 @@
                 <a:solidFill>
                   <a:srgbClr val="334155"/>
                 </a:solidFill>
-                <a:latin typeface="Segoe UI"/>
+                <a:latin typeface="Segoe UI" panose="020B0502040204020203"/>
               </a:defRPr>
             </a:pPr>
             <a:r>
@@ -4433,7 +4370,7 @@
           <p:nvPr/>
         </p:nvPicPr>
         <p:blipFill>
-          <a:blip r:embed="rId2"/>
+          <a:blip r:embed="rId1"/>
           <a:stretch>
             <a:fillRect/>
           </a:stretch>
@@ -4450,26 +4387,17 @@
       </p:pic>
     </p:spTree>
   </p:cSld>
-  <mc:AlternateContent xmlns:mc="http://schemas.openxmlformats.org/markup-compatibility/2006">
-    <mc:Choice xmlns:p14="http://schemas.microsoft.com/office/powerpoint/2010/main" Requires="p14">
-      <p:transition spd="slow">
-        <p:fade/>
-      </p:transition>
-    </mc:Choice>
-    <mc:Fallback>
-      <p:transition spd="slow">
-        <p:fade/>
-      </p:transition>
-    </mc:Fallback>
-  </mc:AlternateContent>
   <p:clrMapOvr>
     <a:masterClrMapping/>
   </p:clrMapOvr>
+  <p:transition spd="slow">
+    <p:fade/>
+  </p:transition>
 </p:sld>
 </file>
 
 <file path=ppt/slides/slide14.xml><?xml version="1.0" encoding="utf-8"?>
-<p:sld xmlns:a="http://schemas.openxmlformats.org/drawingml/2006/main" xmlns:p="http://schemas.openxmlformats.org/presentationml/2006/main" xmlns:r="http://schemas.openxmlformats.org/officeDocument/2006/relationships">
+<p:sld xmlns:a="http://schemas.openxmlformats.org/drawingml/2006/main" xmlns:r="http://schemas.openxmlformats.org/officeDocument/2006/relationships" xmlns:p="http://schemas.openxmlformats.org/presentationml/2006/main">
   <p:cSld>
     <p:bg>
       <p:bgPr>
@@ -4513,7 +4441,7 @@
                 <a:solidFill>
                   <a:srgbClr val="06B6D4"/>
                 </a:solidFill>
-                <a:latin typeface="Segoe UI"/>
+                <a:latin typeface="Segoe UI" panose="020B0502040204020203"/>
               </a:defRPr>
             </a:pPr>
             <a:r>
@@ -4573,7 +4501,7 @@
                 <a:solidFill>
                   <a:srgbClr val="054A75"/>
                 </a:solidFill>
-                <a:latin typeface="Segoe UI"/>
+                <a:latin typeface="Segoe UI" panose="020B0502040204020203"/>
               </a:defRPr>
             </a:pPr>
             <a:r>
@@ -4609,7 +4537,7 @@
                 <a:solidFill>
                   <a:srgbClr val="64748B"/>
                 </a:solidFill>
-                <a:latin typeface="Segoe UI"/>
+                <a:latin typeface="Segoe UI" panose="020B0502040204020203"/>
               </a:defRPr>
             </a:pPr>
             <a:r>
@@ -4648,7 +4576,7 @@
                 <a:solidFill>
                   <a:srgbClr val="06B6D4"/>
                 </a:solidFill>
-                <a:latin typeface="Segoe UI"/>
+                <a:latin typeface="Segoe UI" panose="020B0502040204020203"/>
               </a:defRPr>
             </a:pPr>
             <a:r>
@@ -4664,7 +4592,7 @@
                 <a:solidFill>
                   <a:srgbClr val="334155"/>
                 </a:solidFill>
-                <a:latin typeface="Segoe UI"/>
+                <a:latin typeface="Segoe UI" panose="020B0502040204020203"/>
               </a:defRPr>
             </a:pPr>
             <a:r>
@@ -4680,7 +4608,7 @@
                 <a:solidFill>
                   <a:srgbClr val="334155"/>
                 </a:solidFill>
-                <a:latin typeface="Segoe UI"/>
+                <a:latin typeface="Segoe UI" panose="020B0502040204020203"/>
               </a:defRPr>
             </a:pPr>
             <a:r>
@@ -4696,7 +4624,7 @@
                 <a:solidFill>
                   <a:srgbClr val="334155"/>
                 </a:solidFill>
-                <a:latin typeface="Segoe UI"/>
+                <a:latin typeface="Segoe UI" panose="020B0502040204020203"/>
               </a:defRPr>
             </a:pPr>
             <a:r>
@@ -4712,7 +4640,7 @@
                 <a:solidFill>
                   <a:srgbClr val="334155"/>
                 </a:solidFill>
-                <a:latin typeface="Segoe UI"/>
+                <a:latin typeface="Segoe UI" panose="020B0502040204020203"/>
               </a:defRPr>
             </a:pPr>
             <a:r>
@@ -4730,7 +4658,7 @@
           <p:nvPr/>
         </p:nvPicPr>
         <p:blipFill>
-          <a:blip r:embed="rId2"/>
+          <a:blip r:embed="rId1"/>
           <a:stretch>
             <a:fillRect/>
           </a:stretch>
@@ -4747,26 +4675,17 @@
       </p:pic>
     </p:spTree>
   </p:cSld>
-  <mc:AlternateContent xmlns:mc="http://schemas.openxmlformats.org/markup-compatibility/2006">
-    <mc:Choice xmlns:p14="http://schemas.microsoft.com/office/powerpoint/2010/main" Requires="p14">
-      <p:transition spd="slow">
-        <p:wipe dir="l"/>
-      </p:transition>
-    </mc:Choice>
-    <mc:Fallback>
-      <p:transition spd="slow">
-        <p:wipe dir="l"/>
-      </p:transition>
-    </mc:Fallback>
-  </mc:AlternateContent>
   <p:clrMapOvr>
     <a:masterClrMapping/>
   </p:clrMapOvr>
+  <p:transition spd="slow">
+    <p:wipe/>
+  </p:transition>
 </p:sld>
 </file>
 
 <file path=ppt/slides/slide15.xml><?xml version="1.0" encoding="utf-8"?>
-<p:sld xmlns:a="http://schemas.openxmlformats.org/drawingml/2006/main" xmlns:p="http://schemas.openxmlformats.org/presentationml/2006/main" xmlns:r="http://schemas.openxmlformats.org/officeDocument/2006/relationships">
+<p:sld xmlns:a="http://schemas.openxmlformats.org/drawingml/2006/main" xmlns:r="http://schemas.openxmlformats.org/officeDocument/2006/relationships" xmlns:p="http://schemas.openxmlformats.org/presentationml/2006/main">
   <p:cSld>
     <p:bg>
       <p:bgPr>
@@ -4810,7 +4729,7 @@
                 <a:solidFill>
                   <a:srgbClr val="06B6D4"/>
                 </a:solidFill>
-                <a:latin typeface="Segoe UI"/>
+                <a:latin typeface="Segoe UI" panose="020B0502040204020203"/>
               </a:defRPr>
             </a:pPr>
             <a:r>
@@ -4870,7 +4789,7 @@
                 <a:solidFill>
                   <a:srgbClr val="054A75"/>
                 </a:solidFill>
-                <a:latin typeface="Segoe UI"/>
+                <a:latin typeface="Segoe UI" panose="020B0502040204020203"/>
               </a:defRPr>
             </a:pPr>
             <a:r>
@@ -4906,7 +4825,7 @@
                 <a:solidFill>
                   <a:srgbClr val="64748B"/>
                 </a:solidFill>
-                <a:latin typeface="Segoe UI"/>
+                <a:latin typeface="Segoe UI" panose="020B0502040204020203"/>
               </a:defRPr>
             </a:pPr>
             <a:r>
@@ -4945,7 +4864,7 @@
                 <a:solidFill>
                   <a:srgbClr val="06B6D4"/>
                 </a:solidFill>
-                <a:latin typeface="Segoe UI"/>
+                <a:latin typeface="Segoe UI" panose="020B0502040204020203"/>
               </a:defRPr>
             </a:pPr>
             <a:r>
@@ -4961,7 +4880,7 @@
                 <a:solidFill>
                   <a:srgbClr val="334155"/>
                 </a:solidFill>
-                <a:latin typeface="Segoe UI"/>
+                <a:latin typeface="Segoe UI" panose="020B0502040204020203"/>
               </a:defRPr>
             </a:pPr>
             <a:r>
@@ -4977,7 +4896,7 @@
                 <a:solidFill>
                   <a:srgbClr val="334155"/>
                 </a:solidFill>
-                <a:latin typeface="Segoe UI"/>
+                <a:latin typeface="Segoe UI" panose="020B0502040204020203"/>
               </a:defRPr>
             </a:pPr>
             <a:r>
@@ -4993,7 +4912,7 @@
                 <a:solidFill>
                   <a:srgbClr val="334155"/>
                 </a:solidFill>
-                <a:latin typeface="Segoe UI"/>
+                <a:latin typeface="Segoe UI" panose="020B0502040204020203"/>
               </a:defRPr>
             </a:pPr>
             <a:r>
@@ -5009,7 +4928,7 @@
                 <a:solidFill>
                   <a:srgbClr val="334155"/>
                 </a:solidFill>
-                <a:latin typeface="Segoe UI"/>
+                <a:latin typeface="Segoe UI" panose="020B0502040204020203"/>
               </a:defRPr>
             </a:pPr>
             <a:r>
@@ -5027,7 +4946,7 @@
           <p:nvPr/>
         </p:nvPicPr>
         <p:blipFill>
-          <a:blip r:embed="rId2"/>
+          <a:blip r:embed="rId1"/>
           <a:stretch>
             <a:fillRect/>
           </a:stretch>
@@ -5044,26 +4963,17 @@
       </p:pic>
     </p:spTree>
   </p:cSld>
-  <mc:AlternateContent xmlns:mc="http://schemas.openxmlformats.org/markup-compatibility/2006">
-    <mc:Choice xmlns:p14="http://schemas.microsoft.com/office/powerpoint/2010/main" Requires="p14">
-      <p:transition spd="slow">
-        <p:fade/>
-      </p:transition>
-    </mc:Choice>
-    <mc:Fallback>
-      <p:transition spd="slow">
-        <p:fade/>
-      </p:transition>
-    </mc:Fallback>
-  </mc:AlternateContent>
   <p:clrMapOvr>
     <a:masterClrMapping/>
   </p:clrMapOvr>
+  <p:transition spd="slow">
+    <p:fade/>
+  </p:transition>
 </p:sld>
 </file>
 
 <file path=ppt/slides/slide16.xml><?xml version="1.0" encoding="utf-8"?>
-<p:sld xmlns:a="http://schemas.openxmlformats.org/drawingml/2006/main" xmlns:p="http://schemas.openxmlformats.org/presentationml/2006/main" xmlns:r="http://schemas.openxmlformats.org/officeDocument/2006/relationships">
+<p:sld xmlns:a="http://schemas.openxmlformats.org/drawingml/2006/main" xmlns:r="http://schemas.openxmlformats.org/officeDocument/2006/relationships" xmlns:p="http://schemas.openxmlformats.org/presentationml/2006/main">
   <p:cSld>
     <p:bg>
       <p:bgPr>
@@ -5107,7 +5017,7 @@
                 <a:solidFill>
                   <a:srgbClr val="06B6D4"/>
                 </a:solidFill>
-                <a:latin typeface="Segoe UI"/>
+                <a:latin typeface="Segoe UI" panose="020B0502040204020203"/>
               </a:defRPr>
             </a:pPr>
             <a:r>
@@ -5167,7 +5077,7 @@
                 <a:solidFill>
                   <a:srgbClr val="054A75"/>
                 </a:solidFill>
-                <a:latin typeface="Segoe UI"/>
+                <a:latin typeface="Segoe UI" panose="020B0502040204020203"/>
               </a:defRPr>
             </a:pPr>
             <a:r>
@@ -5203,7 +5113,7 @@
                 <a:solidFill>
                   <a:srgbClr val="64748B"/>
                 </a:solidFill>
-                <a:latin typeface="Segoe UI"/>
+                <a:latin typeface="Segoe UI" panose="020B0502040204020203"/>
               </a:defRPr>
             </a:pPr>
             <a:r>
@@ -5248,7 +5158,7 @@
           </a:fontRef>
         </p:style>
         <p:txBody>
-          <a:bodyPr rtlCol="0" anchor="ctr" wrap="square" lIns="228600" tIns="228600" rIns="228600" bIns="228600"/>
+          <a:bodyPr wrap="square" lIns="228600" tIns="228600" rIns="228600" bIns="228600" rtlCol="0" anchor="ctr"/>
           <a:lstStyle/>
           <a:p>
             <a:pPr algn="ctr">
@@ -5259,7 +5169,7 @@
                 <a:solidFill>
                   <a:srgbClr val="06B6D4"/>
                 </a:solidFill>
-                <a:latin typeface="Segoe UI"/>
+                <a:latin typeface="Segoe UI" panose="020B0502040204020203"/>
               </a:defRPr>
             </a:pPr>
             <a:r>
@@ -5275,7 +5185,7 @@
                 <a:solidFill>
                   <a:srgbClr val="FFFFFF"/>
                 </a:solidFill>
-                <a:latin typeface="Segoe UI"/>
+                <a:latin typeface="Segoe UI" panose="020B0502040204020203"/>
               </a:defRPr>
             </a:pPr>
             <a:r>
@@ -5320,7 +5230,7 @@
           </a:fontRef>
         </p:style>
         <p:txBody>
-          <a:bodyPr rtlCol="0" anchor="ctr" wrap="square" lIns="228600" tIns="228600" rIns="228600" bIns="228600"/>
+          <a:bodyPr wrap="square" lIns="228600" tIns="228600" rIns="228600" bIns="228600" rtlCol="0" anchor="ctr"/>
           <a:lstStyle/>
           <a:p>
             <a:pPr algn="ctr">
@@ -5331,7 +5241,7 @@
                 <a:solidFill>
                   <a:srgbClr val="06B6D4"/>
                 </a:solidFill>
-                <a:latin typeface="Segoe UI"/>
+                <a:latin typeface="Segoe UI" panose="020B0502040204020203"/>
               </a:defRPr>
             </a:pPr>
             <a:r>
@@ -5347,7 +5257,7 @@
                 <a:solidFill>
                   <a:srgbClr val="FFFFFF"/>
                 </a:solidFill>
-                <a:latin typeface="Segoe UI"/>
+                <a:latin typeface="Segoe UI" panose="020B0502040204020203"/>
               </a:defRPr>
             </a:pPr>
             <a:r>
@@ -5392,7 +5302,7 @@
           </a:fontRef>
         </p:style>
         <p:txBody>
-          <a:bodyPr rtlCol="0" anchor="ctr" wrap="square" lIns="228600" tIns="228600" rIns="228600" bIns="228600"/>
+          <a:bodyPr wrap="square" lIns="228600" tIns="228600" rIns="228600" bIns="228600" rtlCol="0" anchor="ctr"/>
           <a:lstStyle/>
           <a:p>
             <a:pPr algn="ctr">
@@ -5403,7 +5313,7 @@
                 <a:solidFill>
                   <a:srgbClr val="06B6D4"/>
                 </a:solidFill>
-                <a:latin typeface="Segoe UI"/>
+                <a:latin typeface="Segoe UI" panose="020B0502040204020203"/>
               </a:defRPr>
             </a:pPr>
             <a:r>
@@ -5419,7 +5329,7 @@
                 <a:solidFill>
                   <a:srgbClr val="FFFFFF"/>
                 </a:solidFill>
-                <a:latin typeface="Segoe UI"/>
+                <a:latin typeface="Segoe UI" panose="020B0502040204020203"/>
               </a:defRPr>
             </a:pPr>
             <a:r>
@@ -5464,7 +5374,7 @@
           </a:fontRef>
         </p:style>
         <p:txBody>
-          <a:bodyPr rtlCol="0" anchor="ctr" wrap="square" lIns="228600" tIns="228600" rIns="228600" bIns="228600"/>
+          <a:bodyPr wrap="square" lIns="228600" tIns="228600" rIns="228600" bIns="228600" rtlCol="0" anchor="ctr"/>
           <a:lstStyle/>
           <a:p>
             <a:pPr algn="ctr">
@@ -5475,7 +5385,7 @@
                 <a:solidFill>
                   <a:srgbClr val="06B6D4"/>
                 </a:solidFill>
-                <a:latin typeface="Segoe UI"/>
+                <a:latin typeface="Segoe UI" panose="020B0502040204020203"/>
               </a:defRPr>
             </a:pPr>
             <a:r>
@@ -5491,7 +5401,7 @@
                 <a:solidFill>
                   <a:srgbClr val="FFFFFF"/>
                 </a:solidFill>
-                <a:latin typeface="Segoe UI"/>
+                <a:latin typeface="Segoe UI" panose="020B0502040204020203"/>
               </a:defRPr>
             </a:pPr>
             <a:r>
@@ -5502,26 +5412,17 @@
       </p:sp>
     </p:spTree>
   </p:cSld>
-  <mc:AlternateContent xmlns:mc="http://schemas.openxmlformats.org/markup-compatibility/2006">
-    <mc:Choice xmlns:p14="http://schemas.microsoft.com/office/powerpoint/2010/main" Requires="p14">
-      <p:transition spd="slow">
-        <p:wipe dir="l"/>
-      </p:transition>
-    </mc:Choice>
-    <mc:Fallback>
-      <p:transition spd="slow">
-        <p:wipe dir="l"/>
-      </p:transition>
-    </mc:Fallback>
-  </mc:AlternateContent>
   <p:clrMapOvr>
     <a:masterClrMapping/>
   </p:clrMapOvr>
+  <p:transition spd="slow">
+    <p:wipe/>
+  </p:transition>
 </p:sld>
 </file>
 
 <file path=ppt/slides/slide17.xml><?xml version="1.0" encoding="utf-8"?>
-<p:sld xmlns:a="http://schemas.openxmlformats.org/drawingml/2006/main" xmlns:p="http://schemas.openxmlformats.org/presentationml/2006/main" xmlns:r="http://schemas.openxmlformats.org/officeDocument/2006/relationships">
+<p:sld xmlns:a="http://schemas.openxmlformats.org/drawingml/2006/main" xmlns:r="http://schemas.openxmlformats.org/officeDocument/2006/relationships" xmlns:p="http://schemas.openxmlformats.org/presentationml/2006/main">
   <p:cSld>
     <p:bg>
       <p:bgPr>
@@ -5565,7 +5466,7 @@
                 <a:solidFill>
                   <a:srgbClr val="06B6D4"/>
                 </a:solidFill>
-                <a:latin typeface="Segoe UI"/>
+                <a:latin typeface="Segoe UI" panose="020B0502040204020203"/>
               </a:defRPr>
             </a:pPr>
             <a:r>
@@ -5601,7 +5502,7 @@
                 <a:solidFill>
                   <a:srgbClr val="054A75"/>
                 </a:solidFill>
-                <a:latin typeface="Segoe UI"/>
+                <a:latin typeface="Segoe UI" panose="020B0502040204020203"/>
               </a:defRPr>
             </a:pPr>
             <a:r>
@@ -5618,8 +5519,8 @@
         </p:nvSpPr>
         <p:spPr>
           <a:xfrm>
-            <a:off x="1828800" y="4480560"/>
-            <a:ext cx="8503920" cy="822960"/>
+            <a:off x="3978275" y="4480560"/>
+            <a:ext cx="4204970" cy="291465"/>
           </a:xfrm>
           <a:prstGeom prst="rect">
             <a:avLst/>
@@ -5637,41 +5538,28 @@
                 <a:solidFill>
                   <a:srgbClr val="64748B"/>
                 </a:solidFill>
-                <a:latin typeface="Segoe UI"/>
+                <a:latin typeface="Segoe UI" panose="020B0502040204020203"/>
               </a:defRPr>
             </a:pPr>
             <a:r>
               <a:t>Harish, Harini, Gururaj Shetty  |  Revature Data Analytics</a:t>
-            </a:r>
-            <a:br/>
-            <a:r>
-              <a:t>Email: shettygururaj279@gmail.com  |  GitHub: SHETYGURU</a:t>
             </a:r>
           </a:p>
         </p:txBody>
       </p:sp>
     </p:spTree>
   </p:cSld>
-  <mc:AlternateContent xmlns:mc="http://schemas.openxmlformats.org/markup-compatibility/2006">
-    <mc:Choice xmlns:p14="http://schemas.microsoft.com/office/powerpoint/2010/main" Requires="p14">
-      <p:transition spd="slow">
-        <p:fade/>
-      </p:transition>
-    </mc:Choice>
-    <mc:Fallback>
-      <p:transition spd="slow">
-        <p:fade/>
-      </p:transition>
-    </mc:Fallback>
-  </mc:AlternateContent>
   <p:clrMapOvr>
     <a:masterClrMapping/>
   </p:clrMapOvr>
+  <p:transition spd="slow">
+    <p:fade/>
+  </p:transition>
 </p:sld>
 </file>
 
 <file path=ppt/slides/slide2.xml><?xml version="1.0" encoding="utf-8"?>
-<p:sld xmlns:a="http://schemas.openxmlformats.org/drawingml/2006/main" xmlns:p="http://schemas.openxmlformats.org/presentationml/2006/main" xmlns:r="http://schemas.openxmlformats.org/officeDocument/2006/relationships">
+<p:sld xmlns:a="http://schemas.openxmlformats.org/drawingml/2006/main" xmlns:r="http://schemas.openxmlformats.org/officeDocument/2006/relationships" xmlns:p="http://schemas.openxmlformats.org/presentationml/2006/main">
   <p:cSld>
     <p:bg>
       <p:bgPr>
@@ -5715,7 +5603,7 @@
                 <a:solidFill>
                   <a:srgbClr val="06B6D4"/>
                 </a:solidFill>
-                <a:latin typeface="Segoe UI"/>
+                <a:latin typeface="Segoe UI" panose="020B0502040204020203"/>
               </a:defRPr>
             </a:pPr>
             <a:r>
@@ -5775,7 +5663,7 @@
                 <a:solidFill>
                   <a:srgbClr val="054A75"/>
                 </a:solidFill>
-                <a:latin typeface="Segoe UI"/>
+                <a:latin typeface="Segoe UI" panose="020B0502040204020203"/>
               </a:defRPr>
             </a:pPr>
             <a:r>
@@ -5811,7 +5699,7 @@
                 <a:solidFill>
                   <a:srgbClr val="64748B"/>
                 </a:solidFill>
-                <a:latin typeface="Segoe UI"/>
+                <a:latin typeface="Segoe UI" panose="020B0502040204020203"/>
               </a:defRPr>
             </a:pPr>
             <a:r>
@@ -5850,7 +5738,7 @@
                 <a:solidFill>
                   <a:srgbClr val="334155"/>
                 </a:solidFill>
-                <a:latin typeface="Segoe UI"/>
+                <a:latin typeface="Segoe UI" panose="020B0502040204020203"/>
               </a:defRPr>
             </a:pPr>
             <a:r>
@@ -5866,7 +5754,7 @@
                 <a:solidFill>
                   <a:srgbClr val="334155"/>
                 </a:solidFill>
-                <a:latin typeface="Segoe UI"/>
+                <a:latin typeface="Segoe UI" panose="020B0502040204020203"/>
               </a:defRPr>
             </a:pPr>
             <a:r>
@@ -5882,7 +5770,7 @@
                 <a:solidFill>
                   <a:srgbClr val="334155"/>
                 </a:solidFill>
-                <a:latin typeface="Segoe UI"/>
+                <a:latin typeface="Segoe UI" panose="020B0502040204020203"/>
               </a:defRPr>
             </a:pPr>
             <a:r>
@@ -5898,7 +5786,7 @@
                 <a:solidFill>
                   <a:srgbClr val="334155"/>
                 </a:solidFill>
-                <a:latin typeface="Segoe UI"/>
+                <a:latin typeface="Segoe UI" panose="020B0502040204020203"/>
               </a:defRPr>
             </a:pPr>
             <a:r>
@@ -5914,7 +5802,7 @@
                 <a:solidFill>
                   <a:srgbClr val="334155"/>
                 </a:solidFill>
-                <a:latin typeface="Segoe UI"/>
+                <a:latin typeface="Segoe UI" panose="020B0502040204020203"/>
               </a:defRPr>
             </a:pPr>
             <a:r>
@@ -5930,7 +5818,7 @@
                 <a:solidFill>
                   <a:srgbClr val="334155"/>
                 </a:solidFill>
-                <a:latin typeface="Segoe UI"/>
+                <a:latin typeface="Segoe UI" panose="020B0502040204020203"/>
               </a:defRPr>
             </a:pPr>
             <a:r>
@@ -5946,7 +5834,7 @@
                 <a:solidFill>
                   <a:srgbClr val="334155"/>
                 </a:solidFill>
-                <a:latin typeface="Segoe UI"/>
+                <a:latin typeface="Segoe UI" panose="020B0502040204020203"/>
               </a:defRPr>
             </a:pPr>
             <a:r>
@@ -5957,26 +5845,17 @@
       </p:sp>
     </p:spTree>
   </p:cSld>
-  <mc:AlternateContent xmlns:mc="http://schemas.openxmlformats.org/markup-compatibility/2006">
-    <mc:Choice xmlns:p14="http://schemas.microsoft.com/office/powerpoint/2010/main" Requires="p14">
-      <p:transition spd="slow">
-        <p:push dir="l"/>
-      </p:transition>
-    </mc:Choice>
-    <mc:Fallback>
-      <p:transition spd="slow">
-        <p:push dir="l"/>
-      </p:transition>
-    </mc:Fallback>
-  </mc:AlternateContent>
   <p:clrMapOvr>
     <a:masterClrMapping/>
   </p:clrMapOvr>
+  <p:transition spd="slow">
+    <p:push/>
+  </p:transition>
 </p:sld>
 </file>
 
 <file path=ppt/slides/slide3.xml><?xml version="1.0" encoding="utf-8"?>
-<p:sld xmlns:a="http://schemas.openxmlformats.org/drawingml/2006/main" xmlns:p="http://schemas.openxmlformats.org/presentationml/2006/main" xmlns:r="http://schemas.openxmlformats.org/officeDocument/2006/relationships">
+<p:sld xmlns:a="http://schemas.openxmlformats.org/drawingml/2006/main" xmlns:r="http://schemas.openxmlformats.org/officeDocument/2006/relationships" xmlns:p="http://schemas.openxmlformats.org/presentationml/2006/main">
   <p:cSld>
     <p:bg>
       <p:bgPr>
@@ -6020,7 +5899,7 @@
                 <a:solidFill>
                   <a:srgbClr val="06B6D4"/>
                 </a:solidFill>
-                <a:latin typeface="Segoe UI"/>
+                <a:latin typeface="Segoe UI" panose="020B0502040204020203"/>
               </a:defRPr>
             </a:pPr>
             <a:r>
@@ -6080,7 +5959,7 @@
                 <a:solidFill>
                   <a:srgbClr val="054A75"/>
                 </a:solidFill>
-                <a:latin typeface="Segoe UI"/>
+                <a:latin typeface="Segoe UI" panose="020B0502040204020203"/>
               </a:defRPr>
             </a:pPr>
             <a:r>
@@ -6116,7 +5995,7 @@
                 <a:solidFill>
                   <a:srgbClr val="64748B"/>
                 </a:solidFill>
-                <a:latin typeface="Segoe UI"/>
+                <a:latin typeface="Segoe UI" panose="020B0502040204020203"/>
               </a:defRPr>
             </a:pPr>
             <a:r>
@@ -6161,7 +6040,7 @@
           </a:fontRef>
         </p:style>
         <p:txBody>
-          <a:bodyPr rtlCol="0" anchor="ctr" wrap="square" lIns="228600" tIns="228600" rIns="228600" bIns="228600"/>
+          <a:bodyPr wrap="square" lIns="228600" tIns="228600" rIns="228600" bIns="228600" rtlCol="0" anchor="ctr"/>
           <a:lstStyle/>
           <a:p>
             <a:pPr algn="ctr">
@@ -6172,7 +6051,7 @@
                 <a:solidFill>
                   <a:srgbClr val="EF4444"/>
                 </a:solidFill>
-                <a:latin typeface="Segoe UI"/>
+                <a:latin typeface="Segoe UI" panose="020B0502040204020203"/>
               </a:defRPr>
             </a:pPr>
             <a:r>
@@ -6188,7 +6067,7 @@
                 <a:solidFill>
                   <a:srgbClr val="FFFFFF"/>
                 </a:solidFill>
-                <a:latin typeface="Segoe UI"/>
+                <a:latin typeface="Segoe UI" panose="020B0502040204020203"/>
               </a:defRPr>
             </a:pPr>
             <a:r>
@@ -6204,7 +6083,7 @@
                 <a:solidFill>
                   <a:srgbClr val="FFFFFF"/>
                 </a:solidFill>
-                <a:latin typeface="Segoe UI"/>
+                <a:latin typeface="Segoe UI" panose="020B0502040204020203"/>
               </a:defRPr>
             </a:pPr>
             <a:r>
@@ -6220,7 +6099,7 @@
                 <a:solidFill>
                   <a:srgbClr val="FFFFFF"/>
                 </a:solidFill>
-                <a:latin typeface="Segoe UI"/>
+                <a:latin typeface="Segoe UI" panose="020B0502040204020203"/>
               </a:defRPr>
             </a:pPr>
             <a:r>
@@ -6265,7 +6144,7 @@
           </a:fontRef>
         </p:style>
         <p:txBody>
-          <a:bodyPr rtlCol="0" anchor="ctr" wrap="square" lIns="228600" tIns="228600" rIns="228600" bIns="228600"/>
+          <a:bodyPr wrap="square" lIns="228600" tIns="228600" rIns="228600" bIns="228600" rtlCol="0" anchor="ctr"/>
           <a:lstStyle/>
           <a:p>
             <a:pPr algn="ctr">
@@ -6276,7 +6155,7 @@
                 <a:solidFill>
                   <a:srgbClr val="22C55E"/>
                 </a:solidFill>
-                <a:latin typeface="Segoe UI"/>
+                <a:latin typeface="Segoe UI" panose="020B0502040204020203"/>
               </a:defRPr>
             </a:pPr>
             <a:r>
@@ -6292,7 +6171,7 @@
                 <a:solidFill>
                   <a:srgbClr val="FFFFFF"/>
                 </a:solidFill>
-                <a:latin typeface="Segoe UI"/>
+                <a:latin typeface="Segoe UI" panose="020B0502040204020203"/>
               </a:defRPr>
             </a:pPr>
             <a:r>
@@ -6308,7 +6187,7 @@
                 <a:solidFill>
                   <a:srgbClr val="FFFFFF"/>
                 </a:solidFill>
-                <a:latin typeface="Segoe UI"/>
+                <a:latin typeface="Segoe UI" panose="020B0502040204020203"/>
               </a:defRPr>
             </a:pPr>
             <a:r>
@@ -6324,7 +6203,7 @@
                 <a:solidFill>
                   <a:srgbClr val="FFFFFF"/>
                 </a:solidFill>
-                <a:latin typeface="Segoe UI"/>
+                <a:latin typeface="Segoe UI" panose="020B0502040204020203"/>
               </a:defRPr>
             </a:pPr>
             <a:r>
@@ -6369,7 +6248,7 @@
           </a:fontRef>
         </p:style>
         <p:txBody>
-          <a:bodyPr rtlCol="0" anchor="ctr" wrap="square" lIns="228600" tIns="228600" rIns="228600" bIns="228600"/>
+          <a:bodyPr wrap="square" lIns="228600" tIns="228600" rIns="228600" bIns="228600" rtlCol="0" anchor="ctr"/>
           <a:lstStyle/>
           <a:p>
             <a:pPr algn="ctr">
@@ -6380,7 +6259,7 @@
                 <a:solidFill>
                   <a:srgbClr val="EAB308"/>
                 </a:solidFill>
-                <a:latin typeface="Segoe UI"/>
+                <a:latin typeface="Segoe UI" panose="020B0502040204020203"/>
               </a:defRPr>
             </a:pPr>
             <a:r>
@@ -6396,7 +6275,7 @@
                 <a:solidFill>
                   <a:srgbClr val="FFFFFF"/>
                 </a:solidFill>
-                <a:latin typeface="Segoe UI"/>
+                <a:latin typeface="Segoe UI" panose="020B0502040204020203"/>
               </a:defRPr>
             </a:pPr>
             <a:r>
@@ -6412,7 +6291,7 @@
                 <a:solidFill>
                   <a:srgbClr val="FFFFFF"/>
                 </a:solidFill>
-                <a:latin typeface="Segoe UI"/>
+                <a:latin typeface="Segoe UI" panose="020B0502040204020203"/>
               </a:defRPr>
             </a:pPr>
             <a:r>
@@ -6428,7 +6307,7 @@
                 <a:solidFill>
                   <a:srgbClr val="FFFFFF"/>
                 </a:solidFill>
-                <a:latin typeface="Segoe UI"/>
+                <a:latin typeface="Segoe UI" panose="020B0502040204020203"/>
               </a:defRPr>
             </a:pPr>
             <a:r>
@@ -6439,26 +6318,17 @@
       </p:sp>
     </p:spTree>
   </p:cSld>
-  <mc:AlternateContent xmlns:mc="http://schemas.openxmlformats.org/markup-compatibility/2006">
-    <mc:Choice xmlns:p14="http://schemas.microsoft.com/office/powerpoint/2010/main" Requires="p14">
-      <p:transition spd="slow">
-        <p:fade/>
-      </p:transition>
-    </mc:Choice>
-    <mc:Fallback>
-      <p:transition spd="slow">
-        <p:fade/>
-      </p:transition>
-    </mc:Fallback>
-  </mc:AlternateContent>
   <p:clrMapOvr>
     <a:masterClrMapping/>
   </p:clrMapOvr>
+  <p:transition spd="slow">
+    <p:fade/>
+  </p:transition>
 </p:sld>
 </file>
 
 <file path=ppt/slides/slide4.xml><?xml version="1.0" encoding="utf-8"?>
-<p:sld xmlns:a="http://schemas.openxmlformats.org/drawingml/2006/main" xmlns:p="http://schemas.openxmlformats.org/presentationml/2006/main" xmlns:r="http://schemas.openxmlformats.org/officeDocument/2006/relationships">
+<p:sld xmlns:a="http://schemas.openxmlformats.org/drawingml/2006/main" xmlns:r="http://schemas.openxmlformats.org/officeDocument/2006/relationships" xmlns:p="http://schemas.openxmlformats.org/presentationml/2006/main">
   <p:cSld>
     <p:bg>
       <p:bgPr>
@@ -6502,7 +6372,7 @@
                 <a:solidFill>
                   <a:srgbClr val="06B6D4"/>
                 </a:solidFill>
-                <a:latin typeface="Segoe UI"/>
+                <a:latin typeface="Segoe UI" panose="020B0502040204020203"/>
               </a:defRPr>
             </a:pPr>
             <a:r>
@@ -6562,7 +6432,7 @@
                 <a:solidFill>
                   <a:srgbClr val="054A75"/>
                 </a:solidFill>
-                <a:latin typeface="Segoe UI"/>
+                <a:latin typeface="Segoe UI" panose="020B0502040204020203"/>
               </a:defRPr>
             </a:pPr>
             <a:r>
@@ -6598,7 +6468,7 @@
                 <a:solidFill>
                   <a:srgbClr val="64748B"/>
                 </a:solidFill>
-                <a:latin typeface="Segoe UI"/>
+                <a:latin typeface="Segoe UI" panose="020B0502040204020203"/>
               </a:defRPr>
             </a:pPr>
             <a:r>
@@ -6643,7 +6513,7 @@
           </a:fontRef>
         </p:style>
         <p:txBody>
-          <a:bodyPr rtlCol="0" anchor="ctr" wrap="square" lIns="228600" tIns="228600" rIns="228600" bIns="228600"/>
+          <a:bodyPr wrap="square" lIns="228600" tIns="228600" rIns="228600" bIns="228600" rtlCol="0" anchor="ctr"/>
           <a:lstStyle/>
           <a:p>
             <a:pPr algn="ctr">
@@ -6654,7 +6524,7 @@
                 <a:solidFill>
                   <a:srgbClr val="06B6D4"/>
                 </a:solidFill>
-                <a:latin typeface="Segoe UI"/>
+                <a:latin typeface="Segoe UI" panose="020B0502040204020203"/>
               </a:defRPr>
             </a:pPr>
             <a:r>
@@ -6670,7 +6540,7 @@
                 <a:solidFill>
                   <a:srgbClr val="FFFFFF"/>
                 </a:solidFill>
-                <a:latin typeface="Segoe UI"/>
+                <a:latin typeface="Segoe UI" panose="020B0502040204020203"/>
               </a:defRPr>
             </a:pPr>
             <a:r>
@@ -6686,7 +6556,7 @@
                 <a:solidFill>
                   <a:srgbClr val="FFFFFF"/>
                 </a:solidFill>
-                <a:latin typeface="Segoe UI"/>
+                <a:latin typeface="Segoe UI" panose="020B0502040204020203"/>
               </a:defRPr>
             </a:pPr>
             <a:r>
@@ -6702,7 +6572,7 @@
                 <a:solidFill>
                   <a:srgbClr val="FFFFFF"/>
                 </a:solidFill>
-                <a:latin typeface="Segoe UI"/>
+                <a:latin typeface="Segoe UI" panose="020B0502040204020203"/>
               </a:defRPr>
             </a:pPr>
             <a:r>
@@ -6747,7 +6617,7 @@
           </a:fontRef>
         </p:style>
         <p:txBody>
-          <a:bodyPr rtlCol="0" anchor="ctr" wrap="square" lIns="228600" tIns="228600" rIns="228600" bIns="228600"/>
+          <a:bodyPr wrap="square" lIns="228600" tIns="228600" rIns="228600" bIns="228600" rtlCol="0" anchor="ctr"/>
           <a:lstStyle/>
           <a:p>
             <a:pPr algn="ctr">
@@ -6758,7 +6628,7 @@
                 <a:solidFill>
                   <a:srgbClr val="06B6D4"/>
                 </a:solidFill>
-                <a:latin typeface="Segoe UI"/>
+                <a:latin typeface="Segoe UI" panose="020B0502040204020203"/>
               </a:defRPr>
             </a:pPr>
             <a:r>
@@ -6774,7 +6644,7 @@
                 <a:solidFill>
                   <a:srgbClr val="FFFFFF"/>
                 </a:solidFill>
-                <a:latin typeface="Segoe UI"/>
+                <a:latin typeface="Segoe UI" panose="020B0502040204020203"/>
               </a:defRPr>
             </a:pPr>
             <a:r>
@@ -6790,7 +6660,7 @@
                 <a:solidFill>
                   <a:srgbClr val="FFFFFF"/>
                 </a:solidFill>
-                <a:latin typeface="Segoe UI"/>
+                <a:latin typeface="Segoe UI" panose="020B0502040204020203"/>
               </a:defRPr>
             </a:pPr>
             <a:r>
@@ -6806,7 +6676,7 @@
                 <a:solidFill>
                   <a:srgbClr val="FFFFFF"/>
                 </a:solidFill>
-                <a:latin typeface="Segoe UI"/>
+                <a:latin typeface="Segoe UI" panose="020B0502040204020203"/>
               </a:defRPr>
             </a:pPr>
             <a:r>
@@ -6851,7 +6721,7 @@
           </a:fontRef>
         </p:style>
         <p:txBody>
-          <a:bodyPr rtlCol="0" anchor="ctr" wrap="square" lIns="228600" tIns="228600" rIns="228600" bIns="228600"/>
+          <a:bodyPr wrap="square" lIns="228600" tIns="228600" rIns="228600" bIns="228600" rtlCol="0" anchor="ctr"/>
           <a:lstStyle/>
           <a:p>
             <a:pPr algn="ctr">
@@ -6862,7 +6732,7 @@
                 <a:solidFill>
                   <a:srgbClr val="06B6D4"/>
                 </a:solidFill>
-                <a:latin typeface="Segoe UI"/>
+                <a:latin typeface="Segoe UI" panose="020B0502040204020203"/>
               </a:defRPr>
             </a:pPr>
             <a:r>
@@ -6878,7 +6748,7 @@
                 <a:solidFill>
                   <a:srgbClr val="FFFFFF"/>
                 </a:solidFill>
-                <a:latin typeface="Segoe UI"/>
+                <a:latin typeface="Segoe UI" panose="020B0502040204020203"/>
               </a:defRPr>
             </a:pPr>
             <a:r>
@@ -6894,7 +6764,7 @@
                 <a:solidFill>
                   <a:srgbClr val="FFFFFF"/>
                 </a:solidFill>
-                <a:latin typeface="Segoe UI"/>
+                <a:latin typeface="Segoe UI" panose="020B0502040204020203"/>
               </a:defRPr>
             </a:pPr>
             <a:r>
@@ -6910,7 +6780,7 @@
                 <a:solidFill>
                   <a:srgbClr val="FFFFFF"/>
                 </a:solidFill>
-                <a:latin typeface="Segoe UI"/>
+                <a:latin typeface="Segoe UI" panose="020B0502040204020203"/>
               </a:defRPr>
             </a:pPr>
             <a:r>
@@ -6955,7 +6825,7 @@
           </a:fontRef>
         </p:style>
         <p:txBody>
-          <a:bodyPr rtlCol="0" anchor="ctr" wrap="square" lIns="228600" tIns="228600" rIns="228600" bIns="228600"/>
+          <a:bodyPr wrap="square" lIns="228600" tIns="228600" rIns="228600" bIns="228600" rtlCol="0" anchor="ctr"/>
           <a:lstStyle/>
           <a:p>
             <a:pPr algn="ctr">
@@ -6966,7 +6836,7 @@
                 <a:solidFill>
                   <a:srgbClr val="06B6D4"/>
                 </a:solidFill>
-                <a:latin typeface="Segoe UI"/>
+                <a:latin typeface="Segoe UI" panose="020B0502040204020203"/>
               </a:defRPr>
             </a:pPr>
             <a:r>
@@ -6982,7 +6852,7 @@
                 <a:solidFill>
                   <a:srgbClr val="FFFFFF"/>
                 </a:solidFill>
-                <a:latin typeface="Segoe UI"/>
+                <a:latin typeface="Segoe UI" panose="020B0502040204020203"/>
               </a:defRPr>
             </a:pPr>
             <a:r>
@@ -6998,7 +6868,7 @@
                 <a:solidFill>
                   <a:srgbClr val="FFFFFF"/>
                 </a:solidFill>
-                <a:latin typeface="Segoe UI"/>
+                <a:latin typeface="Segoe UI" panose="020B0502040204020203"/>
               </a:defRPr>
             </a:pPr>
             <a:r>
@@ -7014,7 +6884,7 @@
                 <a:solidFill>
                   <a:srgbClr val="FFFFFF"/>
                 </a:solidFill>
-                <a:latin typeface="Segoe UI"/>
+                <a:latin typeface="Segoe UI" panose="020B0502040204020203"/>
               </a:defRPr>
             </a:pPr>
             <a:r>
@@ -7025,26 +6895,17 @@
       </p:sp>
     </p:spTree>
   </p:cSld>
-  <mc:AlternateContent xmlns:mc="http://schemas.openxmlformats.org/markup-compatibility/2006">
-    <mc:Choice xmlns:p14="http://schemas.microsoft.com/office/powerpoint/2010/main" Requires="p14">
-      <p:transition spd="slow">
-        <p:wipe dir="l"/>
-      </p:transition>
-    </mc:Choice>
-    <mc:Fallback>
-      <p:transition spd="slow">
-        <p:wipe dir="l"/>
-      </p:transition>
-    </mc:Fallback>
-  </mc:AlternateContent>
   <p:clrMapOvr>
     <a:masterClrMapping/>
   </p:clrMapOvr>
+  <p:transition spd="slow">
+    <p:wipe/>
+  </p:transition>
 </p:sld>
 </file>
 
 <file path=ppt/slides/slide5.xml><?xml version="1.0" encoding="utf-8"?>
-<p:sld xmlns:a="http://schemas.openxmlformats.org/drawingml/2006/main" xmlns:p="http://schemas.openxmlformats.org/presentationml/2006/main" xmlns:r="http://schemas.openxmlformats.org/officeDocument/2006/relationships">
+<p:sld xmlns:a="http://schemas.openxmlformats.org/drawingml/2006/main" xmlns:r="http://schemas.openxmlformats.org/officeDocument/2006/relationships" xmlns:p="http://schemas.openxmlformats.org/presentationml/2006/main">
   <p:cSld>
     <p:bg>
       <p:bgPr>
@@ -7088,7 +6949,7 @@
                 <a:solidFill>
                   <a:srgbClr val="06B6D4"/>
                 </a:solidFill>
-                <a:latin typeface="Segoe UI"/>
+                <a:latin typeface="Segoe UI" panose="020B0502040204020203"/>
               </a:defRPr>
             </a:pPr>
             <a:r>
@@ -7148,7 +7009,7 @@
                 <a:solidFill>
                   <a:srgbClr val="054A75"/>
                 </a:solidFill>
-                <a:latin typeface="Segoe UI"/>
+                <a:latin typeface="Segoe UI" panose="020B0502040204020203"/>
               </a:defRPr>
             </a:pPr>
             <a:r>
@@ -7184,7 +7045,7 @@
                 <a:solidFill>
                   <a:srgbClr val="64748B"/>
                 </a:solidFill>
-                <a:latin typeface="Segoe UI"/>
+                <a:latin typeface="Segoe UI" panose="020B0502040204020203"/>
               </a:defRPr>
             </a:pPr>
             <a:r>
@@ -7220,7 +7081,7 @@
                 <a:solidFill>
                   <a:srgbClr val="06B6D4"/>
                 </a:solidFill>
-                <a:latin typeface="Segoe UI"/>
+                <a:latin typeface="Segoe UI" panose="020B0502040204020203"/>
               </a:defRPr>
             </a:pPr>
             <a:r>
@@ -7259,7 +7120,7 @@
                 <a:solidFill>
                   <a:srgbClr val="334155"/>
                 </a:solidFill>
-                <a:latin typeface="Segoe UI"/>
+                <a:latin typeface="Segoe UI" panose="020B0502040204020203"/>
               </a:defRPr>
             </a:pPr>
             <a:r>
@@ -7275,7 +7136,7 @@
                 <a:solidFill>
                   <a:srgbClr val="334155"/>
                 </a:solidFill>
-                <a:latin typeface="Segoe UI"/>
+                <a:latin typeface="Segoe UI" panose="020B0502040204020203"/>
               </a:defRPr>
             </a:pPr>
             <a:r>
@@ -7291,7 +7152,7 @@
                 <a:solidFill>
                   <a:srgbClr val="334155"/>
                 </a:solidFill>
-                <a:latin typeface="Segoe UI"/>
+                <a:latin typeface="Segoe UI" panose="020B0502040204020203"/>
               </a:defRPr>
             </a:pPr>
             <a:r>
@@ -7307,7 +7168,7 @@
                 <a:solidFill>
                   <a:srgbClr val="334155"/>
                 </a:solidFill>
-                <a:latin typeface="Segoe UI"/>
+                <a:latin typeface="Segoe UI" panose="020B0502040204020203"/>
               </a:defRPr>
             </a:pPr>
             <a:r>
@@ -7323,7 +7184,7 @@
                 <a:solidFill>
                   <a:srgbClr val="334155"/>
                 </a:solidFill>
-                <a:latin typeface="Segoe UI"/>
+                <a:latin typeface="Segoe UI" panose="020B0502040204020203"/>
               </a:defRPr>
             </a:pPr>
             <a:r>
@@ -7368,7 +7229,7 @@
           </a:fontRef>
         </p:style>
         <p:txBody>
-          <a:bodyPr rtlCol="0" anchor="ctr" wrap="square" lIns="228600" tIns="228600" rIns="228600" bIns="228600"/>
+          <a:bodyPr wrap="square" lIns="228600" tIns="228600" rIns="228600" bIns="228600" rtlCol="0" anchor="ctr"/>
           <a:lstStyle/>
           <a:p>
             <a:pPr algn="ctr">
@@ -7379,7 +7240,7 @@
                 <a:solidFill>
                   <a:srgbClr val="22C55E"/>
                 </a:solidFill>
-                <a:latin typeface="Segoe UI"/>
+                <a:latin typeface="Segoe UI" panose="020B0502040204020203"/>
               </a:defRPr>
             </a:pPr>
             <a:r>
@@ -7395,7 +7256,7 @@
                 <a:solidFill>
                   <a:srgbClr val="FFFFFF"/>
                 </a:solidFill>
-                <a:latin typeface="Segoe UI"/>
+                <a:latin typeface="Segoe UI" panose="020B0502040204020203"/>
               </a:defRPr>
             </a:pPr>
             <a:r>
@@ -7411,7 +7272,7 @@
                 <a:solidFill>
                   <a:srgbClr val="FFFFFF"/>
                 </a:solidFill>
-                <a:latin typeface="Segoe UI"/>
+                <a:latin typeface="Segoe UI" panose="020B0502040204020203"/>
               </a:defRPr>
             </a:pPr>
             <a:r>
@@ -7427,7 +7288,7 @@
                 <a:solidFill>
                   <a:srgbClr val="FFFFFF"/>
                 </a:solidFill>
-                <a:latin typeface="Segoe UI"/>
+                <a:latin typeface="Segoe UI" panose="020B0502040204020203"/>
               </a:defRPr>
             </a:pPr>
             <a:r>
@@ -7443,7 +7304,7 @@
                 <a:solidFill>
                   <a:srgbClr val="FFFFFF"/>
                 </a:solidFill>
-                <a:latin typeface="Segoe UI"/>
+                <a:latin typeface="Segoe UI" panose="020B0502040204020203"/>
               </a:defRPr>
             </a:pPr>
             <a:r>
@@ -7459,7 +7320,7 @@
                 <a:solidFill>
                   <a:srgbClr val="FFFFFF"/>
                 </a:solidFill>
-                <a:latin typeface="Segoe UI"/>
+                <a:latin typeface="Segoe UI" panose="020B0502040204020203"/>
               </a:defRPr>
             </a:pPr>
             <a:r>
@@ -7470,26 +7331,17 @@
       </p:sp>
     </p:spTree>
   </p:cSld>
-  <mc:AlternateContent xmlns:mc="http://schemas.openxmlformats.org/markup-compatibility/2006">
-    <mc:Choice xmlns:p14="http://schemas.microsoft.com/office/powerpoint/2010/main" Requires="p14">
-      <p:transition spd="slow">
-        <p:fade/>
-      </p:transition>
-    </mc:Choice>
-    <mc:Fallback>
-      <p:transition spd="slow">
-        <p:fade/>
-      </p:transition>
-    </mc:Fallback>
-  </mc:AlternateContent>
   <p:clrMapOvr>
     <a:masterClrMapping/>
   </p:clrMapOvr>
+  <p:transition spd="slow">
+    <p:fade/>
+  </p:transition>
 </p:sld>
 </file>
 
 <file path=ppt/slides/slide6.xml><?xml version="1.0" encoding="utf-8"?>
-<p:sld xmlns:a="http://schemas.openxmlformats.org/drawingml/2006/main" xmlns:p="http://schemas.openxmlformats.org/presentationml/2006/main" xmlns:r="http://schemas.openxmlformats.org/officeDocument/2006/relationships">
+<p:sld xmlns:a="http://schemas.openxmlformats.org/drawingml/2006/main" xmlns:r="http://schemas.openxmlformats.org/officeDocument/2006/relationships" xmlns:p="http://schemas.openxmlformats.org/presentationml/2006/main">
   <p:cSld>
     <p:bg>
       <p:bgPr>
@@ -7533,7 +7385,7 @@
                 <a:solidFill>
                   <a:srgbClr val="06B6D4"/>
                 </a:solidFill>
-                <a:latin typeface="Segoe UI"/>
+                <a:latin typeface="Segoe UI" panose="020B0502040204020203"/>
               </a:defRPr>
             </a:pPr>
             <a:r>
@@ -7593,7 +7445,7 @@
                 <a:solidFill>
                   <a:srgbClr val="054A75"/>
                 </a:solidFill>
-                <a:latin typeface="Segoe UI"/>
+                <a:latin typeface="Segoe UI" panose="020B0502040204020203"/>
               </a:defRPr>
             </a:pPr>
             <a:r>
@@ -7629,7 +7481,7 @@
                 <a:solidFill>
                   <a:srgbClr val="64748B"/>
                 </a:solidFill>
-                <a:latin typeface="Segoe UI"/>
+                <a:latin typeface="Segoe UI" panose="020B0502040204020203"/>
               </a:defRPr>
             </a:pPr>
             <a:r>
@@ -7665,7 +7517,7 @@
                 <a:solidFill>
                   <a:srgbClr val="06B6D4"/>
                 </a:solidFill>
-                <a:latin typeface="Segoe UI"/>
+                <a:latin typeface="Segoe UI" panose="020B0502040204020203"/>
               </a:defRPr>
             </a:pPr>
             <a:r>
@@ -7704,7 +7556,7 @@
                 <a:solidFill>
                   <a:srgbClr val="334155"/>
                 </a:solidFill>
-                <a:latin typeface="Segoe UI"/>
+                <a:latin typeface="Segoe UI" panose="020B0502040204020203"/>
               </a:defRPr>
             </a:pPr>
             <a:r>
@@ -7720,7 +7572,7 @@
                 <a:solidFill>
                   <a:srgbClr val="334155"/>
                 </a:solidFill>
-                <a:latin typeface="Segoe UI"/>
+                <a:latin typeface="Segoe UI" panose="020B0502040204020203"/>
               </a:defRPr>
             </a:pPr>
             <a:r>
@@ -7736,7 +7588,7 @@
                 <a:solidFill>
                   <a:srgbClr val="334155"/>
                 </a:solidFill>
-                <a:latin typeface="Segoe UI"/>
+                <a:latin typeface="Segoe UI" panose="020B0502040204020203"/>
               </a:defRPr>
             </a:pPr>
             <a:r>
@@ -7752,7 +7604,7 @@
                 <a:solidFill>
                   <a:srgbClr val="334155"/>
                 </a:solidFill>
-                <a:latin typeface="Segoe UI"/>
+                <a:latin typeface="Segoe UI" panose="020B0502040204020203"/>
               </a:defRPr>
             </a:pPr>
             <a:r>
@@ -7768,7 +7620,7 @@
                 <a:solidFill>
                   <a:srgbClr val="334155"/>
                 </a:solidFill>
-                <a:latin typeface="Segoe UI"/>
+                <a:latin typeface="Segoe UI" panose="020B0502040204020203"/>
               </a:defRPr>
             </a:pPr>
             <a:r>
@@ -7813,7 +7665,7 @@
           </a:fontRef>
         </p:style>
         <p:txBody>
-          <a:bodyPr rtlCol="0" anchor="ctr" wrap="square" lIns="228600" tIns="228600" rIns="228600" bIns="228600"/>
+          <a:bodyPr wrap="square" lIns="228600" tIns="228600" rIns="228600" bIns="228600" rtlCol="0" anchor="ctr"/>
           <a:lstStyle/>
           <a:p>
             <a:pPr algn="ctr">
@@ -7824,7 +7676,7 @@
                 <a:solidFill>
                   <a:srgbClr val="06B6D4"/>
                 </a:solidFill>
-                <a:latin typeface="Segoe UI"/>
+                <a:latin typeface="Segoe UI" panose="020B0502040204020203"/>
               </a:defRPr>
             </a:pPr>
             <a:r>
@@ -7840,7 +7692,7 @@
                 <a:solidFill>
                   <a:srgbClr val="FFFFFF"/>
                 </a:solidFill>
-                <a:latin typeface="Segoe UI"/>
+                <a:latin typeface="Segoe UI" panose="020B0502040204020203"/>
               </a:defRPr>
             </a:pPr>
             <a:r>
@@ -7856,7 +7708,7 @@
                 <a:solidFill>
                   <a:srgbClr val="FFFFFF"/>
                 </a:solidFill>
-                <a:latin typeface="Segoe UI"/>
+                <a:latin typeface="Segoe UI" panose="020B0502040204020203"/>
               </a:defRPr>
             </a:pPr>
             <a:r>
@@ -7872,7 +7724,7 @@
                 <a:solidFill>
                   <a:srgbClr val="FFFFFF"/>
                 </a:solidFill>
-                <a:latin typeface="Segoe UI"/>
+                <a:latin typeface="Segoe UI" panose="020B0502040204020203"/>
               </a:defRPr>
             </a:pPr>
             <a:r>
@@ -7888,7 +7740,7 @@
                 <a:solidFill>
                   <a:srgbClr val="FFFFFF"/>
                 </a:solidFill>
-                <a:latin typeface="Segoe UI"/>
+                <a:latin typeface="Segoe UI" panose="020B0502040204020203"/>
               </a:defRPr>
             </a:pPr>
             <a:r>
@@ -7899,26 +7751,17 @@
       </p:sp>
     </p:spTree>
   </p:cSld>
-  <mc:AlternateContent xmlns:mc="http://schemas.openxmlformats.org/markup-compatibility/2006">
-    <mc:Choice xmlns:p14="http://schemas.microsoft.com/office/powerpoint/2010/main" Requires="p14">
-      <p:transition spd="slow">
-        <p:push dir="l"/>
-      </p:transition>
-    </mc:Choice>
-    <mc:Fallback>
-      <p:transition spd="slow">
-        <p:push dir="l"/>
-      </p:transition>
-    </mc:Fallback>
-  </mc:AlternateContent>
   <p:clrMapOvr>
     <a:masterClrMapping/>
   </p:clrMapOvr>
+  <p:transition spd="slow">
+    <p:push/>
+  </p:transition>
 </p:sld>
 </file>
 
 <file path=ppt/slides/slide7.xml><?xml version="1.0" encoding="utf-8"?>
-<p:sld xmlns:a="http://schemas.openxmlformats.org/drawingml/2006/main" xmlns:p="http://schemas.openxmlformats.org/presentationml/2006/main" xmlns:r="http://schemas.openxmlformats.org/officeDocument/2006/relationships">
+<p:sld xmlns:a="http://schemas.openxmlformats.org/drawingml/2006/main" xmlns:r="http://schemas.openxmlformats.org/officeDocument/2006/relationships" xmlns:p="http://schemas.openxmlformats.org/presentationml/2006/main">
   <p:cSld>
     <p:bg>
       <p:bgPr>
@@ -7962,7 +7805,7 @@
                 <a:solidFill>
                   <a:srgbClr val="06B6D4"/>
                 </a:solidFill>
-                <a:latin typeface="Segoe UI"/>
+                <a:latin typeface="Segoe UI" panose="020B0502040204020203"/>
               </a:defRPr>
             </a:pPr>
             <a:r>
@@ -8022,7 +7865,7 @@
                 <a:solidFill>
                   <a:srgbClr val="054A75"/>
                 </a:solidFill>
-                <a:latin typeface="Segoe UI"/>
+                <a:latin typeface="Segoe UI" panose="020B0502040204020203"/>
               </a:defRPr>
             </a:pPr>
             <a:r>
@@ -8058,7 +7901,7 @@
                 <a:solidFill>
                   <a:srgbClr val="64748B"/>
                 </a:solidFill>
-                <a:latin typeface="Segoe UI"/>
+                <a:latin typeface="Segoe UI" panose="020B0502040204020203"/>
               </a:defRPr>
             </a:pPr>
             <a:r>
@@ -8097,7 +7940,7 @@
                 <a:solidFill>
                   <a:srgbClr val="06B6D4"/>
                 </a:solidFill>
-                <a:latin typeface="Segoe UI"/>
+                <a:latin typeface="Segoe UI" panose="020B0502040204020203"/>
               </a:defRPr>
             </a:pPr>
             <a:r>
@@ -8113,7 +7956,7 @@
                 <a:solidFill>
                   <a:srgbClr val="334155"/>
                 </a:solidFill>
-                <a:latin typeface="Segoe UI"/>
+                <a:latin typeface="Segoe UI" panose="020B0502040204020203"/>
               </a:defRPr>
             </a:pPr>
             <a:r>
@@ -8129,7 +7972,7 @@
                 <a:solidFill>
                   <a:srgbClr val="334155"/>
                 </a:solidFill>
-                <a:latin typeface="Segoe UI"/>
+                <a:latin typeface="Segoe UI" panose="020B0502040204020203"/>
               </a:defRPr>
             </a:pPr>
             <a:r>
@@ -8145,7 +7988,7 @@
                 <a:solidFill>
                   <a:srgbClr val="334155"/>
                 </a:solidFill>
-                <a:latin typeface="Segoe UI"/>
+                <a:latin typeface="Segoe UI" panose="020B0502040204020203"/>
               </a:defRPr>
             </a:pPr>
             <a:r>
@@ -8161,7 +8004,7 @@
                 <a:solidFill>
                   <a:srgbClr val="334155"/>
                 </a:solidFill>
-                <a:latin typeface="Segoe UI"/>
+                <a:latin typeface="Segoe UI" panose="020B0502040204020203"/>
               </a:defRPr>
             </a:pPr>
             <a:r>
@@ -8179,7 +8022,7 @@
           <p:nvPr/>
         </p:nvPicPr>
         <p:blipFill>
-          <a:blip r:embed="rId2"/>
+          <a:blip r:embed="rId1"/>
           <a:stretch>
             <a:fillRect/>
           </a:stretch>
@@ -8196,26 +8039,17 @@
       </p:pic>
     </p:spTree>
   </p:cSld>
-  <mc:AlternateContent xmlns:mc="http://schemas.openxmlformats.org/markup-compatibility/2006">
-    <mc:Choice xmlns:p14="http://schemas.microsoft.com/office/powerpoint/2010/main" Requires="p14">
-      <p:transition spd="slow">
-        <p:fade/>
-      </p:transition>
-    </mc:Choice>
-    <mc:Fallback>
-      <p:transition spd="slow">
-        <p:fade/>
-      </p:transition>
-    </mc:Fallback>
-  </mc:AlternateContent>
   <p:clrMapOvr>
     <a:masterClrMapping/>
   </p:clrMapOvr>
+  <p:transition spd="slow">
+    <p:fade/>
+  </p:transition>
 </p:sld>
 </file>
 
 <file path=ppt/slides/slide8.xml><?xml version="1.0" encoding="utf-8"?>
-<p:sld xmlns:a="http://schemas.openxmlformats.org/drawingml/2006/main" xmlns:p="http://schemas.openxmlformats.org/presentationml/2006/main" xmlns:r="http://schemas.openxmlformats.org/officeDocument/2006/relationships">
+<p:sld xmlns:a="http://schemas.openxmlformats.org/drawingml/2006/main" xmlns:r="http://schemas.openxmlformats.org/officeDocument/2006/relationships" xmlns:p="http://schemas.openxmlformats.org/presentationml/2006/main">
   <p:cSld>
     <p:bg>
       <p:bgPr>
@@ -8259,7 +8093,7 @@
                 <a:solidFill>
                   <a:srgbClr val="06B6D4"/>
                 </a:solidFill>
-                <a:latin typeface="Segoe UI"/>
+                <a:latin typeface="Segoe UI" panose="020B0502040204020203"/>
               </a:defRPr>
             </a:pPr>
             <a:r>
@@ -8319,7 +8153,7 @@
                 <a:solidFill>
                   <a:srgbClr val="054A75"/>
                 </a:solidFill>
-                <a:latin typeface="Segoe UI"/>
+                <a:latin typeface="Segoe UI" panose="020B0502040204020203"/>
               </a:defRPr>
             </a:pPr>
             <a:r>
@@ -8355,7 +8189,7 @@
                 <a:solidFill>
                   <a:srgbClr val="64748B"/>
                 </a:solidFill>
-                <a:latin typeface="Segoe UI"/>
+                <a:latin typeface="Segoe UI" panose="020B0502040204020203"/>
               </a:defRPr>
             </a:pPr>
             <a:r>
@@ -8394,7 +8228,7 @@
                 <a:solidFill>
                   <a:srgbClr val="06B6D4"/>
                 </a:solidFill>
-                <a:latin typeface="Segoe UI"/>
+                <a:latin typeface="Segoe UI" panose="020B0502040204020203"/>
               </a:defRPr>
             </a:pPr>
             <a:r>
@@ -8410,7 +8244,7 @@
                 <a:solidFill>
                   <a:srgbClr val="334155"/>
                 </a:solidFill>
-                <a:latin typeface="Segoe UI"/>
+                <a:latin typeface="Segoe UI" panose="020B0502040204020203"/>
               </a:defRPr>
             </a:pPr>
             <a:r>
@@ -8426,7 +8260,7 @@
                 <a:solidFill>
                   <a:srgbClr val="334155"/>
                 </a:solidFill>
-                <a:latin typeface="Segoe UI"/>
+                <a:latin typeface="Segoe UI" panose="020B0502040204020203"/>
               </a:defRPr>
             </a:pPr>
             <a:r>
@@ -8442,7 +8276,7 @@
                 <a:solidFill>
                   <a:srgbClr val="334155"/>
                 </a:solidFill>
-                <a:latin typeface="Segoe UI"/>
+                <a:latin typeface="Segoe UI" panose="020B0502040204020203"/>
               </a:defRPr>
             </a:pPr>
             <a:r>
@@ -8458,7 +8292,7 @@
                 <a:solidFill>
                   <a:srgbClr val="334155"/>
                 </a:solidFill>
-                <a:latin typeface="Segoe UI"/>
+                <a:latin typeface="Segoe UI" panose="020B0502040204020203"/>
               </a:defRPr>
             </a:pPr>
             <a:r>
@@ -8476,7 +8310,7 @@
           <p:nvPr/>
         </p:nvPicPr>
         <p:blipFill>
-          <a:blip r:embed="rId2"/>
+          <a:blip r:embed="rId1"/>
           <a:stretch>
             <a:fillRect/>
           </a:stretch>
@@ -8493,26 +8327,17 @@
       </p:pic>
     </p:spTree>
   </p:cSld>
-  <mc:AlternateContent xmlns:mc="http://schemas.openxmlformats.org/markup-compatibility/2006">
-    <mc:Choice xmlns:p14="http://schemas.microsoft.com/office/powerpoint/2010/main" Requires="p14">
-      <p:transition spd="slow">
-        <p:wipe dir="l"/>
-      </p:transition>
-    </mc:Choice>
-    <mc:Fallback>
-      <p:transition spd="slow">
-        <p:wipe dir="l"/>
-      </p:transition>
-    </mc:Fallback>
-  </mc:AlternateContent>
   <p:clrMapOvr>
     <a:masterClrMapping/>
   </p:clrMapOvr>
+  <p:transition spd="slow">
+    <p:wipe/>
+  </p:transition>
 </p:sld>
 </file>
 
 <file path=ppt/slides/slide9.xml><?xml version="1.0" encoding="utf-8"?>
-<p:sld xmlns:a="http://schemas.openxmlformats.org/drawingml/2006/main" xmlns:p="http://schemas.openxmlformats.org/presentationml/2006/main" xmlns:r="http://schemas.openxmlformats.org/officeDocument/2006/relationships">
+<p:sld xmlns:a="http://schemas.openxmlformats.org/drawingml/2006/main" xmlns:r="http://schemas.openxmlformats.org/officeDocument/2006/relationships" xmlns:p="http://schemas.openxmlformats.org/presentationml/2006/main">
   <p:cSld>
     <p:bg>
       <p:bgPr>
@@ -8556,7 +8381,7 @@
                 <a:solidFill>
                   <a:srgbClr val="06B6D4"/>
                 </a:solidFill>
-                <a:latin typeface="Segoe UI"/>
+                <a:latin typeface="Segoe UI" panose="020B0502040204020203"/>
               </a:defRPr>
             </a:pPr>
             <a:r>
@@ -8616,7 +8441,7 @@
                 <a:solidFill>
                   <a:srgbClr val="054A75"/>
                 </a:solidFill>
-                <a:latin typeface="Segoe UI"/>
+                <a:latin typeface="Segoe UI" panose="020B0502040204020203"/>
               </a:defRPr>
             </a:pPr>
             <a:r>
@@ -8652,7 +8477,7 @@
                 <a:solidFill>
                   <a:srgbClr val="64748B"/>
                 </a:solidFill>
-                <a:latin typeface="Segoe UI"/>
+                <a:latin typeface="Segoe UI" panose="020B0502040204020203"/>
               </a:defRPr>
             </a:pPr>
             <a:r>
@@ -8691,7 +8516,7 @@
                 <a:solidFill>
                   <a:srgbClr val="06B6D4"/>
                 </a:solidFill>
-                <a:latin typeface="Segoe UI"/>
+                <a:latin typeface="Segoe UI" panose="020B0502040204020203"/>
               </a:defRPr>
             </a:pPr>
             <a:r>
@@ -8707,7 +8532,7 @@
                 <a:solidFill>
                   <a:srgbClr val="334155"/>
                 </a:solidFill>
-                <a:latin typeface="Segoe UI"/>
+                <a:latin typeface="Segoe UI" panose="020B0502040204020203"/>
               </a:defRPr>
             </a:pPr>
             <a:r>
@@ -8723,7 +8548,7 @@
                 <a:solidFill>
                   <a:srgbClr val="334155"/>
                 </a:solidFill>
-                <a:latin typeface="Segoe UI"/>
+                <a:latin typeface="Segoe UI" panose="020B0502040204020203"/>
               </a:defRPr>
             </a:pPr>
             <a:r>
@@ -8739,7 +8564,7 @@
                 <a:solidFill>
                   <a:srgbClr val="334155"/>
                 </a:solidFill>
-                <a:latin typeface="Segoe UI"/>
+                <a:latin typeface="Segoe UI" panose="020B0502040204020203"/>
               </a:defRPr>
             </a:pPr>
             <a:r>
@@ -8755,7 +8580,7 @@
                 <a:solidFill>
                   <a:srgbClr val="334155"/>
                 </a:solidFill>
-                <a:latin typeface="Segoe UI"/>
+                <a:latin typeface="Segoe UI" panose="020B0502040204020203"/>
               </a:defRPr>
             </a:pPr>
             <a:r>
@@ -8773,7 +8598,7 @@
           <p:nvPr/>
         </p:nvPicPr>
         <p:blipFill>
-          <a:blip r:embed="rId2"/>
+          <a:blip r:embed="rId1"/>
           <a:stretch>
             <a:fillRect/>
           </a:stretch>
@@ -8790,21 +8615,12 @@
       </p:pic>
     </p:spTree>
   </p:cSld>
-  <mc:AlternateContent xmlns:mc="http://schemas.openxmlformats.org/markup-compatibility/2006">
-    <mc:Choice xmlns:p14="http://schemas.microsoft.com/office/powerpoint/2010/main" Requires="p14">
-      <p:transition spd="slow">
-        <p:fade/>
-      </p:transition>
-    </mc:Choice>
-    <mc:Fallback>
-      <p:transition spd="slow">
-        <p:fade/>
-      </p:transition>
-    </mc:Fallback>
-  </mc:AlternateContent>
   <p:clrMapOvr>
     <a:masterClrMapping/>
   </p:clrMapOvr>
+  <p:transition spd="slow">
+    <p:fade/>
+  </p:transition>
 </p:sld>
 </file>
 
@@ -9124,6 +8940,10 @@
       </a:style>
     </a:lnDef>
   </a:objectDefaults>
-  <a:extraClrSchemeLst/>
+  <a:extLst>
+    <a:ext uri="{05A4C25C-085E-4340-85A3-A5531E510DB2}">
+      <thm15:themeFamily xmlns:thm15="http://schemas.microsoft.com/office/thememl/2012/main" name="Office Theme" id="{62F939B6-93AF-4DB8-9C6B-D6C7DFDC589F}" vid="{4A3C46E8-61CC-4603-A589-7422A47A8E4A}"/>
+    </a:ext>
+  </a:extLst>
 </a:theme>
 </file>